--- a/output/presentations/AutoAD_Project_Presentation_updated.pptx
+++ b/output/presentations/AutoAD_Project_Presentation_updated.pptx
@@ -45,9 +45,11 @@
     <p:sldId id="293" r:id="rId39"/>
     <p:sldId id="294" r:id="rId40"/>
     <p:sldId id="295" r:id="rId41"/>
+    <p:sldId id="296" r:id="rId42"/>
+    <p:sldId id="297" r:id="rId43"/>
   </p:sldIdLst>
   <p:notesMasterIdLst>
-    <p:notesMasterId r:id="rId42"/>
+    <p:notesMasterId r:id="rId44"/>
   </p:notesMasterIdLst>
   <p:sldSz cx="12192000" cy="6858000"/>
   <p:notesSz cx="6858000" cy="12192000"/>
@@ -1597,7 +1599,7 @@
           <a:p>
             <a:r>
               <a:rPr lang="en-US" dirty="0"/>
-              <a:t>Explain that the real evaluation is now broader than Annthyroid. KDD has native attack labels. Glass and Pendigits are not native anomaly datasets, so rare-class or one-vs-rest labels are derived for benchmark-style evaluation.</a:t>
+              <a:t>Explain that the real evaluation now uses ten datasets. Some have native anomaly-like labels, while others are derived rare-class tasks. This is still imperfect, but it gives the selector more cross-dataset evidence than the earlier five-dataset run.</a:t>
             </a:r>
             <a:endParaRPr lang="en-US" dirty="0"/>
           </a:p>
@@ -1685,7 +1687,7 @@
           <a:p>
             <a:r>
               <a:rPr lang="en-US" dirty="0"/>
-              <a:t>These are the right comparisons because they are widely used unsupervised anomaly detection methods and are also components inside AutoAD.</a:t>
+              <a:t>These are the right comparisons because they are widely used unsupervised anomaly detection methods and are also components inside AutoAD. KNN distance is included as an additional neighborhood baseline.</a:t>
             </a:r>
             <a:endParaRPr lang="en-US" dirty="0"/>
           </a:p>
@@ -2301,7 +2303,7 @@
           <a:p>
             <a:r>
               <a:rPr lang="en-US" dirty="0"/>
-              <a:t>Explain the overfitting concern directly. The model was improved after seeing failure cases, so broader validation was necessary. The broader results are more realistic and more defensible.</a:t>
+              <a:t>Explain the overfitting concern directly. Broader validation is necessary because small synthetic tests can make a detector look stronger than it is. The broader results are more realistic and more defensible.</a:t>
             </a:r>
             <a:endParaRPr lang="en-US" dirty="0"/>
           </a:p>
@@ -2565,7 +2567,7 @@
           <a:p>
             <a:r>
               <a:rPr lang="en-US" dirty="0"/>
-              <a:t>Transition to the newest experiment. Emphasize that leave-one-dataset-out is stricter than in-sample evaluation because each dataset is hidden while the selector is trained.</a:t>
+              <a:t>Transition to the current experiment. Emphasize that the model now includes KNN distance and overfitting diagnostics, so the correct question is how it behaves on the expanded benchmark.</a:t>
             </a:r>
             <a:endParaRPr lang="en-US" dirty="0"/>
           </a:p>
@@ -2741,7 +2743,7 @@
           <a:p>
             <a:r>
               <a:rPr lang="en-US" dirty="0"/>
-              <a:t>Read the bars carefully. Learned in-sample F1 is about 0.317, nearly the same as the previous meta-selected result. But under leave-one-dataset-out it falls to 0.066, below the previous LODO result of 0.133.</a:t>
+              <a:t>Summarize the project changes without focusing on branch history. The current model includes KNN distance, a train/test stability diagnostic, ten-dataset LODO validation, and clearer result reporting.</a:t>
             </a:r>
             <a:endParaRPr lang="en-US" dirty="0"/>
           </a:p>
@@ -2829,7 +2831,7 @@
           <a:p>
             <a:r>
               <a:rPr lang="en-US" dirty="0"/>
-              <a:t>The learned selector also drops in ROC-AUC under LODO: about 0.528. This means the problem is not just thresholding. The selector is sometimes choosing the wrong score source for the hidden dataset.</a:t>
+              <a:t>OCSVM leads with 0.205 average F1. Autoencoder and LSTM are next, then the AutoAD ensemble at 0.128. KNN distance is useful but not the strongest standalone source.</a:t>
             </a:r>
             <a:endParaRPr lang="en-US" dirty="0"/>
           </a:p>
@@ -2917,7 +2919,7 @@
           <a:p>
             <a:r>
               <a:rPr lang="en-US" dirty="0"/>
-              <a:t>Use this slide to explain the failure pattern. KDD HTTP is the clearest issue: it was matched to Annthyroid and selected the ensemble, but the dataset strongly favors OCSVM or freeze-style behavior. Pendigits also moved to LOF and lost performance.</a:t>
+              <a:t>Explain that this is not a full supervised train-once test-once evaluation. It is a practical diagnostic: source and threshold chosen on train splits transfer reasonably to held-out splits on Annthyroid.</a:t>
             </a:r>
             <a:endParaRPr lang="en-US" dirty="0"/>
           </a:p>
@@ -3005,7 +3007,7 @@
           <a:p>
             <a:r>
               <a:rPr lang="en-US" dirty="0"/>
-              <a:t>Be direct here. The right scientific conclusion is not that the learned selector is useless. It is that the current training set is too small. The method needs more datasets before it can be trusted.</a:t>
+              <a:t>Focus on the current benchmark. The learned selector reaches 0.127 F1, close to the AutoAD ensemble average, but OCSVM remains the strongest overall baseline at 0.205 F1.</a:t>
             </a:r>
             <a:endParaRPr lang="en-US" dirty="0"/>
           </a:p>
@@ -3093,7 +3095,7 @@
           <a:p>
             <a:r>
               <a:rPr lang="en-US" dirty="0"/>
-              <a:t>This is the practical recommendation. The code path is valuable, but the model selection policy should not switch to learned selector by default until it improves on LODO.</a:t>
+              <a:t>LODO selector ROC-AUC is about 0.573. OCSVM, Autoencoder, LSTM, and the AutoAD ensemble all rank anomalies more strongly on average, so thresholding is not the only remaining weakness.</a:t>
             </a:r>
             <a:endParaRPr lang="en-US" dirty="0"/>
           </a:p>
@@ -3181,7 +3183,7 @@
           <a:p>
             <a:r>
               <a:rPr lang="en-US" dirty="0"/>
-              <a:t>Mention that these commands reproduce the main reported results. The CSV outputs are written under the results folder.</a:t>
+              <a:t>Use this slide to explain the failure pattern. KDD HTTP is the clearest issue: it was matched to Annthyroid and selected the ensemble, but the dataset strongly favors OCSVM or freeze-style behavior. Pendigits also moved to LOF and lost performance.</a:t>
             </a:r>
             <a:endParaRPr lang="en-US" dirty="0"/>
           </a:p>
@@ -3269,7 +3271,7 @@
           <a:p>
             <a:r>
               <a:rPr lang="en-US" dirty="0"/>
-              <a:t>The previous next step was to build dataset-aware meta-selection. That is now implemented. The updated next step is to feed it enough real validation datasets and tune it against leave-one-dataset-out performance.</a:t>
+              <a:t>Be direct here. KNN distance improves coverage on some datasets, especially Annthyroid-style data. But OCSVM still has the best average F1 across the expanded benchmark.</a:t>
             </a:r>
             <a:endParaRPr lang="en-US" dirty="0"/>
           </a:p>
@@ -3357,7 +3359,7 @@
           <a:p>
             <a:r>
               <a:rPr lang="en-US" dirty="0"/>
-              <a:t>Close with the updated balanced message. The project satisfies the core proposal as a self-configuring hybrid anomaly detector with evaluation. The new learned-selector experiment is valuable because it shows what still does not generalize.</a:t>
+              <a:t>This is the practical recommendation. The current project is stronger, but the evidence still says the selector is not universally better than popular models.</a:t>
             </a:r>
             <a:endParaRPr lang="en-US" dirty="0"/>
           </a:p>
@@ -3533,7 +3535,7 @@
           <a:p>
             <a:r>
               <a:rPr lang="en-US" dirty="0"/>
-              <a:t>End by inviting questions. If asked what matters most, answer: the pipeline works, synthetic results are promising, calibration helps, but the broader real-data test shows that generalization is the main challenge.</a:t>
+              <a:t>The previous next step was to build dataset-aware meta-selection. That is now implemented. The updated next step is to feed it enough real validation datasets and tune it against leave-one-dataset-out performance.</a:t>
             </a:r>
             <a:endParaRPr lang="en-US" dirty="0"/>
           </a:p>
@@ -3557,6 +3559,182 @@
             <a:fld id="{F7021451-1387-4CA6-816F-3879F97B5CBC}" type="slidenum">
               <a:rPr lang="en-US"/>
               <a:t>40</a:t>
+            </a:fld>
+            <a:endParaRPr lang="en-US"/>
+          </a:p>
+        </p:txBody>
+      </p:sp>
+    </p:spTree>
+    <p:extLst>
+      <p:ext uri="{BB962C8B-B14F-4D97-AF65-F5344CB8AC3E}">
+        <p14:creationId xmlns:p14="http://schemas.microsoft.com/office/powerpoint/2010/main" val="1024086991"/>
+      </p:ext>
+    </p:extLst>
+  </p:cSld>
+  <p:clrMapOvr>
+    <a:masterClrMapping/>
+  </p:clrMapOvr>
+</p:notes>
+</file>
+
+<file path=ppt/notesSlides/notesSlide41.xml><?xml version="1.0" encoding="utf-8"?>
+<p:notes xmlns:a="http://schemas.openxmlformats.org/drawingml/2006/main" xmlns:r="http://schemas.openxmlformats.org/officeDocument/2006/relationships" xmlns:p="http://schemas.openxmlformats.org/presentationml/2006/main">
+  <p:cSld>
+    <p:spTree>
+      <p:nvGrpSpPr>
+        <p:cNvPr id="1" name=""/>
+        <p:cNvGrpSpPr/>
+        <p:nvPr/>
+      </p:nvGrpSpPr>
+      <p:grpSpPr>
+        <a:xfrm>
+          <a:off x="0" y="0"/>
+          <a:ext cx="0" cy="0"/>
+          <a:chOff x="0" y="0"/>
+          <a:chExt cx="0" cy="0"/>
+        </a:xfrm>
+      </p:grpSpPr>
+      <p:sp>
+        <p:nvSpPr>
+          <p:cNvPr id="2" name="Slide Image Placeholder 1"/>
+          <p:cNvSpPr>
+            <a:spLocks noGrp="1" noRot="1" noChangeAspect="1"/>
+          </p:cNvSpPr>
+          <p:nvPr>
+            <p:ph type="sldImg"/>
+          </p:nvPr>
+        </p:nvSpPr>
+        <p:spPr/>
+      </p:sp>
+      <p:sp>
+        <p:nvSpPr>
+          <p:cNvPr id="3" name="Notes Placeholder 2"/>
+          <p:cNvSpPr>
+            <a:spLocks noGrp="1"/>
+          </p:cNvSpPr>
+          <p:nvPr>
+            <p:ph type="body" idx="1"/>
+          </p:nvPr>
+        </p:nvSpPr>
+        <p:spPr/>
+        <p:txBody>
+          <a:bodyPr/>
+          <a:lstStyle/>
+          <a:p>
+            <a:r>
+              <a:rPr lang="en-US" dirty="0"/>
+              <a:t>Close with the updated balanced message. The project satisfies the core proposal as a self-configuring hybrid anomaly detector with evaluation. The current system is stronger, but the honest result is that popular baselines still remain competitive.</a:t>
+            </a:r>
+            <a:endParaRPr lang="en-US" dirty="0"/>
+          </a:p>
+        </p:txBody>
+      </p:sp>
+      <p:sp>
+        <p:nvSpPr>
+          <p:cNvPr id="4" name="Slide Number Placeholder 3"/>
+          <p:cNvSpPr>
+            <a:spLocks noGrp="1"/>
+          </p:cNvSpPr>
+          <p:nvPr>
+            <p:ph type="sldNum" sz="quarter" idx="10"/>
+          </p:nvPr>
+        </p:nvSpPr>
+        <p:spPr/>
+        <p:txBody>
+          <a:bodyPr/>
+          <a:lstStyle/>
+          <a:p>
+            <a:fld id="{F7021451-1387-4CA6-816F-3879F97B5CBC}" type="slidenum">
+              <a:rPr lang="en-US"/>
+              <a:t>41</a:t>
+            </a:fld>
+            <a:endParaRPr lang="en-US"/>
+          </a:p>
+        </p:txBody>
+      </p:sp>
+    </p:spTree>
+    <p:extLst>
+      <p:ext uri="{BB962C8B-B14F-4D97-AF65-F5344CB8AC3E}">
+        <p14:creationId xmlns:p14="http://schemas.microsoft.com/office/powerpoint/2010/main" val="1024086991"/>
+      </p:ext>
+    </p:extLst>
+  </p:cSld>
+  <p:clrMapOvr>
+    <a:masterClrMapping/>
+  </p:clrMapOvr>
+</p:notes>
+</file>
+
+<file path=ppt/notesSlides/notesSlide42.xml><?xml version="1.0" encoding="utf-8"?>
+<p:notes xmlns:a="http://schemas.openxmlformats.org/drawingml/2006/main" xmlns:r="http://schemas.openxmlformats.org/officeDocument/2006/relationships" xmlns:p="http://schemas.openxmlformats.org/presentationml/2006/main">
+  <p:cSld>
+    <p:spTree>
+      <p:nvGrpSpPr>
+        <p:cNvPr id="1" name=""/>
+        <p:cNvGrpSpPr/>
+        <p:nvPr/>
+      </p:nvGrpSpPr>
+      <p:grpSpPr>
+        <a:xfrm>
+          <a:off x="0" y="0"/>
+          <a:ext cx="0" cy="0"/>
+          <a:chOff x="0" y="0"/>
+          <a:chExt cx="0" cy="0"/>
+        </a:xfrm>
+      </p:grpSpPr>
+      <p:sp>
+        <p:nvSpPr>
+          <p:cNvPr id="2" name="Slide Image Placeholder 1"/>
+          <p:cNvSpPr>
+            <a:spLocks noGrp="1" noRot="1" noChangeAspect="1"/>
+          </p:cNvSpPr>
+          <p:nvPr>
+            <p:ph type="sldImg"/>
+          </p:nvPr>
+        </p:nvSpPr>
+        <p:spPr/>
+      </p:sp>
+      <p:sp>
+        <p:nvSpPr>
+          <p:cNvPr id="3" name="Notes Placeholder 2"/>
+          <p:cNvSpPr>
+            <a:spLocks noGrp="1"/>
+          </p:cNvSpPr>
+          <p:nvPr>
+            <p:ph type="body" idx="1"/>
+          </p:nvPr>
+        </p:nvSpPr>
+        <p:spPr/>
+        <p:txBody>
+          <a:bodyPr/>
+          <a:lstStyle/>
+          <a:p>
+            <a:r>
+              <a:rPr lang="en-US" dirty="0"/>
+              <a:t>End by inviting questions. If asked what matters most, answer: the pipeline works, synthetic results are promising, calibration helps, but the broader real-data test shows that generalization is the main challenge.</a:t>
+            </a:r>
+            <a:endParaRPr lang="en-US" dirty="0"/>
+          </a:p>
+        </p:txBody>
+      </p:sp>
+      <p:sp>
+        <p:nvSpPr>
+          <p:cNvPr id="4" name="Slide Number Placeholder 3"/>
+          <p:cNvSpPr>
+            <a:spLocks noGrp="1"/>
+          </p:cNvSpPr>
+          <p:nvPr>
+            <p:ph type="sldNum" sz="quarter" idx="10"/>
+          </p:nvPr>
+        </p:nvSpPr>
+        <p:spPr/>
+        <p:txBody>
+          <a:bodyPr/>
+          <a:lstStyle/>
+          <a:p>
+            <a:fld id="{F7021451-1387-4CA6-816F-3879F97B5CBC}" type="slidenum">
+              <a:rPr lang="en-US"/>
+              <a:t>42</a:t>
             </a:fld>
             <a:endParaRPr lang="en-US"/>
           </a:p>
@@ -3797,7 +3975,7 @@
           <a:p>
             <a:r>
               <a:rPr lang="en-US" dirty="0"/>
-              <a:t>Explain the model menu. Isolation Forest, OCSVM, and LOF are the popular baselines. Autoencoder and LSTM are optional components when the dataset is large enough.</a:t>
+              <a:t>Explain the model menu. The current system includes a KNN-distance detector, which gives the selector another neighborhood-based score source besides LOF.</a:t>
             </a:r>
             <a:endParaRPr lang="en-US" dirty="0"/>
           </a:p>
@@ -3973,7 +4151,7 @@
           <a:p>
             <a:r>
               <a:rPr lang="en-US" dirty="0"/>
-              <a:t>The important point is complementarity. A global spike, a local density break, and a temporal block may each be easier for a different detector.</a:t>
+              <a:t>The important point is complementarity. A global spike, a local density break, and a temporal block may each be easier for a different detector. KNN distance is especially useful on Annthyroid-style neighborhood anomalies.</a:t>
             </a:r>
             <a:endParaRPr lang="en-US" dirty="0"/>
           </a:p>
@@ -6384,7 +6562,7 @@
                   <a:srgbClr val="16213A"/>
                 </a:solidFill>
               </a:rPr>
-              <a:t>Candidate sources include ensemble, IForest, OCSVM, LOF, and temporal-change</a:t>
+              <a:t>Candidate sources include ensemble, IForest, OCSVM, LOF, KNN, and temporal-change</a:t>
             </a:r>
             <a:endParaRPr lang="en-US" sz="1500" dirty="0"/>
           </a:p>
@@ -9551,7 +9729,7 @@
                 <a:ea typeface="Aptos" pitchFamily="34" charset="-122"/>
                 <a:cs typeface="Aptos" pitchFamily="34" charset="-120"/>
               </a:rPr>
-              <a:t>Five labeled datasets test generalization.</a:t>
+              <a:t>Ten labeled or derived-label datasets test generalization.</a:t>
             </a:r>
             <a:endParaRPr lang="en-US" sz="1600" dirty="0"/>
           </a:p>
@@ -9614,7 +9792,7 @@
                   <a:srgbClr val="16213A"/>
                 </a:solidFill>
               </a:rPr>
-              <a:t>Annthyroid: 7,200 rows, 534 anomalies</a:t>
+              <a:t>Native labels: Annthyroid, KDD HTTP, KDD SMTP, Ionosphere</a:t>
             </a:r>
             <a:endParaRPr lang="en-US" sz="1500" dirty="0"/>
           </a:p>
@@ -9677,7 +9855,7 @@
                   <a:srgbClr val="16213A"/>
                 </a:solidFill>
               </a:rPr>
-              <a:t>KDDCup99 HTTP: 10,000-row sample, 376 attacks</a:t>
+              <a:t>Medical/classification-derived: WDBC malignant</a:t>
             </a:r>
             <a:endParaRPr lang="en-US" sz="1500" dirty="0"/>
           </a:p>
@@ -9740,7 +9918,7 @@
                   <a:srgbClr val="16213A"/>
                 </a:solidFill>
               </a:rPr>
-              <a:t>KDDCup99 SMTP: 9,571 rows, 3 attacks</a:t>
+              <a:t>Rare-class tasks: Glass, Pendigits, Wine, Ecoli, Yeast</a:t>
             </a:r>
             <a:endParaRPr lang="en-US" sz="1500" dirty="0"/>
           </a:p>
@@ -9803,7 +9981,7 @@
                   <a:srgbClr val="16213A"/>
                 </a:solidFill>
               </a:rPr>
-              <a:t>Glass and Pendigits: derived rare-class labels</a:t>
+              <a:t>Expanded LODO trains on 9 datasets and holds out 1</a:t>
             </a:r>
             <a:endParaRPr lang="en-US" sz="1500" dirty="0"/>
           </a:p>
@@ -10228,6 +10406,69 @@
                   <a:srgbClr val="16213A"/>
                 </a:solidFill>
               </a:rPr>
+              <a:t>KNN distance</a:t>
+            </a:r>
+            <a:endParaRPr lang="en-US" sz="1500" dirty="0"/>
+          </a:p>
+        </p:txBody>
+      </p:sp>
+      <p:sp>
+        <p:nvSpPr>
+          <p:cNvPr id="13" name="Shape 11"/>
+          <p:cNvSpPr/>
+          <p:nvPr/>
+        </p:nvSpPr>
+        <p:spPr>
+          <a:xfrm>
+            <a:off x="822960" y="4398264"/>
+            <a:ext cx="128016" cy="128016"/>
+          </a:xfrm>
+          <a:prstGeom prst="ellipse">
+            <a:avLst/>
+          </a:prstGeom>
+          <a:solidFill>
+            <a:srgbClr val="2563EB"/>
+          </a:solidFill>
+          <a:ln w="12700">
+            <a:solidFill>
+              <a:srgbClr val="2563EB"/>
+            </a:solidFill>
+            <a:prstDash val="solid"/>
+          </a:ln>
+        </p:spPr>
+      </p:sp>
+      <p:sp>
+        <p:nvSpPr>
+          <p:cNvPr id="14" name="Text 12"/>
+          <p:cNvSpPr/>
+          <p:nvPr/>
+        </p:nvSpPr>
+        <p:spPr>
+          <a:xfrm>
+            <a:off x="1115568" y="4325112"/>
+            <a:ext cx="7132320" cy="347472"/>
+          </a:xfrm>
+          <a:prstGeom prst="rect">
+            <a:avLst/>
+          </a:prstGeom>
+          <a:noFill/>
+          <a:ln/>
+        </p:spPr>
+        <p:txBody>
+          <a:bodyPr wrap="square" lIns="0" tIns="0" rIns="0" bIns="0" rtlCol="0" anchor="ctr">
+            <a:normAutofit/>
+          </a:bodyPr>
+          <a:lstStyle/>
+          <a:p>
+            <a:pPr indent="0" marL="0">
+              <a:buNone/>
+            </a:pPr>
+            <a:r>
+              <a:rPr lang="en-US" sz="1500" dirty="0">
+                <a:solidFill>
+                  <a:srgbClr val="16213A"/>
+                </a:solidFill>
+              </a:rPr>
               <a:t>AutoAD+ ensemble</a:t>
             </a:r>
             <a:endParaRPr lang="en-US" sz="1500" dirty="0"/>
@@ -10236,7 +10477,7 @@
       </p:sp>
       <p:sp>
         <p:nvSpPr>
-          <p:cNvPr id="13" name="Text 11"/>
+          <p:cNvPr id="15" name="Text 13"/>
           <p:cNvSpPr/>
           <p:nvPr/>
         </p:nvSpPr>
@@ -15193,7 +15434,7 @@
                   <a:srgbClr val="16213A"/>
                 </a:solidFill>
               </a:rPr>
-              <a:t>Real default</a:t>
+              <a:t>Expanded real benchmark</a:t>
             </a:r>
             <a:endParaRPr lang="en-US" sz="1150" dirty="0"/>
           </a:p>
@@ -15307,7 +15548,7 @@
                   <a:srgbClr val="16213A"/>
                 </a:solidFill>
               </a:rPr>
-              <a:t>Generalization gap remains</a:t>
+              <a:t>Popular baseline still leads</a:t>
             </a:r>
             <a:endParaRPr lang="en-US" sz="1150" dirty="0"/>
           </a:p>
@@ -15370,7 +15611,7 @@
                   <a:srgbClr val="16213A"/>
                 </a:solidFill>
               </a:rPr>
-              <a:t>Real calibrated</a:t>
+              <a:t>10-dataset LODO</a:t>
             </a:r>
             <a:endParaRPr lang="en-US" sz="1150" dirty="0"/>
           </a:p>
@@ -15408,7 +15649,7 @@
                   <a:srgbClr val="16213A"/>
                 </a:solidFill>
               </a:rPr>
-              <a:t>OCSVM</a:t>
+              <a:t>N/A</a:t>
             </a:r>
             <a:endParaRPr lang="en-US" sz="1150" dirty="0"/>
           </a:p>
@@ -15446,7 +15687,7 @@
                   <a:srgbClr val="16213A"/>
                 </a:solidFill>
               </a:rPr>
-              <a:t>2nd</a:t>
+              <a:t>0.127 F1</a:t>
             </a:r>
             <a:endParaRPr lang="en-US" sz="1150" dirty="0"/>
           </a:p>
@@ -15484,7 +15725,7 @@
                   <a:srgbClr val="16213A"/>
                 </a:solidFill>
               </a:rPr>
-              <a:t>Calibration helps, not enough</a:t>
+              <a:t>Selector works, not best yet</a:t>
             </a:r>
             <a:endParaRPr lang="en-US" sz="1150" dirty="0"/>
           </a:p>
@@ -16038,7 +16279,7 @@
                   <a:srgbClr val="FFFFFF"/>
                 </a:solidFill>
               </a:rPr>
-              <a:t>Latest Validation</a:t>
+              <a:t>Current Validation</a:t>
             </a:r>
             <a:endParaRPr lang="en-US" sz="3800" dirty="0"/>
           </a:p>
@@ -16074,7 +16315,7 @@
                   <a:srgbClr val="D8E4F8"/>
                 </a:solidFill>
               </a:rPr>
-              <a:t>The learned selector was tested with leave-one-dataset-out validation.</a:t>
+              <a:t>The current model includes a wider detector set and stronger validation.</a:t>
             </a:r>
             <a:endParaRPr lang="en-US" sz="1600" dirty="0"/>
           </a:p>
@@ -16595,7 +16836,7 @@
                 <a:ea typeface="Aptos Display" pitchFamily="34" charset="-122"/>
                 <a:cs typeface="Aptos Display" pitchFamily="34" charset="-120"/>
               </a:rPr>
-              <a:t>Updated Real F1 Comparison</a:t>
+              <a:t>Implemented Changes</a:t>
             </a:r>
             <a:endParaRPr lang="en-US" sz="2100" dirty="0"/>
           </a:p>
@@ -16636,7 +16877,7 @@
                 <a:ea typeface="Aptos" pitchFamily="34" charset="-122"/>
                 <a:cs typeface="Aptos" pitchFamily="34" charset="-120"/>
               </a:rPr>
-              <a:t>The learned selector is strong in-sample but weaker under LODO.</a:t>
+              <a:t>The current version adds stronger detector coverage and validation evidence.</a:t>
             </a:r>
             <a:endParaRPr lang="en-US" sz="1600" dirty="0"/>
           </a:p>
@@ -16644,14 +16885,39 @@
       </p:sp>
       <p:sp>
         <p:nvSpPr>
-          <p:cNvPr id="5" name="Text 3"/>
-          <p:cNvSpPr/>
-          <p:nvPr/>
-        </p:nvSpPr>
-        <p:spPr>
-          <a:xfrm>
-            <a:off x="960120" y="1847088"/>
-            <a:ext cx="1737360" cy="256032"/>
+          <p:cNvPr id="5" name="Shape 3"/>
+          <p:cNvSpPr/>
+          <p:nvPr/>
+        </p:nvSpPr>
+        <p:spPr>
+          <a:xfrm>
+            <a:off x="822960" y="1764792"/>
+            <a:ext cx="128016" cy="128016"/>
+          </a:xfrm>
+          <a:prstGeom prst="ellipse">
+            <a:avLst/>
+          </a:prstGeom>
+          <a:solidFill>
+            <a:srgbClr val="2563EB"/>
+          </a:solidFill>
+          <a:ln w="12700">
+            <a:solidFill>
+              <a:srgbClr val="2563EB"/>
+            </a:solidFill>
+            <a:prstDash val="solid"/>
+          </a:ln>
+        </p:spPr>
+      </p:sp>
+      <p:sp>
+        <p:nvSpPr>
+          <p:cNvPr id="6" name="Text 4"/>
+          <p:cNvSpPr/>
+          <p:nvPr/>
+        </p:nvSpPr>
+        <p:spPr>
+          <a:xfrm>
+            <a:off x="1115568" y="1691640"/>
+            <a:ext cx="7132320" cy="347472"/>
           </a:xfrm>
           <a:prstGeom prst="rect">
             <a:avLst/>
@@ -16669,37 +16935,37 @@
               <a:buNone/>
             </a:pPr>
             <a:r>
-              <a:rPr lang="en-US" sz="1050" dirty="0">
-                <a:solidFill>
-                  <a:srgbClr val="16213A"/>
-                </a:solidFill>
-              </a:rPr>
-              <a:t>Default AutoAD</a:t>
-            </a:r>
-            <a:endParaRPr lang="en-US" sz="1050" dirty="0"/>
-          </a:p>
-        </p:txBody>
-      </p:sp>
-      <p:sp>
-        <p:nvSpPr>
-          <p:cNvPr id="6" name="Shape 4"/>
-          <p:cNvSpPr/>
-          <p:nvPr/>
-        </p:nvSpPr>
-        <p:spPr>
-          <a:xfrm>
-            <a:off x="2834640" y="1828800"/>
-            <a:ext cx="5669280" cy="310896"/>
-          </a:xfrm>
-          <a:prstGeom prst="rect">
+              <a:rPr lang="en-US" sz="1500" dirty="0">
+                <a:solidFill>
+                  <a:srgbClr val="16213A"/>
+                </a:solidFill>
+              </a:rPr>
+              <a:t>KNN-distance detector added to the candidate model set</a:t>
+            </a:r>
+            <a:endParaRPr lang="en-US" sz="1500" dirty="0"/>
+          </a:p>
+        </p:txBody>
+      </p:sp>
+      <p:sp>
+        <p:nvSpPr>
+          <p:cNvPr id="7" name="Shape 5"/>
+          <p:cNvSpPr/>
+          <p:nvPr/>
+        </p:nvSpPr>
+        <p:spPr>
+          <a:xfrm>
+            <a:off x="822960" y="2423160"/>
+            <a:ext cx="128016" cy="128016"/>
+          </a:xfrm>
+          <a:prstGeom prst="ellipse">
             <a:avLst/>
           </a:prstGeom>
           <a:solidFill>
-            <a:srgbClr val="F4F7FB"/>
+            <a:srgbClr val="2563EB"/>
           </a:solidFill>
           <a:ln w="12700">
             <a:solidFill>
-              <a:srgbClr val="D9E2EF"/>
+              <a:srgbClr val="2563EB"/>
             </a:solidFill>
             <a:prstDash val="solid"/>
           </a:ln>
@@ -16707,24 +16973,62 @@
       </p:sp>
       <p:sp>
         <p:nvSpPr>
-          <p:cNvPr id="7" name="Shape 5"/>
-          <p:cNvSpPr/>
-          <p:nvPr/>
-        </p:nvSpPr>
-        <p:spPr>
-          <a:xfrm>
-            <a:off x="2834640" y="1828800"/>
-            <a:ext cx="202082" cy="310896"/>
-          </a:xfrm>
-          <a:prstGeom prst="rect">
+          <p:cNvPr id="8" name="Text 6"/>
+          <p:cNvSpPr/>
+          <p:nvPr/>
+        </p:nvSpPr>
+        <p:spPr>
+          <a:xfrm>
+            <a:off x="1115568" y="2350008"/>
+            <a:ext cx="7132320" cy="347472"/>
+          </a:xfrm>
+          <a:prstGeom prst="rect">
+            <a:avLst/>
+          </a:prstGeom>
+          <a:noFill/>
+          <a:ln/>
+        </p:spPr>
+        <p:txBody>
+          <a:bodyPr wrap="square" lIns="0" tIns="0" rIns="0" bIns="0" rtlCol="0" anchor="ctr">
+            <a:normAutofit/>
+          </a:bodyPr>
+          <a:lstStyle/>
+          <a:p>
+            <a:pPr indent="0" marL="0">
+              <a:buNone/>
+            </a:pPr>
+            <a:r>
+              <a:rPr lang="en-US" sz="1500" dirty="0">
+                <a:solidFill>
+                  <a:srgbClr val="16213A"/>
+                </a:solidFill>
+              </a:rPr>
+              <a:t>Train/test stability diagnostic added for overfitting checks</a:t>
+            </a:r>
+            <a:endParaRPr lang="en-US" sz="1500" dirty="0"/>
+          </a:p>
+        </p:txBody>
+      </p:sp>
+      <p:sp>
+        <p:nvSpPr>
+          <p:cNvPr id="9" name="Shape 7"/>
+          <p:cNvSpPr/>
+          <p:nvPr/>
+        </p:nvSpPr>
+        <p:spPr>
+          <a:xfrm>
+            <a:off x="822960" y="3081528"/>
+            <a:ext cx="128016" cy="128016"/>
+          </a:xfrm>
+          <a:prstGeom prst="ellipse">
             <a:avLst/>
           </a:prstGeom>
           <a:solidFill>
-            <a:srgbClr val="D97706"/>
+            <a:srgbClr val="2563EB"/>
           </a:solidFill>
           <a:ln w="12700">
             <a:solidFill>
-              <a:srgbClr val="D97706"/>
+              <a:srgbClr val="2563EB"/>
             </a:solidFill>
             <a:prstDash val="solid"/>
           </a:ln>
@@ -16732,50 +17036,14 @@
       </p:sp>
       <p:sp>
         <p:nvSpPr>
-          <p:cNvPr id="8" name="Text 6"/>
-          <p:cNvSpPr/>
-          <p:nvPr/>
-        </p:nvSpPr>
-        <p:spPr>
-          <a:xfrm>
-            <a:off x="3100730" y="1856232"/>
-            <a:ext cx="640080" cy="182880"/>
-          </a:xfrm>
-          <a:prstGeom prst="rect">
-            <a:avLst/>
-          </a:prstGeom>
-          <a:noFill/>
-          <a:ln/>
-        </p:spPr>
-        <p:txBody>
-          <a:bodyPr wrap="square" lIns="0" tIns="0" rIns="0" bIns="0" rtlCol="0" anchor="ctr"/>
-          <a:lstStyle/>
-          <a:p>
-            <a:pPr indent="0" marL="0">
-              <a:buNone/>
-            </a:pPr>
-            <a:r>
-              <a:rPr lang="en-US" sz="900" dirty="0">
-                <a:solidFill>
-                  <a:srgbClr val="16213A"/>
-                </a:solidFill>
-              </a:rPr>
-              <a:t>0.034</a:t>
-            </a:r>
-            <a:endParaRPr lang="en-US" sz="900" dirty="0"/>
-          </a:p>
-        </p:txBody>
-      </p:sp>
-      <p:sp>
-        <p:nvSpPr>
-          <p:cNvPr id="9" name="Text 7"/>
-          <p:cNvSpPr/>
-          <p:nvPr/>
-        </p:nvSpPr>
-        <p:spPr>
-          <a:xfrm>
-            <a:off x="960120" y="2450592"/>
-            <a:ext cx="1737360" cy="256032"/>
+          <p:cNvPr id="10" name="Text 8"/>
+          <p:cNvSpPr/>
+          <p:nvPr/>
+        </p:nvSpPr>
+        <p:spPr>
+          <a:xfrm>
+            <a:off x="1115568" y="3008376"/>
+            <a:ext cx="7132320" cy="347472"/>
           </a:xfrm>
           <a:prstGeom prst="rect">
             <a:avLst/>
@@ -16793,37 +17061,37 @@
               <a:buNone/>
             </a:pPr>
             <a:r>
-              <a:rPr lang="en-US" sz="1050" dirty="0">
-                <a:solidFill>
-                  <a:srgbClr val="16213A"/>
-                </a:solidFill>
-              </a:rPr>
-              <a:t>Calibrated weights</a:t>
-            </a:r>
-            <a:endParaRPr lang="en-US" sz="1050" dirty="0"/>
-          </a:p>
-        </p:txBody>
-      </p:sp>
-      <p:sp>
-        <p:nvSpPr>
-          <p:cNvPr id="10" name="Shape 8"/>
-          <p:cNvSpPr/>
-          <p:nvPr/>
-        </p:nvSpPr>
-        <p:spPr>
-          <a:xfrm>
-            <a:off x="2834640" y="2432304"/>
-            <a:ext cx="5669280" cy="310896"/>
-          </a:xfrm>
-          <a:prstGeom prst="rect">
+              <a:rPr lang="en-US" sz="1500" dirty="0">
+                <a:solidFill>
+                  <a:srgbClr val="16213A"/>
+                </a:solidFill>
+              </a:rPr>
+              <a:t>Ten-dataset LODO validation used for selector evaluation</a:t>
+            </a:r>
+            <a:endParaRPr lang="en-US" sz="1500" dirty="0"/>
+          </a:p>
+        </p:txBody>
+      </p:sp>
+      <p:sp>
+        <p:nvSpPr>
+          <p:cNvPr id="11" name="Shape 9"/>
+          <p:cNvSpPr/>
+          <p:nvPr/>
+        </p:nvSpPr>
+        <p:spPr>
+          <a:xfrm>
+            <a:off x="822960" y="3739896"/>
+            <a:ext cx="128016" cy="128016"/>
+          </a:xfrm>
+          <a:prstGeom prst="ellipse">
             <a:avLst/>
           </a:prstGeom>
           <a:solidFill>
-            <a:srgbClr val="F4F7FB"/>
+            <a:srgbClr val="2563EB"/>
           </a:solidFill>
           <a:ln w="12700">
             <a:solidFill>
-              <a:srgbClr val="D9E2EF"/>
+              <a:srgbClr val="2563EB"/>
             </a:solidFill>
             <a:prstDash val="solid"/>
           </a:ln>
@@ -16831,75 +17099,14 @@
       </p:sp>
       <p:sp>
         <p:nvSpPr>
-          <p:cNvPr id="11" name="Shape 9"/>
-          <p:cNvSpPr/>
-          <p:nvPr/>
-        </p:nvSpPr>
-        <p:spPr>
-          <a:xfrm>
-            <a:off x="2834640" y="2432304"/>
-            <a:ext cx="707288" cy="310896"/>
-          </a:xfrm>
-          <a:prstGeom prst="rect">
-            <a:avLst/>
-          </a:prstGeom>
-          <a:solidFill>
-            <a:srgbClr val="D97706"/>
-          </a:solidFill>
-          <a:ln w="12700">
-            <a:solidFill>
-              <a:srgbClr val="D97706"/>
-            </a:solidFill>
-            <a:prstDash val="solid"/>
-          </a:ln>
-        </p:spPr>
-      </p:sp>
-      <p:sp>
-        <p:nvSpPr>
           <p:cNvPr id="12" name="Text 10"/>
           <p:cNvSpPr/>
           <p:nvPr/>
         </p:nvSpPr>
         <p:spPr>
           <a:xfrm>
-            <a:off x="3605936" y="2459736"/>
-            <a:ext cx="640080" cy="182880"/>
-          </a:xfrm>
-          <a:prstGeom prst="rect">
-            <a:avLst/>
-          </a:prstGeom>
-          <a:noFill/>
-          <a:ln/>
-        </p:spPr>
-        <p:txBody>
-          <a:bodyPr wrap="square" lIns="0" tIns="0" rIns="0" bIns="0" rtlCol="0" anchor="ctr"/>
-          <a:lstStyle/>
-          <a:p>
-            <a:pPr indent="0" marL="0">
-              <a:buNone/>
-            </a:pPr>
-            <a:r>
-              <a:rPr lang="en-US" sz="900" dirty="0">
-                <a:solidFill>
-                  <a:srgbClr val="16213A"/>
-                </a:solidFill>
-              </a:rPr>
-              <a:t>0.119</a:t>
-            </a:r>
-            <a:endParaRPr lang="en-US" sz="900" dirty="0"/>
-          </a:p>
-        </p:txBody>
-      </p:sp>
-      <p:sp>
-        <p:nvSpPr>
-          <p:cNvPr id="13" name="Text 11"/>
-          <p:cNvSpPr/>
-          <p:nvPr/>
-        </p:nvSpPr>
-        <p:spPr>
-          <a:xfrm>
-            <a:off x="960120" y="3054096"/>
-            <a:ext cx="1737360" cy="256032"/>
+            <a:off x="1115568" y="3666744"/>
+            <a:ext cx="7132320" cy="347472"/>
           </a:xfrm>
           <a:prstGeom prst="rect">
             <a:avLst/>
@@ -16917,390 +17124,20 @@
               <a:buNone/>
             </a:pPr>
             <a:r>
-              <a:rPr lang="en-US" sz="1050" dirty="0">
-                <a:solidFill>
-                  <a:srgbClr val="16213A"/>
-                </a:solidFill>
-              </a:rPr>
-              <a:t>Previous LODO</a:t>
-            </a:r>
-            <a:endParaRPr lang="en-US" sz="1050" dirty="0"/>
-          </a:p>
-        </p:txBody>
-      </p:sp>
-      <p:sp>
-        <p:nvSpPr>
-          <p:cNvPr id="14" name="Shape 12"/>
-          <p:cNvSpPr/>
-          <p:nvPr/>
-        </p:nvSpPr>
-        <p:spPr>
-          <a:xfrm>
-            <a:off x="2834640" y="3035808"/>
-            <a:ext cx="5669280" cy="310896"/>
-          </a:xfrm>
-          <a:prstGeom prst="rect">
-            <a:avLst/>
-          </a:prstGeom>
-          <a:solidFill>
-            <a:srgbClr val="F4F7FB"/>
-          </a:solidFill>
-          <a:ln w="12700">
-            <a:solidFill>
-              <a:srgbClr val="D9E2EF"/>
-            </a:solidFill>
-            <a:prstDash val="solid"/>
-          </a:ln>
-        </p:spPr>
-      </p:sp>
-      <p:sp>
-        <p:nvSpPr>
-          <p:cNvPr id="15" name="Shape 13"/>
-          <p:cNvSpPr/>
-          <p:nvPr/>
-        </p:nvSpPr>
-        <p:spPr>
-          <a:xfrm>
-            <a:off x="2834640" y="3035808"/>
-            <a:ext cx="790499" cy="310896"/>
-          </a:xfrm>
-          <a:prstGeom prst="rect">
-            <a:avLst/>
-          </a:prstGeom>
-          <a:solidFill>
-            <a:srgbClr val="D97706"/>
-          </a:solidFill>
-          <a:ln w="12700">
-            <a:solidFill>
-              <a:srgbClr val="D97706"/>
-            </a:solidFill>
-            <a:prstDash val="solid"/>
-          </a:ln>
-        </p:spPr>
-      </p:sp>
-      <p:sp>
-        <p:nvSpPr>
-          <p:cNvPr id="16" name="Text 14"/>
-          <p:cNvSpPr/>
-          <p:nvPr/>
-        </p:nvSpPr>
-        <p:spPr>
-          <a:xfrm>
-            <a:off x="3689147" y="3063240"/>
-            <a:ext cx="640080" cy="182880"/>
-          </a:xfrm>
-          <a:prstGeom prst="rect">
-            <a:avLst/>
-          </a:prstGeom>
-          <a:noFill/>
-          <a:ln/>
-        </p:spPr>
-        <p:txBody>
-          <a:bodyPr wrap="square" lIns="0" tIns="0" rIns="0" bIns="0" rtlCol="0" anchor="ctr"/>
-          <a:lstStyle/>
-          <a:p>
-            <a:pPr indent="0" marL="0">
-              <a:buNone/>
-            </a:pPr>
-            <a:r>
-              <a:rPr lang="en-US" sz="900" dirty="0">
-                <a:solidFill>
-                  <a:srgbClr val="16213A"/>
-                </a:solidFill>
-              </a:rPr>
-              <a:t>0.133</a:t>
-            </a:r>
-            <a:endParaRPr lang="en-US" sz="900" dirty="0"/>
-          </a:p>
-        </p:txBody>
-      </p:sp>
-      <p:sp>
-        <p:nvSpPr>
-          <p:cNvPr id="17" name="Text 15"/>
-          <p:cNvSpPr/>
-          <p:nvPr/>
-        </p:nvSpPr>
-        <p:spPr>
-          <a:xfrm>
-            <a:off x="960120" y="3657600"/>
-            <a:ext cx="1737360" cy="256032"/>
-          </a:xfrm>
-          <a:prstGeom prst="rect">
-            <a:avLst/>
-          </a:prstGeom>
-          <a:noFill/>
-          <a:ln/>
-        </p:spPr>
-        <p:txBody>
-          <a:bodyPr wrap="square" lIns="0" tIns="0" rIns="0" bIns="0" rtlCol="0" anchor="ctr">
-            <a:normAutofit/>
-          </a:bodyPr>
-          <a:lstStyle/>
-          <a:p>
-            <a:pPr indent="0" marL="0">
-              <a:buNone/>
-            </a:pPr>
-            <a:r>
-              <a:rPr lang="en-US" sz="1050" dirty="0">
-                <a:solidFill>
-                  <a:srgbClr val="16213A"/>
-                </a:solidFill>
-              </a:rPr>
-              <a:t>Learned selector LODO</a:t>
-            </a:r>
-            <a:endParaRPr lang="en-US" sz="1050" dirty="0"/>
-          </a:p>
-        </p:txBody>
-      </p:sp>
-      <p:sp>
-        <p:nvSpPr>
-          <p:cNvPr id="18" name="Shape 16"/>
-          <p:cNvSpPr/>
-          <p:nvPr/>
-        </p:nvSpPr>
-        <p:spPr>
-          <a:xfrm>
-            <a:off x="2834640" y="3639312"/>
-            <a:ext cx="5669280" cy="310896"/>
-          </a:xfrm>
-          <a:prstGeom prst="rect">
-            <a:avLst/>
-          </a:prstGeom>
-          <a:solidFill>
-            <a:srgbClr val="F4F7FB"/>
-          </a:solidFill>
-          <a:ln w="12700">
-            <a:solidFill>
-              <a:srgbClr val="D9E2EF"/>
-            </a:solidFill>
-            <a:prstDash val="solid"/>
-          </a:ln>
-        </p:spPr>
-      </p:sp>
-      <p:sp>
-        <p:nvSpPr>
-          <p:cNvPr id="19" name="Shape 17"/>
-          <p:cNvSpPr/>
-          <p:nvPr/>
-        </p:nvSpPr>
-        <p:spPr>
-          <a:xfrm>
-            <a:off x="2834640" y="3639312"/>
-            <a:ext cx="392278" cy="310896"/>
-          </a:xfrm>
-          <a:prstGeom prst="rect">
-            <a:avLst/>
-          </a:prstGeom>
-          <a:solidFill>
-            <a:srgbClr val="D97706"/>
-          </a:solidFill>
-          <a:ln w="12700">
-            <a:solidFill>
-              <a:srgbClr val="D97706"/>
-            </a:solidFill>
-            <a:prstDash val="solid"/>
-          </a:ln>
-        </p:spPr>
-      </p:sp>
-      <p:sp>
-        <p:nvSpPr>
-          <p:cNvPr id="20" name="Text 18"/>
-          <p:cNvSpPr/>
-          <p:nvPr/>
-        </p:nvSpPr>
-        <p:spPr>
-          <a:xfrm>
-            <a:off x="3290926" y="3666744"/>
-            <a:ext cx="640080" cy="182880"/>
-          </a:xfrm>
-          <a:prstGeom prst="rect">
-            <a:avLst/>
-          </a:prstGeom>
-          <a:noFill/>
-          <a:ln/>
-        </p:spPr>
-        <p:txBody>
-          <a:bodyPr wrap="square" lIns="0" tIns="0" rIns="0" bIns="0" rtlCol="0" anchor="ctr"/>
-          <a:lstStyle/>
-          <a:p>
-            <a:pPr indent="0" marL="0">
-              <a:buNone/>
-            </a:pPr>
-            <a:r>
-              <a:rPr lang="en-US" sz="900" dirty="0">
-                <a:solidFill>
-                  <a:srgbClr val="16213A"/>
-                </a:solidFill>
-              </a:rPr>
-              <a:t>0.066</a:t>
-            </a:r>
-            <a:endParaRPr lang="en-US" sz="900" dirty="0"/>
-          </a:p>
-        </p:txBody>
-      </p:sp>
-      <p:sp>
-        <p:nvSpPr>
-          <p:cNvPr id="21" name="Text 19"/>
-          <p:cNvSpPr/>
-          <p:nvPr/>
-        </p:nvSpPr>
-        <p:spPr>
-          <a:xfrm>
-            <a:off x="960120" y="4261104"/>
-            <a:ext cx="1737360" cy="256032"/>
-          </a:xfrm>
-          <a:prstGeom prst="rect">
-            <a:avLst/>
-          </a:prstGeom>
-          <a:noFill/>
-          <a:ln/>
-        </p:spPr>
-        <p:txBody>
-          <a:bodyPr wrap="square" lIns="0" tIns="0" rIns="0" bIns="0" rtlCol="0" anchor="ctr">
-            <a:normAutofit/>
-          </a:bodyPr>
-          <a:lstStyle/>
-          <a:p>
-            <a:pPr indent="0" marL="0">
-              <a:buNone/>
-            </a:pPr>
-            <a:r>
-              <a:rPr lang="en-US" sz="1050" dirty="0">
-                <a:solidFill>
-                  <a:srgbClr val="16213A"/>
-                </a:solidFill>
-              </a:rPr>
-              <a:t>Learned in-sample</a:t>
-            </a:r>
-            <a:endParaRPr lang="en-US" sz="1050" dirty="0"/>
-          </a:p>
-        </p:txBody>
-      </p:sp>
-      <p:sp>
-        <p:nvSpPr>
-          <p:cNvPr id="22" name="Shape 20"/>
-          <p:cNvSpPr/>
-          <p:nvPr/>
-        </p:nvSpPr>
-        <p:spPr>
-          <a:xfrm>
-            <a:off x="2834640" y="4242816"/>
-            <a:ext cx="5669280" cy="310896"/>
-          </a:xfrm>
-          <a:prstGeom prst="rect">
-            <a:avLst/>
-          </a:prstGeom>
-          <a:solidFill>
-            <a:srgbClr val="F4F7FB"/>
-          </a:solidFill>
-          <a:ln w="12700">
-            <a:solidFill>
-              <a:srgbClr val="D9E2EF"/>
-            </a:solidFill>
-            <a:prstDash val="solid"/>
-          </a:ln>
-        </p:spPr>
-      </p:sp>
-      <p:sp>
-        <p:nvSpPr>
-          <p:cNvPr id="23" name="Shape 21"/>
-          <p:cNvSpPr/>
-          <p:nvPr/>
-        </p:nvSpPr>
-        <p:spPr>
-          <a:xfrm>
-            <a:off x="2834640" y="4242816"/>
-            <a:ext cx="1884121" cy="310896"/>
-          </a:xfrm>
-          <a:prstGeom prst="rect">
-            <a:avLst/>
-          </a:prstGeom>
-          <a:solidFill>
-            <a:srgbClr val="D97706"/>
-          </a:solidFill>
-          <a:ln w="12700">
-            <a:solidFill>
-              <a:srgbClr val="D97706"/>
-            </a:solidFill>
-            <a:prstDash val="solid"/>
-          </a:ln>
-        </p:spPr>
-      </p:sp>
-      <p:sp>
-        <p:nvSpPr>
-          <p:cNvPr id="24" name="Text 22"/>
-          <p:cNvSpPr/>
-          <p:nvPr/>
-        </p:nvSpPr>
-        <p:spPr>
-          <a:xfrm>
-            <a:off x="4782769" y="4270248"/>
-            <a:ext cx="640080" cy="182880"/>
-          </a:xfrm>
-          <a:prstGeom prst="rect">
-            <a:avLst/>
-          </a:prstGeom>
-          <a:noFill/>
-          <a:ln/>
-        </p:spPr>
-        <p:txBody>
-          <a:bodyPr wrap="square" lIns="0" tIns="0" rIns="0" bIns="0" rtlCol="0" anchor="ctr"/>
-          <a:lstStyle/>
-          <a:p>
-            <a:pPr indent="0" marL="0">
-              <a:buNone/>
-            </a:pPr>
-            <a:r>
-              <a:rPr lang="en-US" sz="900" dirty="0">
-                <a:solidFill>
-                  <a:srgbClr val="16213A"/>
-                </a:solidFill>
-              </a:rPr>
-              <a:t>0.317</a:t>
-            </a:r>
-            <a:endParaRPr lang="en-US" sz="900" dirty="0"/>
-          </a:p>
-        </p:txBody>
-      </p:sp>
-      <p:sp>
-        <p:nvSpPr>
-          <p:cNvPr id="25" name="Text 23"/>
-          <p:cNvSpPr/>
-          <p:nvPr/>
-        </p:nvSpPr>
-        <p:spPr>
-          <a:xfrm>
-            <a:off x="960120" y="5212080"/>
-            <a:ext cx="4937760" cy="228600"/>
-          </a:xfrm>
-          <a:prstGeom prst="rect">
-            <a:avLst/>
-          </a:prstGeom>
-          <a:noFill/>
-          <a:ln/>
-        </p:spPr>
-        <p:txBody>
-          <a:bodyPr wrap="square" lIns="0" tIns="0" rIns="0" bIns="0" rtlCol="0" anchor="ctr"/>
-          <a:lstStyle/>
-          <a:p>
-            <a:pPr indent="0" marL="0">
-              <a:buNone/>
-            </a:pPr>
-            <a:r>
-              <a:rPr lang="en-US" sz="1000" dirty="0">
-                <a:solidFill>
-                  <a:srgbClr val="5E6B7A"/>
-                </a:solidFill>
-              </a:rPr>
-              <a:t>Average F1 across five real datasets</a:t>
-            </a:r>
-            <a:endParaRPr lang="en-US" sz="1000" dirty="0"/>
-          </a:p>
-        </p:txBody>
-      </p:sp>
-      <p:sp>
-        <p:nvSpPr>
-          <p:cNvPr id="26" name="Text 24"/>
+              <a:rPr lang="en-US" sz="1500" dirty="0">
+                <a:solidFill>
+                  <a:srgbClr val="16213A"/>
+                </a:solidFill>
+              </a:rPr>
+              <a:t>Expanded result reporting for F1, ROC-AUC, and PR-AUC</a:t>
+            </a:r>
+            <a:endParaRPr lang="en-US" sz="1500" dirty="0"/>
+          </a:p>
+        </p:txBody>
+      </p:sp>
+      <p:sp>
+        <p:nvSpPr>
+          <p:cNvPr id="13" name="Text 11"/>
           <p:cNvSpPr/>
           <p:nvPr/>
         </p:nvSpPr>
@@ -17424,7 +17261,7 @@
                 <a:ea typeface="Aptos Display" pitchFamily="34" charset="-122"/>
                 <a:cs typeface="Aptos Display" pitchFamily="34" charset="-120"/>
               </a:rPr>
-              <a:t>Updated Real ROC-AUC</a:t>
+              <a:t>Current Model Ranking</a:t>
             </a:r>
             <a:endParaRPr lang="en-US" sz="2100" dirty="0"/>
           </a:p>
@@ -17465,7 +17302,7 @@
                 <a:ea typeface="Aptos" pitchFamily="34" charset="-122"/>
                 <a:cs typeface="Aptos" pitchFamily="34" charset="-120"/>
               </a:rPr>
-              <a:t>The LODO drop appears in ranking quality too.</a:t>
+              <a:t>OCSVM remains the strongest average F1 baseline.</a:t>
             </a:r>
             <a:endParaRPr lang="en-US" sz="1600" dirty="0"/>
           </a:p>
@@ -17503,7 +17340,7 @@
                   <a:srgbClr val="16213A"/>
                 </a:solidFill>
               </a:rPr>
-              <a:t>Default AutoAD</a:t>
+              <a:t>OCSVM</a:t>
             </a:r>
             <a:endParaRPr lang="en-US" sz="1050" dirty="0"/>
           </a:p>
@@ -17543,17 +17380,17 @@
         <p:spPr>
           <a:xfrm>
             <a:off x="2834640" y="1828800"/>
-            <a:ext cx="4380433" cy="310896"/>
+            <a:ext cx="1218438" cy="310896"/>
           </a:xfrm>
           <a:prstGeom prst="rect">
             <a:avLst/>
           </a:prstGeom>
           <a:solidFill>
-            <a:srgbClr val="D97706"/>
+            <a:srgbClr val="2563EB"/>
           </a:solidFill>
           <a:ln w="12700">
             <a:solidFill>
-              <a:srgbClr val="D97706"/>
+              <a:srgbClr val="2563EB"/>
             </a:solidFill>
             <a:prstDash val="solid"/>
           </a:ln>
@@ -17567,7 +17404,7 @@
         </p:nvSpPr>
         <p:spPr>
           <a:xfrm>
-            <a:off x="7279081" y="1856232"/>
+            <a:off x="4117086" y="1856232"/>
             <a:ext cx="640080" cy="182880"/>
           </a:xfrm>
           <a:prstGeom prst="rect">
@@ -17589,7 +17426,7 @@
                   <a:srgbClr val="16213A"/>
                 </a:solidFill>
               </a:rPr>
-              <a:t>0.737</a:t>
+              <a:t>0.205</a:t>
             </a:r>
             <a:endParaRPr lang="en-US" sz="900" dirty="0"/>
           </a:p>
@@ -17627,7 +17464,7 @@
                   <a:srgbClr val="16213A"/>
                 </a:solidFill>
               </a:rPr>
-              <a:t>Calibrated weights</a:t>
+              <a:t>Autoencoder</a:t>
             </a:r>
             <a:endParaRPr lang="en-US" sz="1050" dirty="0"/>
           </a:p>
@@ -17667,17 +17504,17 @@
         <p:spPr>
           <a:xfrm>
             <a:off x="2834640" y="2432304"/>
-            <a:ext cx="3601822" cy="310896"/>
+            <a:ext cx="897484" cy="310896"/>
           </a:xfrm>
           <a:prstGeom prst="rect">
             <a:avLst/>
           </a:prstGeom>
           <a:solidFill>
-            <a:srgbClr val="D97706"/>
+            <a:srgbClr val="2563EB"/>
           </a:solidFill>
           <a:ln w="12700">
             <a:solidFill>
-              <a:srgbClr val="D97706"/>
+              <a:srgbClr val="2563EB"/>
             </a:solidFill>
             <a:prstDash val="solid"/>
           </a:ln>
@@ -17691,7 +17528,7 @@
         </p:nvSpPr>
         <p:spPr>
           <a:xfrm>
-            <a:off x="6500470" y="2459736"/>
+            <a:off x="3796132" y="2459736"/>
             <a:ext cx="640080" cy="182880"/>
           </a:xfrm>
           <a:prstGeom prst="rect">
@@ -17713,7 +17550,7 @@
                   <a:srgbClr val="16213A"/>
                 </a:solidFill>
               </a:rPr>
-              <a:t>0.606</a:t>
+              <a:t>0.151</a:t>
             </a:r>
             <a:endParaRPr lang="en-US" sz="900" dirty="0"/>
           </a:p>
@@ -17751,7 +17588,7 @@
                   <a:srgbClr val="16213A"/>
                 </a:solidFill>
               </a:rPr>
-              <a:t>Previous LODO</a:t>
+              <a:t>LSTM</a:t>
             </a:r>
             <a:endParaRPr lang="en-US" sz="1050" dirty="0"/>
           </a:p>
@@ -17791,17 +17628,17 @@
         <p:spPr>
           <a:xfrm>
             <a:off x="2834640" y="3035808"/>
-            <a:ext cx="3405683" cy="310896"/>
+            <a:ext cx="891540" cy="310896"/>
           </a:xfrm>
           <a:prstGeom prst="rect">
             <a:avLst/>
           </a:prstGeom>
           <a:solidFill>
-            <a:srgbClr val="D97706"/>
+            <a:srgbClr val="2563EB"/>
           </a:solidFill>
           <a:ln w="12700">
             <a:solidFill>
-              <a:srgbClr val="D97706"/>
+              <a:srgbClr val="2563EB"/>
             </a:solidFill>
             <a:prstDash val="solid"/>
           </a:ln>
@@ -17815,7 +17652,7 @@
         </p:nvSpPr>
         <p:spPr>
           <a:xfrm>
-            <a:off x="6304331" y="3063240"/>
+            <a:off x="3790188" y="3063240"/>
             <a:ext cx="640080" cy="182880"/>
           </a:xfrm>
           <a:prstGeom prst="rect">
@@ -17837,7 +17674,7 @@
                   <a:srgbClr val="16213A"/>
                 </a:solidFill>
               </a:rPr>
-              <a:t>0.573</a:t>
+              <a:t>0.150</a:t>
             </a:r>
             <a:endParaRPr lang="en-US" sz="900" dirty="0"/>
           </a:p>
@@ -17875,7 +17712,7 @@
                   <a:srgbClr val="16213A"/>
                 </a:solidFill>
               </a:rPr>
-              <a:t>Learned selector LODO</a:t>
+              <a:t>AutoAD ensemble</a:t>
             </a:r>
             <a:endParaRPr lang="en-US" sz="1050" dirty="0"/>
           </a:p>
@@ -17915,17 +17752,17 @@
         <p:spPr>
           <a:xfrm>
             <a:off x="2834640" y="3639312"/>
-            <a:ext cx="3138221" cy="310896"/>
+            <a:ext cx="760781" cy="310896"/>
           </a:xfrm>
           <a:prstGeom prst="rect">
             <a:avLst/>
           </a:prstGeom>
           <a:solidFill>
-            <a:srgbClr val="D97706"/>
+            <a:srgbClr val="2563EB"/>
           </a:solidFill>
           <a:ln w="12700">
             <a:solidFill>
-              <a:srgbClr val="D97706"/>
+              <a:srgbClr val="2563EB"/>
             </a:solidFill>
             <a:prstDash val="solid"/>
           </a:ln>
@@ -17939,7 +17776,7 @@
         </p:nvSpPr>
         <p:spPr>
           <a:xfrm>
-            <a:off x="6036869" y="3666744"/>
+            <a:off x="3659429" y="3666744"/>
             <a:ext cx="640080" cy="182880"/>
           </a:xfrm>
           <a:prstGeom prst="rect">
@@ -17961,7 +17798,7 @@
                   <a:srgbClr val="16213A"/>
                 </a:solidFill>
               </a:rPr>
-              <a:t>0.528</a:t>
+              <a:t>0.128</a:t>
             </a:r>
             <a:endParaRPr lang="en-US" sz="900" dirty="0"/>
           </a:p>
@@ -17999,7 +17836,7 @@
                   <a:srgbClr val="16213A"/>
                 </a:solidFill>
               </a:rPr>
-              <a:t>Learned in-sample</a:t>
+              <a:t>KNN distance</a:t>
             </a:r>
             <a:endParaRPr lang="en-US" sz="1050" dirty="0"/>
           </a:p>
@@ -18039,17 +17876,17 @@
         <p:spPr>
           <a:xfrm>
             <a:off x="2834640" y="4242816"/>
-            <a:ext cx="4891583" cy="310896"/>
+            <a:ext cx="641909" cy="310896"/>
           </a:xfrm>
           <a:prstGeom prst="rect">
             <a:avLst/>
           </a:prstGeom>
           <a:solidFill>
-            <a:srgbClr val="D97706"/>
+            <a:srgbClr val="2563EB"/>
           </a:solidFill>
           <a:ln w="12700">
             <a:solidFill>
-              <a:srgbClr val="D97706"/>
+              <a:srgbClr val="2563EB"/>
             </a:solidFill>
             <a:prstDash val="solid"/>
           </a:ln>
@@ -18063,7 +17900,7 @@
         </p:nvSpPr>
         <p:spPr>
           <a:xfrm>
-            <a:off x="7790231" y="4270248"/>
+            <a:off x="3540557" y="4270248"/>
             <a:ext cx="640080" cy="182880"/>
           </a:xfrm>
           <a:prstGeom prst="rect">
@@ -18085,7 +17922,7 @@
                   <a:srgbClr val="16213A"/>
                 </a:solidFill>
               </a:rPr>
-              <a:t>0.823</a:t>
+              <a:t>0.108</a:t>
             </a:r>
             <a:endParaRPr lang="en-US" sz="900" dirty="0"/>
           </a:p>
@@ -18121,7 +17958,7 @@
                   <a:srgbClr val="5E6B7A"/>
                 </a:solidFill>
               </a:rPr>
-              <a:t>Average ROC-AUC across five real datasets</a:t>
+              <a:t>Average F1 across ten real datasets</a:t>
             </a:r>
             <a:endParaRPr lang="en-US" sz="1000" dirty="0"/>
           </a:p>
@@ -18253,7 +18090,7 @@
                 <a:ea typeface="Aptos Display" pitchFamily="34" charset="-122"/>
                 <a:cs typeface="Aptos Display" pitchFamily="34" charset="-120"/>
               </a:rPr>
-              <a:t>LODO Learned Selector Detail</a:t>
+              <a:t>Overfitting Diagnostic</a:t>
             </a:r>
             <a:endParaRPr lang="en-US" sz="2100" dirty="0"/>
           </a:p>
@@ -18294,7 +18131,7 @@
                 <a:ea typeface="Aptos" pitchFamily="34" charset="-122"/>
                 <a:cs typeface="Aptos" pitchFamily="34" charset="-120"/>
               </a:rPr>
-              <a:t>The selector often matched the held-out dataset to the wrong training profile.</a:t>
+              <a:t>The current evaluation includes a train/test stability check.</a:t>
             </a:r>
             <a:endParaRPr lang="en-US" sz="1600" dirty="0"/>
           </a:p>
@@ -18308,18 +18145,18 @@
         </p:nvSpPr>
         <p:spPr>
           <a:xfrm>
-            <a:off x="566928" y="1627632"/>
-            <a:ext cx="9098280" cy="502920"/>
-          </a:xfrm>
-          <a:prstGeom prst="rect">
+            <a:off x="822960" y="1764792"/>
+            <a:ext cx="128016" cy="128016"/>
+          </a:xfrm>
+          <a:prstGeom prst="ellipse">
             <a:avLst/>
           </a:prstGeom>
           <a:solidFill>
-            <a:srgbClr val="16213A"/>
+            <a:srgbClr val="2563EB"/>
           </a:solidFill>
           <a:ln w="12700">
             <a:solidFill>
-              <a:srgbClr val="16213A"/>
+              <a:srgbClr val="2563EB"/>
             </a:solidFill>
             <a:prstDash val="solid"/>
           </a:ln>
@@ -18333,8 +18170,8 @@
         </p:nvSpPr>
         <p:spPr>
           <a:xfrm>
-            <a:off x="685800" y="1783080"/>
-            <a:ext cx="1691640" cy="219456"/>
+            <a:off x="1115568" y="1691640"/>
+            <a:ext cx="7132320" cy="347472"/>
           </a:xfrm>
           <a:prstGeom prst="rect">
             <a:avLst/>
@@ -18352,27 +18189,52 @@
               <a:buNone/>
             </a:pPr>
             <a:r>
-              <a:rPr lang="en-US" sz="1050" b="1" dirty="0">
-                <a:solidFill>
-                  <a:srgbClr val="FFFFFF"/>
-                </a:solidFill>
-              </a:rPr>
-              <a:t>Held-out</a:t>
-            </a:r>
-            <a:endParaRPr lang="en-US" sz="1050" dirty="0"/>
-          </a:p>
-        </p:txBody>
-      </p:sp>
-      <p:sp>
-        <p:nvSpPr>
-          <p:cNvPr id="7" name="Text 5"/>
-          <p:cNvSpPr/>
-          <p:nvPr/>
-        </p:nvSpPr>
-        <p:spPr>
-          <a:xfrm>
-            <a:off x="2743200" y="1783080"/>
-            <a:ext cx="1417320" cy="219456"/>
+              <a:rPr lang="en-US" sz="1500" dirty="0">
+                <a:solidFill>
+                  <a:srgbClr val="16213A"/>
+                </a:solidFill>
+              </a:rPr>
+              <a:t>Annthyroid 500-row stratified diagnostic</a:t>
+            </a:r>
+            <a:endParaRPr lang="en-US" sz="1500" dirty="0"/>
+          </a:p>
+        </p:txBody>
+      </p:sp>
+      <p:sp>
+        <p:nvSpPr>
+          <p:cNvPr id="7" name="Shape 5"/>
+          <p:cNvSpPr/>
+          <p:nvPr/>
+        </p:nvSpPr>
+        <p:spPr>
+          <a:xfrm>
+            <a:off x="822960" y="2423160"/>
+            <a:ext cx="128016" cy="128016"/>
+          </a:xfrm>
+          <a:prstGeom prst="ellipse">
+            <a:avLst/>
+          </a:prstGeom>
+          <a:solidFill>
+            <a:srgbClr val="2563EB"/>
+          </a:solidFill>
+          <a:ln w="12700">
+            <a:solidFill>
+              <a:srgbClr val="2563EB"/>
+            </a:solidFill>
+            <a:prstDash val="solid"/>
+          </a:ln>
+        </p:spPr>
+      </p:sp>
+      <p:sp>
+        <p:nvSpPr>
+          <p:cNvPr id="8" name="Text 6"/>
+          <p:cNvSpPr/>
+          <p:nvPr/>
+        </p:nvSpPr>
+        <p:spPr>
+          <a:xfrm>
+            <a:off x="1115568" y="2350008"/>
+            <a:ext cx="7132320" cy="347472"/>
           </a:xfrm>
           <a:prstGeom prst="rect">
             <a:avLst/>
@@ -18390,27 +18252,52 @@
               <a:buNone/>
             </a:pPr>
             <a:r>
-              <a:rPr lang="en-US" sz="1050" b="1" dirty="0">
-                <a:solidFill>
-                  <a:srgbClr val="FFFFFF"/>
-                </a:solidFill>
-              </a:rPr>
-              <a:t>Selected</a:t>
-            </a:r>
-            <a:endParaRPr lang="en-US" sz="1050" dirty="0"/>
-          </a:p>
-        </p:txBody>
-      </p:sp>
-      <p:sp>
-        <p:nvSpPr>
-          <p:cNvPr id="8" name="Text 6"/>
-          <p:cNvSpPr/>
-          <p:nvPr/>
-        </p:nvSpPr>
-        <p:spPr>
-          <a:xfrm>
-            <a:off x="4572000" y="1783080"/>
-            <a:ext cx="2194560" cy="219456"/>
+              <a:rPr lang="en-US" sz="1500" dirty="0">
+                <a:solidFill>
+                  <a:srgbClr val="16213A"/>
+                </a:solidFill>
+              </a:rPr>
+              <a:t>Train F1 mean: 0.505</a:t>
+            </a:r>
+            <a:endParaRPr lang="en-US" sz="1500" dirty="0"/>
+          </a:p>
+        </p:txBody>
+      </p:sp>
+      <p:sp>
+        <p:nvSpPr>
+          <p:cNvPr id="9" name="Shape 7"/>
+          <p:cNvSpPr/>
+          <p:nvPr/>
+        </p:nvSpPr>
+        <p:spPr>
+          <a:xfrm>
+            <a:off x="822960" y="3081528"/>
+            <a:ext cx="128016" cy="128016"/>
+          </a:xfrm>
+          <a:prstGeom prst="ellipse">
+            <a:avLst/>
+          </a:prstGeom>
+          <a:solidFill>
+            <a:srgbClr val="2563EB"/>
+          </a:solidFill>
+          <a:ln w="12700">
+            <a:solidFill>
+              <a:srgbClr val="2563EB"/>
+            </a:solidFill>
+            <a:prstDash val="solid"/>
+          </a:ln>
+        </p:spPr>
+      </p:sp>
+      <p:sp>
+        <p:nvSpPr>
+          <p:cNvPr id="10" name="Text 8"/>
+          <p:cNvSpPr/>
+          <p:nvPr/>
+        </p:nvSpPr>
+        <p:spPr>
+          <a:xfrm>
+            <a:off x="1115568" y="3008376"/>
+            <a:ext cx="7132320" cy="347472"/>
           </a:xfrm>
           <a:prstGeom prst="rect">
             <a:avLst/>
@@ -18428,27 +18315,52 @@
               <a:buNone/>
             </a:pPr>
             <a:r>
-              <a:rPr lang="en-US" sz="1050" b="1" dirty="0">
-                <a:solidFill>
-                  <a:srgbClr val="FFFFFF"/>
-                </a:solidFill>
-              </a:rPr>
-              <a:t>Matched</a:t>
-            </a:r>
-            <a:endParaRPr lang="en-US" sz="1050" dirty="0"/>
-          </a:p>
-        </p:txBody>
-      </p:sp>
-      <p:sp>
-        <p:nvSpPr>
-          <p:cNvPr id="9" name="Text 7"/>
-          <p:cNvSpPr/>
-          <p:nvPr/>
-        </p:nvSpPr>
-        <p:spPr>
-          <a:xfrm>
-            <a:off x="7315200" y="1783080"/>
-            <a:ext cx="731520" cy="219456"/>
+              <a:rPr lang="en-US" sz="1500" dirty="0">
+                <a:solidFill>
+                  <a:srgbClr val="16213A"/>
+                </a:solidFill>
+              </a:rPr>
+              <a:t>Test F1 mean: 0.471</a:t>
+            </a:r>
+            <a:endParaRPr lang="en-US" sz="1500" dirty="0"/>
+          </a:p>
+        </p:txBody>
+      </p:sp>
+      <p:sp>
+        <p:nvSpPr>
+          <p:cNvPr id="11" name="Shape 9"/>
+          <p:cNvSpPr/>
+          <p:nvPr/>
+        </p:nvSpPr>
+        <p:spPr>
+          <a:xfrm>
+            <a:off x="822960" y="3739896"/>
+            <a:ext cx="128016" cy="128016"/>
+          </a:xfrm>
+          <a:prstGeom prst="ellipse">
+            <a:avLst/>
+          </a:prstGeom>
+          <a:solidFill>
+            <a:srgbClr val="2563EB"/>
+          </a:solidFill>
+          <a:ln w="12700">
+            <a:solidFill>
+              <a:srgbClr val="2563EB"/>
+            </a:solidFill>
+            <a:prstDash val="solid"/>
+          </a:ln>
+        </p:spPr>
+      </p:sp>
+      <p:sp>
+        <p:nvSpPr>
+          <p:cNvPr id="12" name="Text 10"/>
+          <p:cNvSpPr/>
+          <p:nvPr/>
+        </p:nvSpPr>
+        <p:spPr>
+          <a:xfrm>
+            <a:off x="1115568" y="3666744"/>
+            <a:ext cx="7132320" cy="347472"/>
           </a:xfrm>
           <a:prstGeom prst="rect">
             <a:avLst/>
@@ -18466,1205 +18378,20 @@
               <a:buNone/>
             </a:pPr>
             <a:r>
-              <a:rPr lang="en-US" sz="1050" b="1" dirty="0">
-                <a:solidFill>
-                  <a:srgbClr val="FFFFFF"/>
-                </a:solidFill>
-              </a:rPr>
-              <a:t>F1</a:t>
-            </a:r>
-            <a:endParaRPr lang="en-US" sz="1050" dirty="0"/>
-          </a:p>
-        </p:txBody>
-      </p:sp>
-      <p:sp>
-        <p:nvSpPr>
-          <p:cNvPr id="10" name="Text 8"/>
-          <p:cNvSpPr/>
-          <p:nvPr/>
-        </p:nvSpPr>
-        <p:spPr>
-          <a:xfrm>
-            <a:off x="8412480" y="1783080"/>
-            <a:ext cx="731520" cy="219456"/>
-          </a:xfrm>
-          <a:prstGeom prst="rect">
-            <a:avLst/>
-          </a:prstGeom>
-          <a:noFill/>
-          <a:ln/>
-        </p:spPr>
-        <p:txBody>
-          <a:bodyPr wrap="square" lIns="0" tIns="0" rIns="0" bIns="0" rtlCol="0" anchor="ctr">
-            <a:normAutofit/>
-          </a:bodyPr>
-          <a:lstStyle/>
-          <a:p>
-            <a:pPr indent="0" marL="0">
-              <a:buNone/>
-            </a:pPr>
-            <a:r>
-              <a:rPr lang="en-US" sz="1050" b="1" dirty="0">
-                <a:solidFill>
-                  <a:srgbClr val="FFFFFF"/>
-                </a:solidFill>
-              </a:rPr>
-              <a:t>ROC</a:t>
-            </a:r>
-            <a:endParaRPr lang="en-US" sz="1050" dirty="0"/>
-          </a:p>
-        </p:txBody>
-      </p:sp>
-      <p:sp>
-        <p:nvSpPr>
-          <p:cNvPr id="11" name="Shape 9"/>
-          <p:cNvSpPr/>
-          <p:nvPr/>
-        </p:nvSpPr>
-        <p:spPr>
-          <a:xfrm>
-            <a:off x="566928" y="2121408"/>
-            <a:ext cx="9098280" cy="438912"/>
-          </a:xfrm>
-          <a:prstGeom prst="rect">
-            <a:avLst/>
-          </a:prstGeom>
-          <a:solidFill>
-            <a:srgbClr val="EEF6FF"/>
-          </a:solidFill>
-          <a:ln w="12700">
-            <a:solidFill>
-              <a:srgbClr val="D9E2EF"/>
-            </a:solidFill>
-            <a:prstDash val="solid"/>
-          </a:ln>
-        </p:spPr>
-      </p:sp>
-      <p:sp>
-        <p:nvSpPr>
-          <p:cNvPr id="12" name="Text 10"/>
-          <p:cNvSpPr/>
-          <p:nvPr/>
-        </p:nvSpPr>
-        <p:spPr>
-          <a:xfrm>
-            <a:off x="685800" y="2240280"/>
-            <a:ext cx="1691640" cy="201168"/>
-          </a:xfrm>
-          <a:prstGeom prst="rect">
-            <a:avLst/>
-          </a:prstGeom>
-          <a:noFill/>
-          <a:ln/>
-        </p:spPr>
-        <p:txBody>
-          <a:bodyPr wrap="square" lIns="0" tIns="0" rIns="0" bIns="0" rtlCol="0" anchor="ctr">
-            <a:normAutofit/>
-          </a:bodyPr>
-          <a:lstStyle/>
-          <a:p>
-            <a:pPr indent="0" marL="0">
-              <a:buNone/>
-            </a:pPr>
-            <a:r>
-              <a:rPr lang="en-US" sz="1050" dirty="0">
-                <a:solidFill>
-                  <a:srgbClr val="16213A"/>
-                </a:solidFill>
-              </a:rPr>
-              <a:t>Annthyroid</a:t>
-            </a:r>
-            <a:endParaRPr lang="en-US" sz="1050" dirty="0"/>
+              <a:rPr lang="en-US" sz="1500" dirty="0">
+                <a:solidFill>
+                  <a:srgbClr val="16213A"/>
+                </a:solidFill>
+              </a:rPr>
+              <a:t>Mean gap: 0.034, no strong overfitting signal</a:t>
+            </a:r>
+            <a:endParaRPr lang="en-US" sz="1500" dirty="0"/>
           </a:p>
         </p:txBody>
       </p:sp>
       <p:sp>
         <p:nvSpPr>
           <p:cNvPr id="13" name="Text 11"/>
-          <p:cNvSpPr/>
-          <p:nvPr/>
-        </p:nvSpPr>
-        <p:spPr>
-          <a:xfrm>
-            <a:off x="2743200" y="2240280"/>
-            <a:ext cx="1417320" cy="201168"/>
-          </a:xfrm>
-          <a:prstGeom prst="rect">
-            <a:avLst/>
-          </a:prstGeom>
-          <a:noFill/>
-          <a:ln/>
-        </p:spPr>
-        <p:txBody>
-          <a:bodyPr wrap="square" lIns="0" tIns="0" rIns="0" bIns="0" rtlCol="0" anchor="ctr">
-            <a:normAutofit/>
-          </a:bodyPr>
-          <a:lstStyle/>
-          <a:p>
-            <a:pPr indent="0" marL="0">
-              <a:buNone/>
-            </a:pPr>
-            <a:r>
-              <a:rPr lang="en-US" sz="1050" dirty="0">
-                <a:solidFill>
-                  <a:srgbClr val="16213A"/>
-                </a:solidFill>
-              </a:rPr>
-              <a:t>LOF</a:t>
-            </a:r>
-            <a:endParaRPr lang="en-US" sz="1050" dirty="0"/>
-          </a:p>
-        </p:txBody>
-      </p:sp>
-      <p:sp>
-        <p:nvSpPr>
-          <p:cNvPr id="14" name="Text 12"/>
-          <p:cNvSpPr/>
-          <p:nvPr/>
-        </p:nvSpPr>
-        <p:spPr>
-          <a:xfrm>
-            <a:off x="4572000" y="2240280"/>
-            <a:ext cx="2194560" cy="201168"/>
-          </a:xfrm>
-          <a:prstGeom prst="rect">
-            <a:avLst/>
-          </a:prstGeom>
-          <a:noFill/>
-          <a:ln/>
-        </p:spPr>
-        <p:txBody>
-          <a:bodyPr wrap="square" lIns="0" tIns="0" rIns="0" bIns="0" rtlCol="0" anchor="ctr">
-            <a:normAutofit/>
-          </a:bodyPr>
-          <a:lstStyle/>
-          <a:p>
-            <a:pPr indent="0" marL="0">
-              <a:buNone/>
-            </a:pPr>
-            <a:r>
-              <a:rPr lang="en-US" sz="1050" dirty="0">
-                <a:solidFill>
-                  <a:srgbClr val="16213A"/>
-                </a:solidFill>
-              </a:rPr>
-              <a:t>Glass</a:t>
-            </a:r>
-            <a:endParaRPr lang="en-US" sz="1050" dirty="0"/>
-          </a:p>
-        </p:txBody>
-      </p:sp>
-      <p:sp>
-        <p:nvSpPr>
-          <p:cNvPr id="15" name="Text 13"/>
-          <p:cNvSpPr/>
-          <p:nvPr/>
-        </p:nvSpPr>
-        <p:spPr>
-          <a:xfrm>
-            <a:off x="7315200" y="2240280"/>
-            <a:ext cx="731520" cy="201168"/>
-          </a:xfrm>
-          <a:prstGeom prst="rect">
-            <a:avLst/>
-          </a:prstGeom>
-          <a:noFill/>
-          <a:ln/>
-        </p:spPr>
-        <p:txBody>
-          <a:bodyPr wrap="square" lIns="0" tIns="0" rIns="0" bIns="0" rtlCol="0" anchor="ctr">
-            <a:normAutofit/>
-          </a:bodyPr>
-          <a:lstStyle/>
-          <a:p>
-            <a:pPr indent="0" marL="0">
-              <a:buNone/>
-            </a:pPr>
-            <a:r>
-              <a:rPr lang="en-US" sz="1050" dirty="0">
-                <a:solidFill>
-                  <a:srgbClr val="16213A"/>
-                </a:solidFill>
-              </a:rPr>
-              <a:t>0.139</a:t>
-            </a:r>
-            <a:endParaRPr lang="en-US" sz="1050" dirty="0"/>
-          </a:p>
-        </p:txBody>
-      </p:sp>
-      <p:sp>
-        <p:nvSpPr>
-          <p:cNvPr id="16" name="Text 14"/>
-          <p:cNvSpPr/>
-          <p:nvPr/>
-        </p:nvSpPr>
-        <p:spPr>
-          <a:xfrm>
-            <a:off x="8412480" y="2240280"/>
-            <a:ext cx="731520" cy="201168"/>
-          </a:xfrm>
-          <a:prstGeom prst="rect">
-            <a:avLst/>
-          </a:prstGeom>
-          <a:noFill/>
-          <a:ln/>
-        </p:spPr>
-        <p:txBody>
-          <a:bodyPr wrap="square" lIns="0" tIns="0" rIns="0" bIns="0" rtlCol="0" anchor="ctr">
-            <a:normAutofit/>
-          </a:bodyPr>
-          <a:lstStyle/>
-          <a:p>
-            <a:pPr indent="0" marL="0">
-              <a:buNone/>
-            </a:pPr>
-            <a:r>
-              <a:rPr lang="en-US" sz="1050" dirty="0">
-                <a:solidFill>
-                  <a:srgbClr val="16213A"/>
-                </a:solidFill>
-              </a:rPr>
-              <a:t>0.693</a:t>
-            </a:r>
-            <a:endParaRPr lang="en-US" sz="1050" dirty="0"/>
-          </a:p>
-        </p:txBody>
-      </p:sp>
-      <p:sp>
-        <p:nvSpPr>
-          <p:cNvPr id="17" name="Shape 15"/>
-          <p:cNvSpPr/>
-          <p:nvPr/>
-        </p:nvSpPr>
-        <p:spPr>
-          <a:xfrm>
-            <a:off x="566928" y="2688336"/>
-            <a:ext cx="9098280" cy="438912"/>
-          </a:xfrm>
-          <a:prstGeom prst="rect">
-            <a:avLst/>
-          </a:prstGeom>
-          <a:solidFill>
-            <a:srgbClr val="F8FAFC"/>
-          </a:solidFill>
-          <a:ln w="12700">
-            <a:solidFill>
-              <a:srgbClr val="D9E2EF"/>
-            </a:solidFill>
-            <a:prstDash val="solid"/>
-          </a:ln>
-        </p:spPr>
-      </p:sp>
-      <p:sp>
-        <p:nvSpPr>
-          <p:cNvPr id="18" name="Text 16"/>
-          <p:cNvSpPr/>
-          <p:nvPr/>
-        </p:nvSpPr>
-        <p:spPr>
-          <a:xfrm>
-            <a:off x="685800" y="2807208"/>
-            <a:ext cx="1691640" cy="201168"/>
-          </a:xfrm>
-          <a:prstGeom prst="rect">
-            <a:avLst/>
-          </a:prstGeom>
-          <a:noFill/>
-          <a:ln/>
-        </p:spPr>
-        <p:txBody>
-          <a:bodyPr wrap="square" lIns="0" tIns="0" rIns="0" bIns="0" rtlCol="0" anchor="ctr">
-            <a:normAutofit/>
-          </a:bodyPr>
-          <a:lstStyle/>
-          <a:p>
-            <a:pPr indent="0" marL="0">
-              <a:buNone/>
-            </a:pPr>
-            <a:r>
-              <a:rPr lang="en-US" sz="1050" dirty="0">
-                <a:solidFill>
-                  <a:srgbClr val="16213A"/>
-                </a:solidFill>
-              </a:rPr>
-              <a:t>KDD HTTP</a:t>
-            </a:r>
-            <a:endParaRPr lang="en-US" sz="1050" dirty="0"/>
-          </a:p>
-        </p:txBody>
-      </p:sp>
-      <p:sp>
-        <p:nvSpPr>
-          <p:cNvPr id="19" name="Text 17"/>
-          <p:cNvSpPr/>
-          <p:nvPr/>
-        </p:nvSpPr>
-        <p:spPr>
-          <a:xfrm>
-            <a:off x="2743200" y="2807208"/>
-            <a:ext cx="1417320" cy="201168"/>
-          </a:xfrm>
-          <a:prstGeom prst="rect">
-            <a:avLst/>
-          </a:prstGeom>
-          <a:noFill/>
-          <a:ln/>
-        </p:spPr>
-        <p:txBody>
-          <a:bodyPr wrap="square" lIns="0" tIns="0" rIns="0" bIns="0" rtlCol="0" anchor="ctr">
-            <a:normAutofit/>
-          </a:bodyPr>
-          <a:lstStyle/>
-          <a:p>
-            <a:pPr indent="0" marL="0">
-              <a:buNone/>
-            </a:pPr>
-            <a:r>
-              <a:rPr lang="en-US" sz="1050" dirty="0">
-                <a:solidFill>
-                  <a:srgbClr val="16213A"/>
-                </a:solidFill>
-              </a:rPr>
-              <a:t>Ensemble</a:t>
-            </a:r>
-            <a:endParaRPr lang="en-US" sz="1050" dirty="0"/>
-          </a:p>
-        </p:txBody>
-      </p:sp>
-      <p:sp>
-        <p:nvSpPr>
-          <p:cNvPr id="20" name="Text 18"/>
-          <p:cNvSpPr/>
-          <p:nvPr/>
-        </p:nvSpPr>
-        <p:spPr>
-          <a:xfrm>
-            <a:off x="4572000" y="2807208"/>
-            <a:ext cx="2194560" cy="201168"/>
-          </a:xfrm>
-          <a:prstGeom prst="rect">
-            <a:avLst/>
-          </a:prstGeom>
-          <a:noFill/>
-          <a:ln/>
-        </p:spPr>
-        <p:txBody>
-          <a:bodyPr wrap="square" lIns="0" tIns="0" rIns="0" bIns="0" rtlCol="0" anchor="ctr">
-            <a:normAutofit/>
-          </a:bodyPr>
-          <a:lstStyle/>
-          <a:p>
-            <a:pPr indent="0" marL="0">
-              <a:buNone/>
-            </a:pPr>
-            <a:r>
-              <a:rPr lang="en-US" sz="1050" dirty="0">
-                <a:solidFill>
-                  <a:srgbClr val="16213A"/>
-                </a:solidFill>
-              </a:rPr>
-              <a:t>Annthyroid</a:t>
-            </a:r>
-            <a:endParaRPr lang="en-US" sz="1050" dirty="0"/>
-          </a:p>
-        </p:txBody>
-      </p:sp>
-      <p:sp>
-        <p:nvSpPr>
-          <p:cNvPr id="21" name="Text 19"/>
-          <p:cNvSpPr/>
-          <p:nvPr/>
-        </p:nvSpPr>
-        <p:spPr>
-          <a:xfrm>
-            <a:off x="7315200" y="2807208"/>
-            <a:ext cx="731520" cy="201168"/>
-          </a:xfrm>
-          <a:prstGeom prst="rect">
-            <a:avLst/>
-          </a:prstGeom>
-          <a:noFill/>
-          <a:ln/>
-        </p:spPr>
-        <p:txBody>
-          <a:bodyPr wrap="square" lIns="0" tIns="0" rIns="0" bIns="0" rtlCol="0" anchor="ctr">
-            <a:normAutofit/>
-          </a:bodyPr>
-          <a:lstStyle/>
-          <a:p>
-            <a:pPr indent="0" marL="0">
-              <a:buNone/>
-            </a:pPr>
-            <a:r>
-              <a:rPr lang="en-US" sz="1050" dirty="0">
-                <a:solidFill>
-                  <a:srgbClr val="16213A"/>
-                </a:solidFill>
-              </a:rPr>
-              <a:t>0.021</a:t>
-            </a:r>
-            <a:endParaRPr lang="en-US" sz="1050" dirty="0"/>
-          </a:p>
-        </p:txBody>
-      </p:sp>
-      <p:sp>
-        <p:nvSpPr>
-          <p:cNvPr id="22" name="Text 20"/>
-          <p:cNvSpPr/>
-          <p:nvPr/>
-        </p:nvSpPr>
-        <p:spPr>
-          <a:xfrm>
-            <a:off x="8412480" y="2807208"/>
-            <a:ext cx="731520" cy="201168"/>
-          </a:xfrm>
-          <a:prstGeom prst="rect">
-            <a:avLst/>
-          </a:prstGeom>
-          <a:noFill/>
-          <a:ln/>
-        </p:spPr>
-        <p:txBody>
-          <a:bodyPr wrap="square" lIns="0" tIns="0" rIns="0" bIns="0" rtlCol="0" anchor="ctr">
-            <a:normAutofit/>
-          </a:bodyPr>
-          <a:lstStyle/>
-          <a:p>
-            <a:pPr indent="0" marL="0">
-              <a:buNone/>
-            </a:pPr>
-            <a:r>
-              <a:rPr lang="en-US" sz="1050" dirty="0">
-                <a:solidFill>
-                  <a:srgbClr val="16213A"/>
-                </a:solidFill>
-              </a:rPr>
-              <a:t>0.040</a:t>
-            </a:r>
-            <a:endParaRPr lang="en-US" sz="1050" dirty="0"/>
-          </a:p>
-        </p:txBody>
-      </p:sp>
-      <p:sp>
-        <p:nvSpPr>
-          <p:cNvPr id="23" name="Shape 21"/>
-          <p:cNvSpPr/>
-          <p:nvPr/>
-        </p:nvSpPr>
-        <p:spPr>
-          <a:xfrm>
-            <a:off x="566928" y="3255264"/>
-            <a:ext cx="9098280" cy="438912"/>
-          </a:xfrm>
-          <a:prstGeom prst="rect">
-            <a:avLst/>
-          </a:prstGeom>
-          <a:solidFill>
-            <a:srgbClr val="EEF6FF"/>
-          </a:solidFill>
-          <a:ln w="12700">
-            <a:solidFill>
-              <a:srgbClr val="D9E2EF"/>
-            </a:solidFill>
-            <a:prstDash val="solid"/>
-          </a:ln>
-        </p:spPr>
-      </p:sp>
-      <p:sp>
-        <p:nvSpPr>
-          <p:cNvPr id="24" name="Text 22"/>
-          <p:cNvSpPr/>
-          <p:nvPr/>
-        </p:nvSpPr>
-        <p:spPr>
-          <a:xfrm>
-            <a:off x="685800" y="3374136"/>
-            <a:ext cx="1691640" cy="201168"/>
-          </a:xfrm>
-          <a:prstGeom prst="rect">
-            <a:avLst/>
-          </a:prstGeom>
-          <a:noFill/>
-          <a:ln/>
-        </p:spPr>
-        <p:txBody>
-          <a:bodyPr wrap="square" lIns="0" tIns="0" rIns="0" bIns="0" rtlCol="0" anchor="ctr">
-            <a:normAutofit/>
-          </a:bodyPr>
-          <a:lstStyle/>
-          <a:p>
-            <a:pPr indent="0" marL="0">
-              <a:buNone/>
-            </a:pPr>
-            <a:r>
-              <a:rPr lang="en-US" sz="1050" dirty="0">
-                <a:solidFill>
-                  <a:srgbClr val="16213A"/>
-                </a:solidFill>
-              </a:rPr>
-              <a:t>KDD SMTP</a:t>
-            </a:r>
-            <a:endParaRPr lang="en-US" sz="1050" dirty="0"/>
-          </a:p>
-        </p:txBody>
-      </p:sp>
-      <p:sp>
-        <p:nvSpPr>
-          <p:cNvPr id="25" name="Text 23"/>
-          <p:cNvSpPr/>
-          <p:nvPr/>
-        </p:nvSpPr>
-        <p:spPr>
-          <a:xfrm>
-            <a:off x="2743200" y="3374136"/>
-            <a:ext cx="1417320" cy="201168"/>
-          </a:xfrm>
-          <a:prstGeom prst="rect">
-            <a:avLst/>
-          </a:prstGeom>
-          <a:noFill/>
-          <a:ln/>
-        </p:spPr>
-        <p:txBody>
-          <a:bodyPr wrap="square" lIns="0" tIns="0" rIns="0" bIns="0" rtlCol="0" anchor="ctr">
-            <a:normAutofit/>
-          </a:bodyPr>
-          <a:lstStyle/>
-          <a:p>
-            <a:pPr indent="0" marL="0">
-              <a:buNone/>
-            </a:pPr>
-            <a:r>
-              <a:rPr lang="en-US" sz="1050" dirty="0">
-                <a:solidFill>
-                  <a:srgbClr val="16213A"/>
-                </a:solidFill>
-              </a:rPr>
-              <a:t>OCSVM</a:t>
-            </a:r>
-            <a:endParaRPr lang="en-US" sz="1050" dirty="0"/>
-          </a:p>
-        </p:txBody>
-      </p:sp>
-      <p:sp>
-        <p:nvSpPr>
-          <p:cNvPr id="26" name="Text 24"/>
-          <p:cNvSpPr/>
-          <p:nvPr/>
-        </p:nvSpPr>
-        <p:spPr>
-          <a:xfrm>
-            <a:off x="4572000" y="3374136"/>
-            <a:ext cx="2194560" cy="201168"/>
-          </a:xfrm>
-          <a:prstGeom prst="rect">
-            <a:avLst/>
-          </a:prstGeom>
-          <a:noFill/>
-          <a:ln/>
-        </p:spPr>
-        <p:txBody>
-          <a:bodyPr wrap="square" lIns="0" tIns="0" rIns="0" bIns="0" rtlCol="0" anchor="ctr">
-            <a:normAutofit/>
-          </a:bodyPr>
-          <a:lstStyle/>
-          <a:p>
-            <a:pPr indent="0" marL="0">
-              <a:buNone/>
-            </a:pPr>
-            <a:r>
-              <a:rPr lang="en-US" sz="1050" dirty="0">
-                <a:solidFill>
-                  <a:srgbClr val="16213A"/>
-                </a:solidFill>
-              </a:rPr>
-              <a:t>KDD HTTP</a:t>
-            </a:r>
-            <a:endParaRPr lang="en-US" sz="1050" dirty="0"/>
-          </a:p>
-        </p:txBody>
-      </p:sp>
-      <p:sp>
-        <p:nvSpPr>
-          <p:cNvPr id="27" name="Text 25"/>
-          <p:cNvSpPr/>
-          <p:nvPr/>
-        </p:nvSpPr>
-        <p:spPr>
-          <a:xfrm>
-            <a:off x="7315200" y="3374136"/>
-            <a:ext cx="731520" cy="201168"/>
-          </a:xfrm>
-          <a:prstGeom prst="rect">
-            <a:avLst/>
-          </a:prstGeom>
-          <a:noFill/>
-          <a:ln/>
-        </p:spPr>
-        <p:txBody>
-          <a:bodyPr wrap="square" lIns="0" tIns="0" rIns="0" bIns="0" rtlCol="0" anchor="ctr">
-            <a:normAutofit/>
-          </a:bodyPr>
-          <a:lstStyle/>
-          <a:p>
-            <a:pPr indent="0" marL="0">
-              <a:buNone/>
-            </a:pPr>
-            <a:r>
-              <a:rPr lang="en-US" sz="1050" dirty="0">
-                <a:solidFill>
-                  <a:srgbClr val="16213A"/>
-                </a:solidFill>
-              </a:rPr>
-              <a:t>0.011</a:t>
-            </a:r>
-            <a:endParaRPr lang="en-US" sz="1050" dirty="0"/>
-          </a:p>
-        </p:txBody>
-      </p:sp>
-      <p:sp>
-        <p:nvSpPr>
-          <p:cNvPr id="28" name="Text 26"/>
-          <p:cNvSpPr/>
-          <p:nvPr/>
-        </p:nvSpPr>
-        <p:spPr>
-          <a:xfrm>
-            <a:off x="8412480" y="3374136"/>
-            <a:ext cx="731520" cy="201168"/>
-          </a:xfrm>
-          <a:prstGeom prst="rect">
-            <a:avLst/>
-          </a:prstGeom>
-          <a:noFill/>
-          <a:ln/>
-        </p:spPr>
-        <p:txBody>
-          <a:bodyPr wrap="square" lIns="0" tIns="0" rIns="0" bIns="0" rtlCol="0" anchor="ctr">
-            <a:normAutofit/>
-          </a:bodyPr>
-          <a:lstStyle/>
-          <a:p>
-            <a:pPr indent="0" marL="0">
-              <a:buNone/>
-            </a:pPr>
-            <a:r>
-              <a:rPr lang="en-US" sz="1050" dirty="0">
-                <a:solidFill>
-                  <a:srgbClr val="16213A"/>
-                </a:solidFill>
-              </a:rPr>
-              <a:t>0.702</a:t>
-            </a:r>
-            <a:endParaRPr lang="en-US" sz="1050" dirty="0"/>
-          </a:p>
-        </p:txBody>
-      </p:sp>
-      <p:sp>
-        <p:nvSpPr>
-          <p:cNvPr id="29" name="Shape 27"/>
-          <p:cNvSpPr/>
-          <p:nvPr/>
-        </p:nvSpPr>
-        <p:spPr>
-          <a:xfrm>
-            <a:off x="566928" y="3822192"/>
-            <a:ext cx="9098280" cy="438912"/>
-          </a:xfrm>
-          <a:prstGeom prst="rect">
-            <a:avLst/>
-          </a:prstGeom>
-          <a:solidFill>
-            <a:srgbClr val="F8FAFC"/>
-          </a:solidFill>
-          <a:ln w="12700">
-            <a:solidFill>
-              <a:srgbClr val="D9E2EF"/>
-            </a:solidFill>
-            <a:prstDash val="solid"/>
-          </a:ln>
-        </p:spPr>
-      </p:sp>
-      <p:sp>
-        <p:nvSpPr>
-          <p:cNvPr id="30" name="Text 28"/>
-          <p:cNvSpPr/>
-          <p:nvPr/>
-        </p:nvSpPr>
-        <p:spPr>
-          <a:xfrm>
-            <a:off x="685800" y="3941064"/>
-            <a:ext cx="1691640" cy="201168"/>
-          </a:xfrm>
-          <a:prstGeom prst="rect">
-            <a:avLst/>
-          </a:prstGeom>
-          <a:noFill/>
-          <a:ln/>
-        </p:spPr>
-        <p:txBody>
-          <a:bodyPr wrap="square" lIns="0" tIns="0" rIns="0" bIns="0" rtlCol="0" anchor="ctr">
-            <a:normAutofit/>
-          </a:bodyPr>
-          <a:lstStyle/>
-          <a:p>
-            <a:pPr indent="0" marL="0">
-              <a:buNone/>
-            </a:pPr>
-            <a:r>
-              <a:rPr lang="en-US" sz="1050" dirty="0">
-                <a:solidFill>
-                  <a:srgbClr val="16213A"/>
-                </a:solidFill>
-              </a:rPr>
-              <a:t>Glass</a:t>
-            </a:r>
-            <a:endParaRPr lang="en-US" sz="1050" dirty="0"/>
-          </a:p>
-        </p:txBody>
-      </p:sp>
-      <p:sp>
-        <p:nvSpPr>
-          <p:cNvPr id="31" name="Text 29"/>
-          <p:cNvSpPr/>
-          <p:nvPr/>
-        </p:nvSpPr>
-        <p:spPr>
-          <a:xfrm>
-            <a:off x="2743200" y="3941064"/>
-            <a:ext cx="1417320" cy="201168"/>
-          </a:xfrm>
-          <a:prstGeom prst="rect">
-            <a:avLst/>
-          </a:prstGeom>
-          <a:noFill/>
-          <a:ln/>
-        </p:spPr>
-        <p:txBody>
-          <a:bodyPr wrap="square" lIns="0" tIns="0" rIns="0" bIns="0" rtlCol="0" anchor="ctr">
-            <a:normAutofit/>
-          </a:bodyPr>
-          <a:lstStyle/>
-          <a:p>
-            <a:pPr indent="0" marL="0">
-              <a:buNone/>
-            </a:pPr>
-            <a:r>
-              <a:rPr lang="en-US" sz="1050" dirty="0">
-                <a:solidFill>
-                  <a:srgbClr val="16213A"/>
-                </a:solidFill>
-              </a:rPr>
-              <a:t>Ensemble</a:t>
-            </a:r>
-            <a:endParaRPr lang="en-US" sz="1050" dirty="0"/>
-          </a:p>
-        </p:txBody>
-      </p:sp>
-      <p:sp>
-        <p:nvSpPr>
-          <p:cNvPr id="32" name="Text 30"/>
-          <p:cNvSpPr/>
-          <p:nvPr/>
-        </p:nvSpPr>
-        <p:spPr>
-          <a:xfrm>
-            <a:off x="4572000" y="3941064"/>
-            <a:ext cx="2194560" cy="201168"/>
-          </a:xfrm>
-          <a:prstGeom prst="rect">
-            <a:avLst/>
-          </a:prstGeom>
-          <a:noFill/>
-          <a:ln/>
-        </p:spPr>
-        <p:txBody>
-          <a:bodyPr wrap="square" lIns="0" tIns="0" rIns="0" bIns="0" rtlCol="0" anchor="ctr">
-            <a:normAutofit/>
-          </a:bodyPr>
-          <a:lstStyle/>
-          <a:p>
-            <a:pPr indent="0" marL="0">
-              <a:buNone/>
-            </a:pPr>
-            <a:r>
-              <a:rPr lang="en-US" sz="1050" dirty="0">
-                <a:solidFill>
-                  <a:srgbClr val="16213A"/>
-                </a:solidFill>
-              </a:rPr>
-              <a:t>Annthyroid</a:t>
-            </a:r>
-            <a:endParaRPr lang="en-US" sz="1050" dirty="0"/>
-          </a:p>
-        </p:txBody>
-      </p:sp>
-      <p:sp>
-        <p:nvSpPr>
-          <p:cNvPr id="33" name="Text 31"/>
-          <p:cNvSpPr/>
-          <p:nvPr/>
-        </p:nvSpPr>
-        <p:spPr>
-          <a:xfrm>
-            <a:off x="7315200" y="3941064"/>
-            <a:ext cx="731520" cy="201168"/>
-          </a:xfrm>
-          <a:prstGeom prst="rect">
-            <a:avLst/>
-          </a:prstGeom>
-          <a:noFill/>
-          <a:ln/>
-        </p:spPr>
-        <p:txBody>
-          <a:bodyPr wrap="square" lIns="0" tIns="0" rIns="0" bIns="0" rtlCol="0" anchor="ctr">
-            <a:normAutofit/>
-          </a:bodyPr>
-          <a:lstStyle/>
-          <a:p>
-            <a:pPr indent="0" marL="0">
-              <a:buNone/>
-            </a:pPr>
-            <a:r>
-              <a:rPr lang="en-US" sz="1050" dirty="0">
-                <a:solidFill>
-                  <a:srgbClr val="16213A"/>
-                </a:solidFill>
-              </a:rPr>
-              <a:t>0.080</a:t>
-            </a:r>
-            <a:endParaRPr lang="en-US" sz="1050" dirty="0"/>
-          </a:p>
-        </p:txBody>
-      </p:sp>
-      <p:sp>
-        <p:nvSpPr>
-          <p:cNvPr id="34" name="Text 32"/>
-          <p:cNvSpPr/>
-          <p:nvPr/>
-        </p:nvSpPr>
-        <p:spPr>
-          <a:xfrm>
-            <a:off x="8412480" y="3941064"/>
-            <a:ext cx="731520" cy="201168"/>
-          </a:xfrm>
-          <a:prstGeom prst="rect">
-            <a:avLst/>
-          </a:prstGeom>
-          <a:noFill/>
-          <a:ln/>
-        </p:spPr>
-        <p:txBody>
-          <a:bodyPr wrap="square" lIns="0" tIns="0" rIns="0" bIns="0" rtlCol="0" anchor="ctr">
-            <a:normAutofit/>
-          </a:bodyPr>
-          <a:lstStyle/>
-          <a:p>
-            <a:pPr indent="0" marL="0">
-              <a:buNone/>
-            </a:pPr>
-            <a:r>
-              <a:rPr lang="en-US" sz="1050" dirty="0">
-                <a:solidFill>
-                  <a:srgbClr val="16213A"/>
-                </a:solidFill>
-              </a:rPr>
-              <a:t>0.694</a:t>
-            </a:r>
-            <a:endParaRPr lang="en-US" sz="1050" dirty="0"/>
-          </a:p>
-        </p:txBody>
-      </p:sp>
-      <p:sp>
-        <p:nvSpPr>
-          <p:cNvPr id="35" name="Shape 33"/>
-          <p:cNvSpPr/>
-          <p:nvPr/>
-        </p:nvSpPr>
-        <p:spPr>
-          <a:xfrm>
-            <a:off x="566928" y="4389120"/>
-            <a:ext cx="9098280" cy="438912"/>
-          </a:xfrm>
-          <a:prstGeom prst="rect">
-            <a:avLst/>
-          </a:prstGeom>
-          <a:solidFill>
-            <a:srgbClr val="EEF6FF"/>
-          </a:solidFill>
-          <a:ln w="12700">
-            <a:solidFill>
-              <a:srgbClr val="D9E2EF"/>
-            </a:solidFill>
-            <a:prstDash val="solid"/>
-          </a:ln>
-        </p:spPr>
-      </p:sp>
-      <p:sp>
-        <p:nvSpPr>
-          <p:cNvPr id="36" name="Text 34"/>
-          <p:cNvSpPr/>
-          <p:nvPr/>
-        </p:nvSpPr>
-        <p:spPr>
-          <a:xfrm>
-            <a:off x="685800" y="4507992"/>
-            <a:ext cx="1691640" cy="201168"/>
-          </a:xfrm>
-          <a:prstGeom prst="rect">
-            <a:avLst/>
-          </a:prstGeom>
-          <a:noFill/>
-          <a:ln/>
-        </p:spPr>
-        <p:txBody>
-          <a:bodyPr wrap="square" lIns="0" tIns="0" rIns="0" bIns="0" rtlCol="0" anchor="ctr">
-            <a:normAutofit/>
-          </a:bodyPr>
-          <a:lstStyle/>
-          <a:p>
-            <a:pPr indent="0" marL="0">
-              <a:buNone/>
-            </a:pPr>
-            <a:r>
-              <a:rPr lang="en-US" sz="1050" dirty="0">
-                <a:solidFill>
-                  <a:srgbClr val="16213A"/>
-                </a:solidFill>
-              </a:rPr>
-              <a:t>Pendigits</a:t>
-            </a:r>
-            <a:endParaRPr lang="en-US" sz="1050" dirty="0"/>
-          </a:p>
-        </p:txBody>
-      </p:sp>
-      <p:sp>
-        <p:nvSpPr>
-          <p:cNvPr id="37" name="Text 35"/>
-          <p:cNvSpPr/>
-          <p:nvPr/>
-        </p:nvSpPr>
-        <p:spPr>
-          <a:xfrm>
-            <a:off x="2743200" y="4507992"/>
-            <a:ext cx="1417320" cy="201168"/>
-          </a:xfrm>
-          <a:prstGeom prst="rect">
-            <a:avLst/>
-          </a:prstGeom>
-          <a:noFill/>
-          <a:ln/>
-        </p:spPr>
-        <p:txBody>
-          <a:bodyPr wrap="square" lIns="0" tIns="0" rIns="0" bIns="0" rtlCol="0" anchor="ctr">
-            <a:normAutofit/>
-          </a:bodyPr>
-          <a:lstStyle/>
-          <a:p>
-            <a:pPr indent="0" marL="0">
-              <a:buNone/>
-            </a:pPr>
-            <a:r>
-              <a:rPr lang="en-US" sz="1050" dirty="0">
-                <a:solidFill>
-                  <a:srgbClr val="16213A"/>
-                </a:solidFill>
-              </a:rPr>
-              <a:t>LOF</a:t>
-            </a:r>
-            <a:endParaRPr lang="en-US" sz="1050" dirty="0"/>
-          </a:p>
-        </p:txBody>
-      </p:sp>
-      <p:sp>
-        <p:nvSpPr>
-          <p:cNvPr id="38" name="Text 36"/>
-          <p:cNvSpPr/>
-          <p:nvPr/>
-        </p:nvSpPr>
-        <p:spPr>
-          <a:xfrm>
-            <a:off x="4572000" y="4507992"/>
-            <a:ext cx="2194560" cy="201168"/>
-          </a:xfrm>
-          <a:prstGeom prst="rect">
-            <a:avLst/>
-          </a:prstGeom>
-          <a:noFill/>
-          <a:ln/>
-        </p:spPr>
-        <p:txBody>
-          <a:bodyPr wrap="square" lIns="0" tIns="0" rIns="0" bIns="0" rtlCol="0" anchor="ctr">
-            <a:normAutofit/>
-          </a:bodyPr>
-          <a:lstStyle/>
-          <a:p>
-            <a:pPr indent="0" marL="0">
-              <a:buNone/>
-            </a:pPr>
-            <a:r>
-              <a:rPr lang="en-US" sz="1050" dirty="0">
-                <a:solidFill>
-                  <a:srgbClr val="16213A"/>
-                </a:solidFill>
-              </a:rPr>
-              <a:t>Glass</a:t>
-            </a:r>
-            <a:endParaRPr lang="en-US" sz="1050" dirty="0"/>
-          </a:p>
-        </p:txBody>
-      </p:sp>
-      <p:sp>
-        <p:nvSpPr>
-          <p:cNvPr id="39" name="Text 37"/>
-          <p:cNvSpPr/>
-          <p:nvPr/>
-        </p:nvSpPr>
-        <p:spPr>
-          <a:xfrm>
-            <a:off x="7315200" y="4507992"/>
-            <a:ext cx="731520" cy="201168"/>
-          </a:xfrm>
-          <a:prstGeom prst="rect">
-            <a:avLst/>
-          </a:prstGeom>
-          <a:noFill/>
-          <a:ln/>
-        </p:spPr>
-        <p:txBody>
-          <a:bodyPr wrap="square" lIns="0" tIns="0" rIns="0" bIns="0" rtlCol="0" anchor="ctr">
-            <a:normAutofit/>
-          </a:bodyPr>
-          <a:lstStyle/>
-          <a:p>
-            <a:pPr indent="0" marL="0">
-              <a:buNone/>
-            </a:pPr>
-            <a:r>
-              <a:rPr lang="en-US" sz="1050" dirty="0">
-                <a:solidFill>
-                  <a:srgbClr val="16213A"/>
-                </a:solidFill>
-              </a:rPr>
-              <a:t>0.077</a:t>
-            </a:r>
-            <a:endParaRPr lang="en-US" sz="1050" dirty="0"/>
-          </a:p>
-        </p:txBody>
-      </p:sp>
-      <p:sp>
-        <p:nvSpPr>
-          <p:cNvPr id="40" name="Text 38"/>
-          <p:cNvSpPr/>
-          <p:nvPr/>
-        </p:nvSpPr>
-        <p:spPr>
-          <a:xfrm>
-            <a:off x="8412480" y="4507992"/>
-            <a:ext cx="731520" cy="201168"/>
-          </a:xfrm>
-          <a:prstGeom prst="rect">
-            <a:avLst/>
-          </a:prstGeom>
-          <a:noFill/>
-          <a:ln/>
-        </p:spPr>
-        <p:txBody>
-          <a:bodyPr wrap="square" lIns="0" tIns="0" rIns="0" bIns="0" rtlCol="0" anchor="ctr">
-            <a:normAutofit/>
-          </a:bodyPr>
-          <a:lstStyle/>
-          <a:p>
-            <a:pPr indent="0" marL="0">
-              <a:buNone/>
-            </a:pPr>
-            <a:r>
-              <a:rPr lang="en-US" sz="1050" dirty="0">
-                <a:solidFill>
-                  <a:srgbClr val="16213A"/>
-                </a:solidFill>
-              </a:rPr>
-              <a:t>0.512</a:t>
-            </a:r>
-            <a:endParaRPr lang="en-US" sz="1050" dirty="0"/>
-          </a:p>
-        </p:txBody>
-      </p:sp>
-      <p:sp>
-        <p:nvSpPr>
-          <p:cNvPr id="41" name="Text 39"/>
-          <p:cNvSpPr/>
-          <p:nvPr/>
-        </p:nvSpPr>
-        <p:spPr>
-          <a:xfrm>
-            <a:off x="7315200" y="5349240"/>
-            <a:ext cx="2011680" cy="256032"/>
-          </a:xfrm>
-          <a:prstGeom prst="rect">
-            <a:avLst/>
-          </a:prstGeom>
-          <a:noFill/>
-          <a:ln/>
-        </p:spPr>
-        <p:txBody>
-          <a:bodyPr wrap="square" lIns="0" tIns="0" rIns="0" bIns="0" rtlCol="0" anchor="ctr"/>
-          <a:lstStyle/>
-          <a:p>
-            <a:pPr indent="0" marL="0">
-              <a:buNone/>
-            </a:pPr>
-            <a:r>
-              <a:rPr lang="en-US" sz="1300" b="1" dirty="0">
-                <a:solidFill>
-                  <a:srgbClr val="DC2626"/>
-                </a:solidFill>
-              </a:rPr>
-              <a:t>Average LODO F1: 0.066</a:t>
-            </a:r>
-            <a:endParaRPr lang="en-US" sz="1300" dirty="0"/>
-          </a:p>
-        </p:txBody>
-      </p:sp>
-      <p:sp>
-        <p:nvSpPr>
-          <p:cNvPr id="42" name="Text 40"/>
-          <p:cNvSpPr/>
-          <p:nvPr/>
-        </p:nvSpPr>
-        <p:spPr>
-          <a:xfrm>
-            <a:off x="594360" y="5715000"/>
-            <a:ext cx="7863840" cy="274320"/>
-          </a:xfrm>
-          <a:prstGeom prst="rect">
-            <a:avLst/>
-          </a:prstGeom>
-          <a:noFill/>
-          <a:ln/>
-        </p:spPr>
-        <p:txBody>
-          <a:bodyPr wrap="square" lIns="0" tIns="0" rIns="0" bIns="0" rtlCol="0" anchor="ctr"/>
-          <a:lstStyle/>
-          <a:p>
-            <a:pPr indent="0" marL="0">
-              <a:buNone/>
-            </a:pPr>
-            <a:r>
-              <a:rPr lang="en-US" sz="1150" dirty="0">
-                <a:solidFill>
-                  <a:srgbClr val="5E6B7A"/>
-                </a:solidFill>
-              </a:rPr>
-              <a:t>Signal: the learned selector currently overfits the five-dataset validation set.</a:t>
-            </a:r>
-            <a:endParaRPr lang="en-US" sz="1150" dirty="0"/>
-          </a:p>
-        </p:txBody>
-      </p:sp>
-      <p:sp>
-        <p:nvSpPr>
-          <p:cNvPr id="43" name="Text 41"/>
           <p:cNvSpPr/>
           <p:nvPr/>
         </p:nvSpPr>
@@ -19788,7 +18515,7 @@
                 <a:ea typeface="Aptos Display" pitchFamily="34" charset="-122"/>
                 <a:cs typeface="Aptos Display" pitchFamily="34" charset="-120"/>
               </a:rPr>
-              <a:t>What The New Result Means</a:t>
+              <a:t>Updated Real F1 Comparison</a:t>
             </a:r>
             <a:endParaRPr lang="en-US" sz="2100" dirty="0"/>
           </a:p>
@@ -19829,7 +18556,7 @@
                 <a:ea typeface="Aptos" pitchFamily="34" charset="-122"/>
                 <a:cs typeface="Aptos" pitchFamily="34" charset="-120"/>
               </a:rPr>
-              <a:t>The implementation improved the pipeline, but the experiment disproved the improvement claim.</a:t>
+              <a:t>The learned selector reaches 0.127 F1 on 10-dataset LODO.</a:t>
             </a:r>
             <a:endParaRPr lang="en-US" sz="1600" dirty="0"/>
           </a:p>
@@ -19837,24 +18564,62 @@
       </p:sp>
       <p:sp>
         <p:nvSpPr>
-          <p:cNvPr id="5" name="Shape 3"/>
-          <p:cNvSpPr/>
-          <p:nvPr/>
-        </p:nvSpPr>
-        <p:spPr>
-          <a:xfrm>
-            <a:off x="822960" y="1764792"/>
-            <a:ext cx="128016" cy="128016"/>
-          </a:xfrm>
-          <a:prstGeom prst="ellipse">
+          <p:cNvPr id="5" name="Text 3"/>
+          <p:cNvSpPr/>
+          <p:nvPr/>
+        </p:nvSpPr>
+        <p:spPr>
+          <a:xfrm>
+            <a:off x="960120" y="1847088"/>
+            <a:ext cx="1737360" cy="256032"/>
+          </a:xfrm>
+          <a:prstGeom prst="rect">
+            <a:avLst/>
+          </a:prstGeom>
+          <a:noFill/>
+          <a:ln/>
+        </p:spPr>
+        <p:txBody>
+          <a:bodyPr wrap="square" lIns="0" tIns="0" rIns="0" bIns="0" rtlCol="0" anchor="ctr">
+            <a:normAutofit/>
+          </a:bodyPr>
+          <a:lstStyle/>
+          <a:p>
+            <a:pPr indent="0" marL="0">
+              <a:buNone/>
+            </a:pPr>
+            <a:r>
+              <a:rPr lang="en-US" sz="1050" dirty="0">
+                <a:solidFill>
+                  <a:srgbClr val="16213A"/>
+                </a:solidFill>
+              </a:rPr>
+              <a:t>LODO selector</a:t>
+            </a:r>
+            <a:endParaRPr lang="en-US" sz="1050" dirty="0"/>
+          </a:p>
+        </p:txBody>
+      </p:sp>
+      <p:sp>
+        <p:nvSpPr>
+          <p:cNvPr id="6" name="Shape 4"/>
+          <p:cNvSpPr/>
+          <p:nvPr/>
+        </p:nvSpPr>
+        <p:spPr>
+          <a:xfrm>
+            <a:off x="2834640" y="1828800"/>
+            <a:ext cx="5669280" cy="310896"/>
+          </a:xfrm>
+          <a:prstGeom prst="rect">
             <a:avLst/>
           </a:prstGeom>
           <a:solidFill>
-            <a:srgbClr val="2563EB"/>
+            <a:srgbClr val="F4F7FB"/>
           </a:solidFill>
           <a:ln w="12700">
             <a:solidFill>
-              <a:srgbClr val="2563EB"/>
+              <a:srgbClr val="D9E2EF"/>
             </a:solidFill>
             <a:prstDash val="solid"/>
           </a:ln>
@@ -19862,14 +18627,75 @@
       </p:sp>
       <p:sp>
         <p:nvSpPr>
-          <p:cNvPr id="6" name="Text 4"/>
-          <p:cNvSpPr/>
-          <p:nvPr/>
-        </p:nvSpPr>
-        <p:spPr>
-          <a:xfrm>
-            <a:off x="1115568" y="1691640"/>
-            <a:ext cx="7132320" cy="347472"/>
+          <p:cNvPr id="7" name="Shape 5"/>
+          <p:cNvSpPr/>
+          <p:nvPr/>
+        </p:nvSpPr>
+        <p:spPr>
+          <a:xfrm>
+            <a:off x="2834640" y="1828800"/>
+            <a:ext cx="754837" cy="310896"/>
+          </a:xfrm>
+          <a:prstGeom prst="rect">
+            <a:avLst/>
+          </a:prstGeom>
+          <a:solidFill>
+            <a:srgbClr val="D97706"/>
+          </a:solidFill>
+          <a:ln w="12700">
+            <a:solidFill>
+              <a:srgbClr val="D97706"/>
+            </a:solidFill>
+            <a:prstDash val="solid"/>
+          </a:ln>
+        </p:spPr>
+      </p:sp>
+      <p:sp>
+        <p:nvSpPr>
+          <p:cNvPr id="8" name="Text 6"/>
+          <p:cNvSpPr/>
+          <p:nvPr/>
+        </p:nvSpPr>
+        <p:spPr>
+          <a:xfrm>
+            <a:off x="3653485" y="1856232"/>
+            <a:ext cx="640080" cy="182880"/>
+          </a:xfrm>
+          <a:prstGeom prst="rect">
+            <a:avLst/>
+          </a:prstGeom>
+          <a:noFill/>
+          <a:ln/>
+        </p:spPr>
+        <p:txBody>
+          <a:bodyPr wrap="square" lIns="0" tIns="0" rIns="0" bIns="0" rtlCol="0" anchor="ctr"/>
+          <a:lstStyle/>
+          <a:p>
+            <a:pPr indent="0" marL="0">
+              <a:buNone/>
+            </a:pPr>
+            <a:r>
+              <a:rPr lang="en-US" sz="900" dirty="0">
+                <a:solidFill>
+                  <a:srgbClr val="16213A"/>
+                </a:solidFill>
+              </a:rPr>
+              <a:t>0.127</a:t>
+            </a:r>
+            <a:endParaRPr lang="en-US" sz="900" dirty="0"/>
+          </a:p>
+        </p:txBody>
+      </p:sp>
+      <p:sp>
+        <p:nvSpPr>
+          <p:cNvPr id="9" name="Text 7"/>
+          <p:cNvSpPr/>
+          <p:nvPr/>
+        </p:nvSpPr>
+        <p:spPr>
+          <a:xfrm>
+            <a:off x="960120" y="2450592"/>
+            <a:ext cx="1737360" cy="256032"/>
           </a:xfrm>
           <a:prstGeom prst="rect">
             <a:avLst/>
@@ -19887,37 +18713,37 @@
               <a:buNone/>
             </a:pPr>
             <a:r>
-              <a:rPr lang="en-US" sz="1500" dirty="0">
-                <a:solidFill>
-                  <a:srgbClr val="16213A"/>
-                </a:solidFill>
-              </a:rPr>
-              <a:t>The learned selector is technically working</a:t>
-            </a:r>
-            <a:endParaRPr lang="en-US" sz="1500" dirty="0"/>
-          </a:p>
-        </p:txBody>
-      </p:sp>
-      <p:sp>
-        <p:nvSpPr>
-          <p:cNvPr id="7" name="Shape 5"/>
-          <p:cNvSpPr/>
-          <p:nvPr/>
-        </p:nvSpPr>
-        <p:spPr>
-          <a:xfrm>
-            <a:off x="822960" y="2423160"/>
-            <a:ext cx="128016" cy="128016"/>
-          </a:xfrm>
-          <a:prstGeom prst="ellipse">
+              <a:rPr lang="en-US" sz="1050" dirty="0">
+                <a:solidFill>
+                  <a:srgbClr val="16213A"/>
+                </a:solidFill>
+              </a:rPr>
+              <a:t>AutoAD ensemble</a:t>
+            </a:r>
+            <a:endParaRPr lang="en-US" sz="1050" dirty="0"/>
+          </a:p>
+        </p:txBody>
+      </p:sp>
+      <p:sp>
+        <p:nvSpPr>
+          <p:cNvPr id="10" name="Shape 8"/>
+          <p:cNvSpPr/>
+          <p:nvPr/>
+        </p:nvSpPr>
+        <p:spPr>
+          <a:xfrm>
+            <a:off x="2834640" y="2432304"/>
+            <a:ext cx="5669280" cy="310896"/>
+          </a:xfrm>
+          <a:prstGeom prst="rect">
             <a:avLst/>
           </a:prstGeom>
           <a:solidFill>
-            <a:srgbClr val="2563EB"/>
+            <a:srgbClr val="F4F7FB"/>
           </a:solidFill>
           <a:ln w="12700">
             <a:solidFill>
-              <a:srgbClr val="2563EB"/>
+              <a:srgbClr val="D9E2EF"/>
             </a:solidFill>
             <a:prstDash val="solid"/>
           </a:ln>
@@ -19925,14 +18751,75 @@
       </p:sp>
       <p:sp>
         <p:nvSpPr>
-          <p:cNvPr id="8" name="Text 6"/>
-          <p:cNvSpPr/>
-          <p:nvPr/>
-        </p:nvSpPr>
-        <p:spPr>
-          <a:xfrm>
-            <a:off x="1115568" y="2350008"/>
-            <a:ext cx="7132320" cy="347472"/>
+          <p:cNvPr id="11" name="Shape 9"/>
+          <p:cNvSpPr/>
+          <p:nvPr/>
+        </p:nvSpPr>
+        <p:spPr>
+          <a:xfrm>
+            <a:off x="2834640" y="2432304"/>
+            <a:ext cx="760781" cy="310896"/>
+          </a:xfrm>
+          <a:prstGeom prst="rect">
+            <a:avLst/>
+          </a:prstGeom>
+          <a:solidFill>
+            <a:srgbClr val="D97706"/>
+          </a:solidFill>
+          <a:ln w="12700">
+            <a:solidFill>
+              <a:srgbClr val="D97706"/>
+            </a:solidFill>
+            <a:prstDash val="solid"/>
+          </a:ln>
+        </p:spPr>
+      </p:sp>
+      <p:sp>
+        <p:nvSpPr>
+          <p:cNvPr id="12" name="Text 10"/>
+          <p:cNvSpPr/>
+          <p:nvPr/>
+        </p:nvSpPr>
+        <p:spPr>
+          <a:xfrm>
+            <a:off x="3659429" y="2459736"/>
+            <a:ext cx="640080" cy="182880"/>
+          </a:xfrm>
+          <a:prstGeom prst="rect">
+            <a:avLst/>
+          </a:prstGeom>
+          <a:noFill/>
+          <a:ln/>
+        </p:spPr>
+        <p:txBody>
+          <a:bodyPr wrap="square" lIns="0" tIns="0" rIns="0" bIns="0" rtlCol="0" anchor="ctr"/>
+          <a:lstStyle/>
+          <a:p>
+            <a:pPr indent="0" marL="0">
+              <a:buNone/>
+            </a:pPr>
+            <a:r>
+              <a:rPr lang="en-US" sz="900" dirty="0">
+                <a:solidFill>
+                  <a:srgbClr val="16213A"/>
+                </a:solidFill>
+              </a:rPr>
+              <a:t>0.128</a:t>
+            </a:r>
+            <a:endParaRPr lang="en-US" sz="900" dirty="0"/>
+          </a:p>
+        </p:txBody>
+      </p:sp>
+      <p:sp>
+        <p:nvSpPr>
+          <p:cNvPr id="13" name="Text 11"/>
+          <p:cNvSpPr/>
+          <p:nvPr/>
+        </p:nvSpPr>
+        <p:spPr>
+          <a:xfrm>
+            <a:off x="960120" y="3054096"/>
+            <a:ext cx="1737360" cy="256032"/>
           </a:xfrm>
           <a:prstGeom prst="rect">
             <a:avLst/>
@@ -19950,37 +18837,37 @@
               <a:buNone/>
             </a:pPr>
             <a:r>
-              <a:rPr lang="en-US" sz="1500" dirty="0">
-                <a:solidFill>
-                  <a:srgbClr val="16213A"/>
-                </a:solidFill>
-              </a:rPr>
-              <a:t>Five real datasets are not enough to train a robust meta-model</a:t>
-            </a:r>
-            <a:endParaRPr lang="en-US" sz="1500" dirty="0"/>
-          </a:p>
-        </p:txBody>
-      </p:sp>
-      <p:sp>
-        <p:nvSpPr>
-          <p:cNvPr id="9" name="Shape 7"/>
-          <p:cNvSpPr/>
-          <p:nvPr/>
-        </p:nvSpPr>
-        <p:spPr>
-          <a:xfrm>
-            <a:off x="822960" y="3081528"/>
-            <a:ext cx="128016" cy="128016"/>
-          </a:xfrm>
-          <a:prstGeom prst="ellipse">
+              <a:rPr lang="en-US" sz="1050" dirty="0">
+                <a:solidFill>
+                  <a:srgbClr val="16213A"/>
+                </a:solidFill>
+              </a:rPr>
+              <a:t>OCSVM baseline</a:t>
+            </a:r>
+            <a:endParaRPr lang="en-US" sz="1050" dirty="0"/>
+          </a:p>
+        </p:txBody>
+      </p:sp>
+      <p:sp>
+        <p:nvSpPr>
+          <p:cNvPr id="14" name="Shape 12"/>
+          <p:cNvSpPr/>
+          <p:nvPr/>
+        </p:nvSpPr>
+        <p:spPr>
+          <a:xfrm>
+            <a:off x="2834640" y="3035808"/>
+            <a:ext cx="5669280" cy="310896"/>
+          </a:xfrm>
+          <a:prstGeom prst="rect">
             <a:avLst/>
           </a:prstGeom>
           <a:solidFill>
-            <a:srgbClr val="2563EB"/>
+            <a:srgbClr val="F4F7FB"/>
           </a:solidFill>
           <a:ln w="12700">
             <a:solidFill>
-              <a:srgbClr val="2563EB"/>
+              <a:srgbClr val="D9E2EF"/>
             </a:solidFill>
             <a:prstDash val="solid"/>
           </a:ln>
@@ -19988,14 +18875,75 @@
       </p:sp>
       <p:sp>
         <p:nvSpPr>
-          <p:cNvPr id="10" name="Text 8"/>
-          <p:cNvSpPr/>
-          <p:nvPr/>
-        </p:nvSpPr>
-        <p:spPr>
-          <a:xfrm>
-            <a:off x="1115568" y="3008376"/>
-            <a:ext cx="7132320" cy="347472"/>
+          <p:cNvPr id="15" name="Shape 13"/>
+          <p:cNvSpPr/>
+          <p:nvPr/>
+        </p:nvSpPr>
+        <p:spPr>
+          <a:xfrm>
+            <a:off x="2834640" y="3035808"/>
+            <a:ext cx="1218438" cy="310896"/>
+          </a:xfrm>
+          <a:prstGeom prst="rect">
+            <a:avLst/>
+          </a:prstGeom>
+          <a:solidFill>
+            <a:srgbClr val="D97706"/>
+          </a:solidFill>
+          <a:ln w="12700">
+            <a:solidFill>
+              <a:srgbClr val="D97706"/>
+            </a:solidFill>
+            <a:prstDash val="solid"/>
+          </a:ln>
+        </p:spPr>
+      </p:sp>
+      <p:sp>
+        <p:nvSpPr>
+          <p:cNvPr id="16" name="Text 14"/>
+          <p:cNvSpPr/>
+          <p:nvPr/>
+        </p:nvSpPr>
+        <p:spPr>
+          <a:xfrm>
+            <a:off x="4117086" y="3063240"/>
+            <a:ext cx="640080" cy="182880"/>
+          </a:xfrm>
+          <a:prstGeom prst="rect">
+            <a:avLst/>
+          </a:prstGeom>
+          <a:noFill/>
+          <a:ln/>
+        </p:spPr>
+        <p:txBody>
+          <a:bodyPr wrap="square" lIns="0" tIns="0" rIns="0" bIns="0" rtlCol="0" anchor="ctr"/>
+          <a:lstStyle/>
+          <a:p>
+            <a:pPr indent="0" marL="0">
+              <a:buNone/>
+            </a:pPr>
+            <a:r>
+              <a:rPr lang="en-US" sz="900" dirty="0">
+                <a:solidFill>
+                  <a:srgbClr val="16213A"/>
+                </a:solidFill>
+              </a:rPr>
+              <a:t>0.205</a:t>
+            </a:r>
+            <a:endParaRPr lang="en-US" sz="900" dirty="0"/>
+          </a:p>
+        </p:txBody>
+      </p:sp>
+      <p:sp>
+        <p:nvSpPr>
+          <p:cNvPr id="17" name="Text 15"/>
+          <p:cNvSpPr/>
+          <p:nvPr/>
+        </p:nvSpPr>
+        <p:spPr>
+          <a:xfrm>
+            <a:off x="960120" y="3657600"/>
+            <a:ext cx="1737360" cy="256032"/>
           </a:xfrm>
           <a:prstGeom prst="rect">
             <a:avLst/>
@@ -20013,37 +18961,37 @@
               <a:buNone/>
             </a:pPr>
             <a:r>
-              <a:rPr lang="en-US" sz="1500" dirty="0">
-                <a:solidFill>
-                  <a:srgbClr val="16213A"/>
-                </a:solidFill>
-              </a:rPr>
-              <a:t>In-sample selector scores are optimistic</a:t>
-            </a:r>
-            <a:endParaRPr lang="en-US" sz="1500" dirty="0"/>
-          </a:p>
-        </p:txBody>
-      </p:sp>
-      <p:sp>
-        <p:nvSpPr>
-          <p:cNvPr id="11" name="Shape 9"/>
-          <p:cNvSpPr/>
-          <p:nvPr/>
-        </p:nvSpPr>
-        <p:spPr>
-          <a:xfrm>
-            <a:off x="822960" y="3739896"/>
-            <a:ext cx="128016" cy="128016"/>
-          </a:xfrm>
-          <a:prstGeom prst="ellipse">
+              <a:rPr lang="en-US" sz="1050" dirty="0">
+                <a:solidFill>
+                  <a:srgbClr val="16213A"/>
+                </a:solidFill>
+              </a:rPr>
+              <a:t>Autoencoder</a:t>
+            </a:r>
+            <a:endParaRPr lang="en-US" sz="1050" dirty="0"/>
+          </a:p>
+        </p:txBody>
+      </p:sp>
+      <p:sp>
+        <p:nvSpPr>
+          <p:cNvPr id="18" name="Shape 16"/>
+          <p:cNvSpPr/>
+          <p:nvPr/>
+        </p:nvSpPr>
+        <p:spPr>
+          <a:xfrm>
+            <a:off x="2834640" y="3639312"/>
+            <a:ext cx="5669280" cy="310896"/>
+          </a:xfrm>
+          <a:prstGeom prst="rect">
             <a:avLst/>
           </a:prstGeom>
           <a:solidFill>
-            <a:srgbClr val="2563EB"/>
+            <a:srgbClr val="F4F7FB"/>
           </a:solidFill>
           <a:ln w="12700">
             <a:solidFill>
-              <a:srgbClr val="2563EB"/>
+              <a:srgbClr val="D9E2EF"/>
             </a:solidFill>
             <a:prstDash val="solid"/>
           </a:ln>
@@ -20051,14 +18999,75 @@
       </p:sp>
       <p:sp>
         <p:nvSpPr>
-          <p:cNvPr id="12" name="Text 10"/>
-          <p:cNvSpPr/>
-          <p:nvPr/>
-        </p:nvSpPr>
-        <p:spPr>
-          <a:xfrm>
-            <a:off x="1115568" y="3666744"/>
-            <a:ext cx="7132320" cy="347472"/>
+          <p:cNvPr id="19" name="Shape 17"/>
+          <p:cNvSpPr/>
+          <p:nvPr/>
+        </p:nvSpPr>
+        <p:spPr>
+          <a:xfrm>
+            <a:off x="2834640" y="3639312"/>
+            <a:ext cx="897484" cy="310896"/>
+          </a:xfrm>
+          <a:prstGeom prst="rect">
+            <a:avLst/>
+          </a:prstGeom>
+          <a:solidFill>
+            <a:srgbClr val="D97706"/>
+          </a:solidFill>
+          <a:ln w="12700">
+            <a:solidFill>
+              <a:srgbClr val="D97706"/>
+            </a:solidFill>
+            <a:prstDash val="solid"/>
+          </a:ln>
+        </p:spPr>
+      </p:sp>
+      <p:sp>
+        <p:nvSpPr>
+          <p:cNvPr id="20" name="Text 18"/>
+          <p:cNvSpPr/>
+          <p:nvPr/>
+        </p:nvSpPr>
+        <p:spPr>
+          <a:xfrm>
+            <a:off x="3796132" y="3666744"/>
+            <a:ext cx="640080" cy="182880"/>
+          </a:xfrm>
+          <a:prstGeom prst="rect">
+            <a:avLst/>
+          </a:prstGeom>
+          <a:noFill/>
+          <a:ln/>
+        </p:spPr>
+        <p:txBody>
+          <a:bodyPr wrap="square" lIns="0" tIns="0" rIns="0" bIns="0" rtlCol="0" anchor="ctr"/>
+          <a:lstStyle/>
+          <a:p>
+            <a:pPr indent="0" marL="0">
+              <a:buNone/>
+            </a:pPr>
+            <a:r>
+              <a:rPr lang="en-US" sz="900" dirty="0">
+                <a:solidFill>
+                  <a:srgbClr val="16213A"/>
+                </a:solidFill>
+              </a:rPr>
+              <a:t>0.151</a:t>
+            </a:r>
+            <a:endParaRPr lang="en-US" sz="900" dirty="0"/>
+          </a:p>
+        </p:txBody>
+      </p:sp>
+      <p:sp>
+        <p:nvSpPr>
+          <p:cNvPr id="21" name="Text 19"/>
+          <p:cNvSpPr/>
+          <p:nvPr/>
+        </p:nvSpPr>
+        <p:spPr>
+          <a:xfrm>
+            <a:off x="960120" y="4261104"/>
+            <a:ext cx="1737360" cy="256032"/>
           </a:xfrm>
           <a:prstGeom prst="rect">
             <a:avLst/>
@@ -20076,20 +19085,142 @@
               <a:buNone/>
             </a:pPr>
             <a:r>
-              <a:rPr lang="en-US" sz="1500" dirty="0">
-                <a:solidFill>
-                  <a:srgbClr val="16213A"/>
-                </a:solidFill>
-              </a:rPr>
-              <a:t>LODO should be the headline real-data metric</a:t>
-            </a:r>
-            <a:endParaRPr lang="en-US" sz="1500" dirty="0"/>
-          </a:p>
-        </p:txBody>
-      </p:sp>
-      <p:sp>
-        <p:nvSpPr>
-          <p:cNvPr id="13" name="Text 11"/>
+              <a:rPr lang="en-US" sz="1050" dirty="0">
+                <a:solidFill>
+                  <a:srgbClr val="16213A"/>
+                </a:solidFill>
+              </a:rPr>
+              <a:t>LSTM</a:t>
+            </a:r>
+            <a:endParaRPr lang="en-US" sz="1050" dirty="0"/>
+          </a:p>
+        </p:txBody>
+      </p:sp>
+      <p:sp>
+        <p:nvSpPr>
+          <p:cNvPr id="22" name="Shape 20"/>
+          <p:cNvSpPr/>
+          <p:nvPr/>
+        </p:nvSpPr>
+        <p:spPr>
+          <a:xfrm>
+            <a:off x="2834640" y="4242816"/>
+            <a:ext cx="5669280" cy="310896"/>
+          </a:xfrm>
+          <a:prstGeom prst="rect">
+            <a:avLst/>
+          </a:prstGeom>
+          <a:solidFill>
+            <a:srgbClr val="F4F7FB"/>
+          </a:solidFill>
+          <a:ln w="12700">
+            <a:solidFill>
+              <a:srgbClr val="D9E2EF"/>
+            </a:solidFill>
+            <a:prstDash val="solid"/>
+          </a:ln>
+        </p:spPr>
+      </p:sp>
+      <p:sp>
+        <p:nvSpPr>
+          <p:cNvPr id="23" name="Shape 21"/>
+          <p:cNvSpPr/>
+          <p:nvPr/>
+        </p:nvSpPr>
+        <p:spPr>
+          <a:xfrm>
+            <a:off x="2834640" y="4242816"/>
+            <a:ext cx="891540" cy="310896"/>
+          </a:xfrm>
+          <a:prstGeom prst="rect">
+            <a:avLst/>
+          </a:prstGeom>
+          <a:solidFill>
+            <a:srgbClr val="D97706"/>
+          </a:solidFill>
+          <a:ln w="12700">
+            <a:solidFill>
+              <a:srgbClr val="D97706"/>
+            </a:solidFill>
+            <a:prstDash val="solid"/>
+          </a:ln>
+        </p:spPr>
+      </p:sp>
+      <p:sp>
+        <p:nvSpPr>
+          <p:cNvPr id="24" name="Text 22"/>
+          <p:cNvSpPr/>
+          <p:nvPr/>
+        </p:nvSpPr>
+        <p:spPr>
+          <a:xfrm>
+            <a:off x="3790188" y="4270248"/>
+            <a:ext cx="640080" cy="182880"/>
+          </a:xfrm>
+          <a:prstGeom prst="rect">
+            <a:avLst/>
+          </a:prstGeom>
+          <a:noFill/>
+          <a:ln/>
+        </p:spPr>
+        <p:txBody>
+          <a:bodyPr wrap="square" lIns="0" tIns="0" rIns="0" bIns="0" rtlCol="0" anchor="ctr"/>
+          <a:lstStyle/>
+          <a:p>
+            <a:pPr indent="0" marL="0">
+              <a:buNone/>
+            </a:pPr>
+            <a:r>
+              <a:rPr lang="en-US" sz="900" dirty="0">
+                <a:solidFill>
+                  <a:srgbClr val="16213A"/>
+                </a:solidFill>
+              </a:rPr>
+              <a:t>0.150</a:t>
+            </a:r>
+            <a:endParaRPr lang="en-US" sz="900" dirty="0"/>
+          </a:p>
+        </p:txBody>
+      </p:sp>
+      <p:sp>
+        <p:nvSpPr>
+          <p:cNvPr id="25" name="Text 23"/>
+          <p:cNvSpPr/>
+          <p:nvPr/>
+        </p:nvSpPr>
+        <p:spPr>
+          <a:xfrm>
+            <a:off x="960120" y="5212080"/>
+            <a:ext cx="4937760" cy="228600"/>
+          </a:xfrm>
+          <a:prstGeom prst="rect">
+            <a:avLst/>
+          </a:prstGeom>
+          <a:noFill/>
+          <a:ln/>
+        </p:spPr>
+        <p:txBody>
+          <a:bodyPr wrap="square" lIns="0" tIns="0" rIns="0" bIns="0" rtlCol="0" anchor="ctr"/>
+          <a:lstStyle/>
+          <a:p>
+            <a:pPr indent="0" marL="0">
+              <a:buNone/>
+            </a:pPr>
+            <a:r>
+              <a:rPr lang="en-US" sz="1000" dirty="0">
+                <a:solidFill>
+                  <a:srgbClr val="5E6B7A"/>
+                </a:solidFill>
+              </a:rPr>
+              <a:t>Average F1 across ten real datasets</a:t>
+            </a:r>
+            <a:endParaRPr lang="en-US" sz="1000" dirty="0"/>
+          </a:p>
+        </p:txBody>
+      </p:sp>
+      <p:sp>
+        <p:nvSpPr>
+          <p:cNvPr id="26" name="Text 24"/>
           <p:cNvSpPr/>
           <p:nvPr/>
         </p:nvSpPr>
@@ -20213,7 +19344,7 @@
                 <a:ea typeface="Aptos Display" pitchFamily="34" charset="-122"/>
                 <a:cs typeface="Aptos Display" pitchFamily="34" charset="-120"/>
               </a:rPr>
-              <a:t>Updated Engineering Decision</a:t>
+              <a:t>Updated Real ROC-AUC</a:t>
             </a:r>
             <a:endParaRPr lang="en-US" sz="2100" dirty="0"/>
           </a:p>
@@ -20254,7 +19385,7 @@
                 <a:ea typeface="Aptos" pitchFamily="34" charset="-122"/>
                 <a:cs typeface="Aptos" pitchFamily="34" charset="-120"/>
               </a:rPr>
-              <a:t>Keep the learned selector, but do not present it as the best model yet.</a:t>
+              <a:t>The learned selector has weaker ranking quality than the strongest baselines.</a:t>
             </a:r>
             <a:endParaRPr lang="en-US" sz="1600" dirty="0"/>
           </a:p>
@@ -20262,24 +19393,62 @@
       </p:sp>
       <p:sp>
         <p:nvSpPr>
-          <p:cNvPr id="5" name="Shape 3"/>
-          <p:cNvSpPr/>
-          <p:nvPr/>
-        </p:nvSpPr>
-        <p:spPr>
-          <a:xfrm>
-            <a:off x="822960" y="1764792"/>
-            <a:ext cx="128016" cy="128016"/>
-          </a:xfrm>
-          <a:prstGeom prst="ellipse">
+          <p:cNvPr id="5" name="Text 3"/>
+          <p:cNvSpPr/>
+          <p:nvPr/>
+        </p:nvSpPr>
+        <p:spPr>
+          <a:xfrm>
+            <a:off x="960120" y="1847088"/>
+            <a:ext cx="1737360" cy="256032"/>
+          </a:xfrm>
+          <a:prstGeom prst="rect">
+            <a:avLst/>
+          </a:prstGeom>
+          <a:noFill/>
+          <a:ln/>
+        </p:spPr>
+        <p:txBody>
+          <a:bodyPr wrap="square" lIns="0" tIns="0" rIns="0" bIns="0" rtlCol="0" anchor="ctr">
+            <a:normAutofit/>
+          </a:bodyPr>
+          <a:lstStyle/>
+          <a:p>
+            <a:pPr indent="0" marL="0">
+              <a:buNone/>
+            </a:pPr>
+            <a:r>
+              <a:rPr lang="en-US" sz="1050" dirty="0">
+                <a:solidFill>
+                  <a:srgbClr val="16213A"/>
+                </a:solidFill>
+              </a:rPr>
+              <a:t>LODO selector</a:t>
+            </a:r>
+            <a:endParaRPr lang="en-US" sz="1050" dirty="0"/>
+          </a:p>
+        </p:txBody>
+      </p:sp>
+      <p:sp>
+        <p:nvSpPr>
+          <p:cNvPr id="6" name="Shape 4"/>
+          <p:cNvSpPr/>
+          <p:nvPr/>
+        </p:nvSpPr>
+        <p:spPr>
+          <a:xfrm>
+            <a:off x="2834640" y="1828800"/>
+            <a:ext cx="5669280" cy="310896"/>
+          </a:xfrm>
+          <a:prstGeom prst="rect">
             <a:avLst/>
           </a:prstGeom>
           <a:solidFill>
-            <a:srgbClr val="2563EB"/>
+            <a:srgbClr val="F4F7FB"/>
           </a:solidFill>
           <a:ln w="12700">
             <a:solidFill>
-              <a:srgbClr val="2563EB"/>
+              <a:srgbClr val="D9E2EF"/>
             </a:solidFill>
             <a:prstDash val="solid"/>
           </a:ln>
@@ -20287,14 +19456,75 @@
       </p:sp>
       <p:sp>
         <p:nvSpPr>
-          <p:cNvPr id="6" name="Text 4"/>
-          <p:cNvSpPr/>
-          <p:nvPr/>
-        </p:nvSpPr>
-        <p:spPr>
-          <a:xfrm>
-            <a:off x="1115568" y="1691640"/>
-            <a:ext cx="7132320" cy="347472"/>
+          <p:cNvPr id="7" name="Shape 5"/>
+          <p:cNvSpPr/>
+          <p:nvPr/>
+        </p:nvSpPr>
+        <p:spPr>
+          <a:xfrm>
+            <a:off x="2834640" y="1828800"/>
+            <a:ext cx="3405683" cy="310896"/>
+          </a:xfrm>
+          <a:prstGeom prst="rect">
+            <a:avLst/>
+          </a:prstGeom>
+          <a:solidFill>
+            <a:srgbClr val="D97706"/>
+          </a:solidFill>
+          <a:ln w="12700">
+            <a:solidFill>
+              <a:srgbClr val="D97706"/>
+            </a:solidFill>
+            <a:prstDash val="solid"/>
+          </a:ln>
+        </p:spPr>
+      </p:sp>
+      <p:sp>
+        <p:nvSpPr>
+          <p:cNvPr id="8" name="Text 6"/>
+          <p:cNvSpPr/>
+          <p:nvPr/>
+        </p:nvSpPr>
+        <p:spPr>
+          <a:xfrm>
+            <a:off x="6304331" y="1856232"/>
+            <a:ext cx="640080" cy="182880"/>
+          </a:xfrm>
+          <a:prstGeom prst="rect">
+            <a:avLst/>
+          </a:prstGeom>
+          <a:noFill/>
+          <a:ln/>
+        </p:spPr>
+        <p:txBody>
+          <a:bodyPr wrap="square" lIns="0" tIns="0" rIns="0" bIns="0" rtlCol="0" anchor="ctr"/>
+          <a:lstStyle/>
+          <a:p>
+            <a:pPr indent="0" marL="0">
+              <a:buNone/>
+            </a:pPr>
+            <a:r>
+              <a:rPr lang="en-US" sz="900" dirty="0">
+                <a:solidFill>
+                  <a:srgbClr val="16213A"/>
+                </a:solidFill>
+              </a:rPr>
+              <a:t>0.573</a:t>
+            </a:r>
+            <a:endParaRPr lang="en-US" sz="900" dirty="0"/>
+          </a:p>
+        </p:txBody>
+      </p:sp>
+      <p:sp>
+        <p:nvSpPr>
+          <p:cNvPr id="9" name="Text 7"/>
+          <p:cNvSpPr/>
+          <p:nvPr/>
+        </p:nvSpPr>
+        <p:spPr>
+          <a:xfrm>
+            <a:off x="960120" y="2450592"/>
+            <a:ext cx="1737360" cy="256032"/>
           </a:xfrm>
           <a:prstGeom prst="rect">
             <a:avLst/>
@@ -20312,37 +19542,37 @@
               <a:buNone/>
             </a:pPr>
             <a:r>
-              <a:rPr lang="en-US" sz="1500" dirty="0">
-                <a:solidFill>
-                  <a:srgbClr val="16213A"/>
-                </a:solidFill>
-              </a:rPr>
-              <a:t>Use calibrated weights as the safer current default</a:t>
-            </a:r>
-            <a:endParaRPr lang="en-US" sz="1500" dirty="0"/>
-          </a:p>
-        </p:txBody>
-      </p:sp>
-      <p:sp>
-        <p:nvSpPr>
-          <p:cNvPr id="7" name="Shape 5"/>
-          <p:cNvSpPr/>
-          <p:nvPr/>
-        </p:nvSpPr>
-        <p:spPr>
-          <a:xfrm>
-            <a:off x="822960" y="2423160"/>
-            <a:ext cx="128016" cy="128016"/>
-          </a:xfrm>
-          <a:prstGeom prst="ellipse">
+              <a:rPr lang="en-US" sz="1050" dirty="0">
+                <a:solidFill>
+                  <a:srgbClr val="16213A"/>
+                </a:solidFill>
+              </a:rPr>
+              <a:t>AutoAD ensemble</a:t>
+            </a:r>
+            <a:endParaRPr lang="en-US" sz="1050" dirty="0"/>
+          </a:p>
+        </p:txBody>
+      </p:sp>
+      <p:sp>
+        <p:nvSpPr>
+          <p:cNvPr id="10" name="Shape 8"/>
+          <p:cNvSpPr/>
+          <p:nvPr/>
+        </p:nvSpPr>
+        <p:spPr>
+          <a:xfrm>
+            <a:off x="2834640" y="2432304"/>
+            <a:ext cx="5669280" cy="310896"/>
+          </a:xfrm>
+          <a:prstGeom prst="rect">
             <a:avLst/>
           </a:prstGeom>
           <a:solidFill>
-            <a:srgbClr val="2563EB"/>
+            <a:srgbClr val="F4F7FB"/>
           </a:solidFill>
           <a:ln w="12700">
             <a:solidFill>
-              <a:srgbClr val="2563EB"/>
+              <a:srgbClr val="D9E2EF"/>
             </a:solidFill>
             <a:prstDash val="solid"/>
           </a:ln>
@@ -20350,14 +19580,75 @@
       </p:sp>
       <p:sp>
         <p:nvSpPr>
-          <p:cNvPr id="8" name="Text 6"/>
-          <p:cNvSpPr/>
-          <p:nvPr/>
-        </p:nvSpPr>
-        <p:spPr>
-          <a:xfrm>
-            <a:off x="1115568" y="2350008"/>
-            <a:ext cx="7132320" cy="347472"/>
+          <p:cNvPr id="11" name="Shape 9"/>
+          <p:cNvSpPr/>
+          <p:nvPr/>
+        </p:nvSpPr>
+        <p:spPr>
+          <a:xfrm>
+            <a:off x="2834640" y="2432304"/>
+            <a:ext cx="3976268" cy="310896"/>
+          </a:xfrm>
+          <a:prstGeom prst="rect">
+            <a:avLst/>
+          </a:prstGeom>
+          <a:solidFill>
+            <a:srgbClr val="D97706"/>
+          </a:solidFill>
+          <a:ln w="12700">
+            <a:solidFill>
+              <a:srgbClr val="D97706"/>
+            </a:solidFill>
+            <a:prstDash val="solid"/>
+          </a:ln>
+        </p:spPr>
+      </p:sp>
+      <p:sp>
+        <p:nvSpPr>
+          <p:cNvPr id="12" name="Text 10"/>
+          <p:cNvSpPr/>
+          <p:nvPr/>
+        </p:nvSpPr>
+        <p:spPr>
+          <a:xfrm>
+            <a:off x="6874916" y="2459736"/>
+            <a:ext cx="640080" cy="182880"/>
+          </a:xfrm>
+          <a:prstGeom prst="rect">
+            <a:avLst/>
+          </a:prstGeom>
+          <a:noFill/>
+          <a:ln/>
+        </p:spPr>
+        <p:txBody>
+          <a:bodyPr wrap="square" lIns="0" tIns="0" rIns="0" bIns="0" rtlCol="0" anchor="ctr"/>
+          <a:lstStyle/>
+          <a:p>
+            <a:pPr indent="0" marL="0">
+              <a:buNone/>
+            </a:pPr>
+            <a:r>
+              <a:rPr lang="en-US" sz="900" dirty="0">
+                <a:solidFill>
+                  <a:srgbClr val="16213A"/>
+                </a:solidFill>
+              </a:rPr>
+              <a:t>0.669</a:t>
+            </a:r>
+            <a:endParaRPr lang="en-US" sz="900" dirty="0"/>
+          </a:p>
+        </p:txBody>
+      </p:sp>
+      <p:sp>
+        <p:nvSpPr>
+          <p:cNvPr id="13" name="Text 11"/>
+          <p:cNvSpPr/>
+          <p:nvPr/>
+        </p:nvSpPr>
+        <p:spPr>
+          <a:xfrm>
+            <a:off x="960120" y="3054096"/>
+            <a:ext cx="1737360" cy="256032"/>
           </a:xfrm>
           <a:prstGeom prst="rect">
             <a:avLst/>
@@ -20375,37 +19666,37 @@
               <a:buNone/>
             </a:pPr>
             <a:r>
-              <a:rPr lang="en-US" sz="1500" dirty="0">
-                <a:solidFill>
-                  <a:srgbClr val="16213A"/>
-                </a:solidFill>
-              </a:rPr>
-              <a:t>Report learned-selector results as an experiment</a:t>
-            </a:r>
-            <a:endParaRPr lang="en-US" sz="1500" dirty="0"/>
-          </a:p>
-        </p:txBody>
-      </p:sp>
-      <p:sp>
-        <p:nvSpPr>
-          <p:cNvPr id="9" name="Shape 7"/>
-          <p:cNvSpPr/>
-          <p:nvPr/>
-        </p:nvSpPr>
-        <p:spPr>
-          <a:xfrm>
-            <a:off x="822960" y="3081528"/>
-            <a:ext cx="128016" cy="128016"/>
-          </a:xfrm>
-          <a:prstGeom prst="ellipse">
+              <a:rPr lang="en-US" sz="1050" dirty="0">
+                <a:solidFill>
+                  <a:srgbClr val="16213A"/>
+                </a:solidFill>
+              </a:rPr>
+              <a:t>OCSVM baseline</a:t>
+            </a:r>
+            <a:endParaRPr lang="en-US" sz="1050" dirty="0"/>
+          </a:p>
+        </p:txBody>
+      </p:sp>
+      <p:sp>
+        <p:nvSpPr>
+          <p:cNvPr id="14" name="Shape 12"/>
+          <p:cNvSpPr/>
+          <p:nvPr/>
+        </p:nvSpPr>
+        <p:spPr>
+          <a:xfrm>
+            <a:off x="2834640" y="3035808"/>
+            <a:ext cx="5669280" cy="310896"/>
+          </a:xfrm>
+          <a:prstGeom prst="rect">
             <a:avLst/>
           </a:prstGeom>
           <a:solidFill>
-            <a:srgbClr val="2563EB"/>
+            <a:srgbClr val="F4F7FB"/>
           </a:solidFill>
           <a:ln w="12700">
             <a:solidFill>
-              <a:srgbClr val="2563EB"/>
+              <a:srgbClr val="D9E2EF"/>
             </a:solidFill>
             <a:prstDash val="solid"/>
           </a:ln>
@@ -20413,14 +19704,75 @@
       </p:sp>
       <p:sp>
         <p:nvSpPr>
-          <p:cNvPr id="10" name="Text 8"/>
-          <p:cNvSpPr/>
-          <p:nvPr/>
-        </p:nvSpPr>
-        <p:spPr>
-          <a:xfrm>
-            <a:off x="1115568" y="3008376"/>
-            <a:ext cx="7132320" cy="347472"/>
+          <p:cNvPr id="15" name="Shape 13"/>
+          <p:cNvSpPr/>
+          <p:nvPr/>
+        </p:nvSpPr>
+        <p:spPr>
+          <a:xfrm>
+            <a:off x="2834640" y="3035808"/>
+            <a:ext cx="4059479" cy="310896"/>
+          </a:xfrm>
+          <a:prstGeom prst="rect">
+            <a:avLst/>
+          </a:prstGeom>
+          <a:solidFill>
+            <a:srgbClr val="D97706"/>
+          </a:solidFill>
+          <a:ln w="12700">
+            <a:solidFill>
+              <a:srgbClr val="D97706"/>
+            </a:solidFill>
+            <a:prstDash val="solid"/>
+          </a:ln>
+        </p:spPr>
+      </p:sp>
+      <p:sp>
+        <p:nvSpPr>
+          <p:cNvPr id="16" name="Text 14"/>
+          <p:cNvSpPr/>
+          <p:nvPr/>
+        </p:nvSpPr>
+        <p:spPr>
+          <a:xfrm>
+            <a:off x="6958127" y="3063240"/>
+            <a:ext cx="640080" cy="182880"/>
+          </a:xfrm>
+          <a:prstGeom prst="rect">
+            <a:avLst/>
+          </a:prstGeom>
+          <a:noFill/>
+          <a:ln/>
+        </p:spPr>
+        <p:txBody>
+          <a:bodyPr wrap="square" lIns="0" tIns="0" rIns="0" bIns="0" rtlCol="0" anchor="ctr"/>
+          <a:lstStyle/>
+          <a:p>
+            <a:pPr indent="0" marL="0">
+              <a:buNone/>
+            </a:pPr>
+            <a:r>
+              <a:rPr lang="en-US" sz="900" dirty="0">
+                <a:solidFill>
+                  <a:srgbClr val="16213A"/>
+                </a:solidFill>
+              </a:rPr>
+              <a:t>0.683</a:t>
+            </a:r>
+            <a:endParaRPr lang="en-US" sz="900" dirty="0"/>
+          </a:p>
+        </p:txBody>
+      </p:sp>
+      <p:sp>
+        <p:nvSpPr>
+          <p:cNvPr id="17" name="Text 15"/>
+          <p:cNvSpPr/>
+          <p:nvPr/>
+        </p:nvSpPr>
+        <p:spPr>
+          <a:xfrm>
+            <a:off x="960120" y="3657600"/>
+            <a:ext cx="1737360" cy="256032"/>
           </a:xfrm>
           <a:prstGeom prst="rect">
             <a:avLst/>
@@ -20438,37 +19790,37 @@
               <a:buNone/>
             </a:pPr>
             <a:r>
-              <a:rPr lang="en-US" sz="1500" dirty="0">
-                <a:solidFill>
-                  <a:srgbClr val="16213A"/>
-                </a:solidFill>
-              </a:rPr>
-              <a:t>Use LODO as the main generalization check</a:t>
-            </a:r>
-            <a:endParaRPr lang="en-US" sz="1500" dirty="0"/>
-          </a:p>
-        </p:txBody>
-      </p:sp>
-      <p:sp>
-        <p:nvSpPr>
-          <p:cNvPr id="11" name="Shape 9"/>
-          <p:cNvSpPr/>
-          <p:nvPr/>
-        </p:nvSpPr>
-        <p:spPr>
-          <a:xfrm>
-            <a:off x="822960" y="3739896"/>
-            <a:ext cx="128016" cy="128016"/>
-          </a:xfrm>
-          <a:prstGeom prst="ellipse">
+              <a:rPr lang="en-US" sz="1050" dirty="0">
+                <a:solidFill>
+                  <a:srgbClr val="16213A"/>
+                </a:solidFill>
+              </a:rPr>
+              <a:t>Autoencoder</a:t>
+            </a:r>
+            <a:endParaRPr lang="en-US" sz="1050" dirty="0"/>
+          </a:p>
+        </p:txBody>
+      </p:sp>
+      <p:sp>
+        <p:nvSpPr>
+          <p:cNvPr id="18" name="Shape 16"/>
+          <p:cNvSpPr/>
+          <p:nvPr/>
+        </p:nvSpPr>
+        <p:spPr>
+          <a:xfrm>
+            <a:off x="2834640" y="3639312"/>
+            <a:ext cx="5669280" cy="310896"/>
+          </a:xfrm>
+          <a:prstGeom prst="rect">
             <a:avLst/>
           </a:prstGeom>
           <a:solidFill>
-            <a:srgbClr val="2563EB"/>
+            <a:srgbClr val="F4F7FB"/>
           </a:solidFill>
           <a:ln w="12700">
             <a:solidFill>
-              <a:srgbClr val="2563EB"/>
+              <a:srgbClr val="D9E2EF"/>
             </a:solidFill>
             <a:prstDash val="solid"/>
           </a:ln>
@@ -20476,14 +19828,75 @@
       </p:sp>
       <p:sp>
         <p:nvSpPr>
-          <p:cNvPr id="12" name="Text 10"/>
-          <p:cNvSpPr/>
-          <p:nvPr/>
-        </p:nvSpPr>
-        <p:spPr>
-          <a:xfrm>
-            <a:off x="1115568" y="3666744"/>
-            <a:ext cx="7132320" cy="347472"/>
+          <p:cNvPr id="19" name="Shape 17"/>
+          <p:cNvSpPr/>
+          <p:nvPr/>
+        </p:nvSpPr>
+        <p:spPr>
+          <a:xfrm>
+            <a:off x="2834640" y="3639312"/>
+            <a:ext cx="4166464" cy="310896"/>
+          </a:xfrm>
+          <a:prstGeom prst="rect">
+            <a:avLst/>
+          </a:prstGeom>
+          <a:solidFill>
+            <a:srgbClr val="D97706"/>
+          </a:solidFill>
+          <a:ln w="12700">
+            <a:solidFill>
+              <a:srgbClr val="D97706"/>
+            </a:solidFill>
+            <a:prstDash val="solid"/>
+          </a:ln>
+        </p:spPr>
+      </p:sp>
+      <p:sp>
+        <p:nvSpPr>
+          <p:cNvPr id="20" name="Text 18"/>
+          <p:cNvSpPr/>
+          <p:nvPr/>
+        </p:nvSpPr>
+        <p:spPr>
+          <a:xfrm>
+            <a:off x="7065112" y="3666744"/>
+            <a:ext cx="640080" cy="182880"/>
+          </a:xfrm>
+          <a:prstGeom prst="rect">
+            <a:avLst/>
+          </a:prstGeom>
+          <a:noFill/>
+          <a:ln/>
+        </p:spPr>
+        <p:txBody>
+          <a:bodyPr wrap="square" lIns="0" tIns="0" rIns="0" bIns="0" rtlCol="0" anchor="ctr"/>
+          <a:lstStyle/>
+          <a:p>
+            <a:pPr indent="0" marL="0">
+              <a:buNone/>
+            </a:pPr>
+            <a:r>
+              <a:rPr lang="en-US" sz="900" dirty="0">
+                <a:solidFill>
+                  <a:srgbClr val="16213A"/>
+                </a:solidFill>
+              </a:rPr>
+              <a:t>0.701</a:t>
+            </a:r>
+            <a:endParaRPr lang="en-US" sz="900" dirty="0"/>
+          </a:p>
+        </p:txBody>
+      </p:sp>
+      <p:sp>
+        <p:nvSpPr>
+          <p:cNvPr id="21" name="Text 19"/>
+          <p:cNvSpPr/>
+          <p:nvPr/>
+        </p:nvSpPr>
+        <p:spPr>
+          <a:xfrm>
+            <a:off x="960120" y="4261104"/>
+            <a:ext cx="1737360" cy="256032"/>
           </a:xfrm>
           <a:prstGeom prst="rect">
             <a:avLst/>
@@ -20501,20 +19914,142 @@
               <a:buNone/>
             </a:pPr>
             <a:r>
-              <a:rPr lang="en-US" sz="1500" dirty="0">
-                <a:solidFill>
-                  <a:srgbClr val="16213A"/>
-                </a:solidFill>
-              </a:rPr>
-              <a:t>Add more real datasets before retraining the selector</a:t>
-            </a:r>
-            <a:endParaRPr lang="en-US" sz="1500" dirty="0"/>
-          </a:p>
-        </p:txBody>
-      </p:sp>
-      <p:sp>
-        <p:nvSpPr>
-          <p:cNvPr id="13" name="Text 11"/>
+              <a:rPr lang="en-US" sz="1050" dirty="0">
+                <a:solidFill>
+                  <a:srgbClr val="16213A"/>
+                </a:solidFill>
+              </a:rPr>
+              <a:t>LSTM</a:t>
+            </a:r>
+            <a:endParaRPr lang="en-US" sz="1050" dirty="0"/>
+          </a:p>
+        </p:txBody>
+      </p:sp>
+      <p:sp>
+        <p:nvSpPr>
+          <p:cNvPr id="22" name="Shape 20"/>
+          <p:cNvSpPr/>
+          <p:nvPr/>
+        </p:nvSpPr>
+        <p:spPr>
+          <a:xfrm>
+            <a:off x="2834640" y="4242816"/>
+            <a:ext cx="5669280" cy="310896"/>
+          </a:xfrm>
+          <a:prstGeom prst="rect">
+            <a:avLst/>
+          </a:prstGeom>
+          <a:solidFill>
+            <a:srgbClr val="F4F7FB"/>
+          </a:solidFill>
+          <a:ln w="12700">
+            <a:solidFill>
+              <a:srgbClr val="D9E2EF"/>
+            </a:solidFill>
+            <a:prstDash val="solid"/>
+          </a:ln>
+        </p:spPr>
+      </p:sp>
+      <p:sp>
+        <p:nvSpPr>
+          <p:cNvPr id="23" name="Shape 21"/>
+          <p:cNvSpPr/>
+          <p:nvPr/>
+        </p:nvSpPr>
+        <p:spPr>
+          <a:xfrm>
+            <a:off x="2834640" y="4242816"/>
+            <a:ext cx="4368546" cy="310896"/>
+          </a:xfrm>
+          <a:prstGeom prst="rect">
+            <a:avLst/>
+          </a:prstGeom>
+          <a:solidFill>
+            <a:srgbClr val="D97706"/>
+          </a:solidFill>
+          <a:ln w="12700">
+            <a:solidFill>
+              <a:srgbClr val="D97706"/>
+            </a:solidFill>
+            <a:prstDash val="solid"/>
+          </a:ln>
+        </p:spPr>
+      </p:sp>
+      <p:sp>
+        <p:nvSpPr>
+          <p:cNvPr id="24" name="Text 22"/>
+          <p:cNvSpPr/>
+          <p:nvPr/>
+        </p:nvSpPr>
+        <p:spPr>
+          <a:xfrm>
+            <a:off x="7267194" y="4270248"/>
+            <a:ext cx="640080" cy="182880"/>
+          </a:xfrm>
+          <a:prstGeom prst="rect">
+            <a:avLst/>
+          </a:prstGeom>
+          <a:noFill/>
+          <a:ln/>
+        </p:spPr>
+        <p:txBody>
+          <a:bodyPr wrap="square" lIns="0" tIns="0" rIns="0" bIns="0" rtlCol="0" anchor="ctr"/>
+          <a:lstStyle/>
+          <a:p>
+            <a:pPr indent="0" marL="0">
+              <a:buNone/>
+            </a:pPr>
+            <a:r>
+              <a:rPr lang="en-US" sz="900" dirty="0">
+                <a:solidFill>
+                  <a:srgbClr val="16213A"/>
+                </a:solidFill>
+              </a:rPr>
+              <a:t>0.735</a:t>
+            </a:r>
+            <a:endParaRPr lang="en-US" sz="900" dirty="0"/>
+          </a:p>
+        </p:txBody>
+      </p:sp>
+      <p:sp>
+        <p:nvSpPr>
+          <p:cNvPr id="25" name="Text 23"/>
+          <p:cNvSpPr/>
+          <p:nvPr/>
+        </p:nvSpPr>
+        <p:spPr>
+          <a:xfrm>
+            <a:off x="960120" y="5212080"/>
+            <a:ext cx="4937760" cy="228600"/>
+          </a:xfrm>
+          <a:prstGeom prst="rect">
+            <a:avLst/>
+          </a:prstGeom>
+          <a:noFill/>
+          <a:ln/>
+        </p:spPr>
+        <p:txBody>
+          <a:bodyPr wrap="square" lIns="0" tIns="0" rIns="0" bIns="0" rtlCol="0" anchor="ctr"/>
+          <a:lstStyle/>
+          <a:p>
+            <a:pPr indent="0" marL="0">
+              <a:buNone/>
+            </a:pPr>
+            <a:r>
+              <a:rPr lang="en-US" sz="1000" dirty="0">
+                <a:solidFill>
+                  <a:srgbClr val="5E6B7A"/>
+                </a:solidFill>
+              </a:rPr>
+              <a:t>Average ROC-AUC across ten real datasets</a:t>
+            </a:r>
+            <a:endParaRPr lang="en-US" sz="1000" dirty="0"/>
+          </a:p>
+        </p:txBody>
+      </p:sp>
+      <p:sp>
+        <p:nvSpPr>
+          <p:cNvPr id="26" name="Text 24"/>
           <p:cNvSpPr/>
           <p:nvPr/>
         </p:nvSpPr>
@@ -20638,7 +20173,7 @@
                 <a:ea typeface="Aptos Display" pitchFamily="34" charset="-122"/>
                 <a:cs typeface="Aptos Display" pitchFamily="34" charset="-120"/>
               </a:rPr>
-              <a:t>How To Run</a:t>
+              <a:t>LODO Learned Selector Detail</a:t>
             </a:r>
             <a:endParaRPr lang="en-US" sz="2100" dirty="0"/>
           </a:p>
@@ -20679,7 +20214,7 @@
                 <a:ea typeface="Aptos" pitchFamily="34" charset="-122"/>
                 <a:cs typeface="Aptos" pitchFamily="34" charset="-120"/>
               </a:rPr>
-              <a:t>The repo includes reproducible scripts for both evaluation types.</a:t>
+              <a:t>The selector often matched the held-out dataset to the wrong training profile.</a:t>
             </a:r>
             <a:endParaRPr lang="en-US" sz="1600" dirty="0"/>
           </a:p>
@@ -20693,18 +20228,18 @@
         </p:nvSpPr>
         <p:spPr>
           <a:xfrm>
-            <a:off x="777240" y="1874520"/>
-            <a:ext cx="10515600" cy="676656"/>
+            <a:off x="566928" y="1627632"/>
+            <a:ext cx="9098280" cy="502920"/>
           </a:xfrm>
           <a:prstGeom prst="rect">
             <a:avLst/>
           </a:prstGeom>
           <a:solidFill>
-            <a:srgbClr val="111827"/>
+            <a:srgbClr val="16213A"/>
           </a:solidFill>
           <a:ln w="12700">
             <a:solidFill>
-              <a:srgbClr val="111827"/>
+              <a:srgbClr val="16213A"/>
             </a:solidFill>
             <a:prstDash val="solid"/>
           </a:ln>
@@ -20718,8 +20253,8 @@
         </p:nvSpPr>
         <p:spPr>
           <a:xfrm>
-            <a:off x="960120" y="2084832"/>
-            <a:ext cx="10149840" cy="201168"/>
+            <a:off x="685800" y="1783080"/>
+            <a:ext cx="1691640" cy="219456"/>
           </a:xfrm>
           <a:prstGeom prst="rect">
             <a:avLst/>
@@ -20737,40 +20272,189 @@
               <a:buNone/>
             </a:pPr>
             <a:r>
-              <a:rPr lang="en-US" sz="950" dirty="0">
+              <a:rPr lang="en-US" sz="1050" b="1" dirty="0">
                 <a:solidFill>
                   <a:srgbClr val="FFFFFF"/>
                 </a:solidFill>
-                <a:latin typeface="Consolas" pitchFamily="34" charset="0"/>
-                <a:ea typeface="Consolas" pitchFamily="34" charset="-122"/>
-                <a:cs typeface="Consolas" pitchFamily="34" charset="-120"/>
-              </a:rPr>
-              <a:t>.venv\Scripts\python.exe scripts\run_synthetic_benchmark.py --config configs\experiments\larger_validation.yaml</a:t>
-            </a:r>
-            <a:endParaRPr lang="en-US" sz="950" dirty="0"/>
-          </a:p>
-        </p:txBody>
-      </p:sp>
-      <p:sp>
-        <p:nvSpPr>
-          <p:cNvPr id="7" name="Shape 5"/>
-          <p:cNvSpPr/>
-          <p:nvPr/>
-        </p:nvSpPr>
-        <p:spPr>
-          <a:xfrm>
-            <a:off x="777240" y="2926080"/>
-            <a:ext cx="10515600" cy="676656"/>
+              </a:rPr>
+              <a:t>Held-out</a:t>
+            </a:r>
+            <a:endParaRPr lang="en-US" sz="1050" dirty="0"/>
+          </a:p>
+        </p:txBody>
+      </p:sp>
+      <p:sp>
+        <p:nvSpPr>
+          <p:cNvPr id="7" name="Text 5"/>
+          <p:cNvSpPr/>
+          <p:nvPr/>
+        </p:nvSpPr>
+        <p:spPr>
+          <a:xfrm>
+            <a:off x="2743200" y="1783080"/>
+            <a:ext cx="1417320" cy="219456"/>
+          </a:xfrm>
+          <a:prstGeom prst="rect">
+            <a:avLst/>
+          </a:prstGeom>
+          <a:noFill/>
+          <a:ln/>
+        </p:spPr>
+        <p:txBody>
+          <a:bodyPr wrap="square" lIns="0" tIns="0" rIns="0" bIns="0" rtlCol="0" anchor="ctr">
+            <a:normAutofit/>
+          </a:bodyPr>
+          <a:lstStyle/>
+          <a:p>
+            <a:pPr indent="0" marL="0">
+              <a:buNone/>
+            </a:pPr>
+            <a:r>
+              <a:rPr lang="en-US" sz="1050" b="1" dirty="0">
+                <a:solidFill>
+                  <a:srgbClr val="FFFFFF"/>
+                </a:solidFill>
+              </a:rPr>
+              <a:t>Selected</a:t>
+            </a:r>
+            <a:endParaRPr lang="en-US" sz="1050" dirty="0"/>
+          </a:p>
+        </p:txBody>
+      </p:sp>
+      <p:sp>
+        <p:nvSpPr>
+          <p:cNvPr id="8" name="Text 6"/>
+          <p:cNvSpPr/>
+          <p:nvPr/>
+        </p:nvSpPr>
+        <p:spPr>
+          <a:xfrm>
+            <a:off x="4572000" y="1783080"/>
+            <a:ext cx="2194560" cy="219456"/>
+          </a:xfrm>
+          <a:prstGeom prst="rect">
+            <a:avLst/>
+          </a:prstGeom>
+          <a:noFill/>
+          <a:ln/>
+        </p:spPr>
+        <p:txBody>
+          <a:bodyPr wrap="square" lIns="0" tIns="0" rIns="0" bIns="0" rtlCol="0" anchor="ctr">
+            <a:normAutofit/>
+          </a:bodyPr>
+          <a:lstStyle/>
+          <a:p>
+            <a:pPr indent="0" marL="0">
+              <a:buNone/>
+            </a:pPr>
+            <a:r>
+              <a:rPr lang="en-US" sz="1050" b="1" dirty="0">
+                <a:solidFill>
+                  <a:srgbClr val="FFFFFF"/>
+                </a:solidFill>
+              </a:rPr>
+              <a:t>Matched</a:t>
+            </a:r>
+            <a:endParaRPr lang="en-US" sz="1050" dirty="0"/>
+          </a:p>
+        </p:txBody>
+      </p:sp>
+      <p:sp>
+        <p:nvSpPr>
+          <p:cNvPr id="9" name="Text 7"/>
+          <p:cNvSpPr/>
+          <p:nvPr/>
+        </p:nvSpPr>
+        <p:spPr>
+          <a:xfrm>
+            <a:off x="7315200" y="1783080"/>
+            <a:ext cx="731520" cy="219456"/>
+          </a:xfrm>
+          <a:prstGeom prst="rect">
+            <a:avLst/>
+          </a:prstGeom>
+          <a:noFill/>
+          <a:ln/>
+        </p:spPr>
+        <p:txBody>
+          <a:bodyPr wrap="square" lIns="0" tIns="0" rIns="0" bIns="0" rtlCol="0" anchor="ctr">
+            <a:normAutofit/>
+          </a:bodyPr>
+          <a:lstStyle/>
+          <a:p>
+            <a:pPr indent="0" marL="0">
+              <a:buNone/>
+            </a:pPr>
+            <a:r>
+              <a:rPr lang="en-US" sz="1050" b="1" dirty="0">
+                <a:solidFill>
+                  <a:srgbClr val="FFFFFF"/>
+                </a:solidFill>
+              </a:rPr>
+              <a:t>F1</a:t>
+            </a:r>
+            <a:endParaRPr lang="en-US" sz="1050" dirty="0"/>
+          </a:p>
+        </p:txBody>
+      </p:sp>
+      <p:sp>
+        <p:nvSpPr>
+          <p:cNvPr id="10" name="Text 8"/>
+          <p:cNvSpPr/>
+          <p:nvPr/>
+        </p:nvSpPr>
+        <p:spPr>
+          <a:xfrm>
+            <a:off x="8412480" y="1783080"/>
+            <a:ext cx="731520" cy="219456"/>
+          </a:xfrm>
+          <a:prstGeom prst="rect">
+            <a:avLst/>
+          </a:prstGeom>
+          <a:noFill/>
+          <a:ln/>
+        </p:spPr>
+        <p:txBody>
+          <a:bodyPr wrap="square" lIns="0" tIns="0" rIns="0" bIns="0" rtlCol="0" anchor="ctr">
+            <a:normAutofit/>
+          </a:bodyPr>
+          <a:lstStyle/>
+          <a:p>
+            <a:pPr indent="0" marL="0">
+              <a:buNone/>
+            </a:pPr>
+            <a:r>
+              <a:rPr lang="en-US" sz="1050" b="1" dirty="0">
+                <a:solidFill>
+                  <a:srgbClr val="FFFFFF"/>
+                </a:solidFill>
+              </a:rPr>
+              <a:t>ROC</a:t>
+            </a:r>
+            <a:endParaRPr lang="en-US" sz="1050" dirty="0"/>
+          </a:p>
+        </p:txBody>
+      </p:sp>
+      <p:sp>
+        <p:nvSpPr>
+          <p:cNvPr id="11" name="Shape 9"/>
+          <p:cNvSpPr/>
+          <p:nvPr/>
+        </p:nvSpPr>
+        <p:spPr>
+          <a:xfrm>
+            <a:off x="566928" y="2103120"/>
+            <a:ext cx="9098280" cy="256032"/>
           </a:xfrm>
           <a:prstGeom prst="rect">
             <a:avLst/>
           </a:prstGeom>
           <a:solidFill>
-            <a:srgbClr val="111827"/>
+            <a:srgbClr val="EEF6FF"/>
           </a:solidFill>
           <a:ln w="12700">
             <a:solidFill>
-              <a:srgbClr val="111827"/>
+              <a:srgbClr val="D9E2EF"/>
             </a:solidFill>
             <a:prstDash val="solid"/>
           </a:ln>
@@ -20778,14 +20462,14 @@
       </p:sp>
       <p:sp>
         <p:nvSpPr>
-          <p:cNvPr id="8" name="Text 6"/>
-          <p:cNvSpPr/>
-          <p:nvPr/>
-        </p:nvSpPr>
-        <p:spPr>
-          <a:xfrm>
-            <a:off x="960120" y="3136392"/>
-            <a:ext cx="10149840" cy="201168"/>
+          <p:cNvPr id="12" name="Text 10"/>
+          <p:cNvSpPr/>
+          <p:nvPr/>
+        </p:nvSpPr>
+        <p:spPr>
+          <a:xfrm>
+            <a:off x="685800" y="2176272"/>
+            <a:ext cx="1691640" cy="164592"/>
           </a:xfrm>
           <a:prstGeom prst="rect">
             <a:avLst/>
@@ -20803,40 +20487,189 @@
               <a:buNone/>
             </a:pPr>
             <a:r>
-              <a:rPr lang="en-US" sz="950" dirty="0">
-                <a:solidFill>
-                  <a:srgbClr val="FFFFFF"/>
-                </a:solidFill>
-                <a:latin typeface="Consolas" pitchFamily="34" charset="0"/>
-                <a:ea typeface="Consolas" pitchFamily="34" charset="-122"/>
-                <a:cs typeface="Consolas" pitchFamily="34" charset="-120"/>
-              </a:rPr>
-              <a:t>.venv\Scripts\python.exe scripts\run_real_data_eval.py --dataset data\external\adb_annthyroid_21feat_normalised.csv::adb_annthyroid::ground_truth --max-rows 10000</a:t>
-            </a:r>
-            <a:endParaRPr lang="en-US" sz="950" dirty="0"/>
-          </a:p>
-        </p:txBody>
-      </p:sp>
-      <p:sp>
-        <p:nvSpPr>
-          <p:cNvPr id="9" name="Shape 7"/>
-          <p:cNvSpPr/>
-          <p:nvPr/>
-        </p:nvSpPr>
-        <p:spPr>
-          <a:xfrm>
-            <a:off x="777240" y="3977640"/>
-            <a:ext cx="10515600" cy="676656"/>
+              <a:rPr lang="en-US" sz="860" dirty="0">
+                <a:solidFill>
+                  <a:srgbClr val="16213A"/>
+                </a:solidFill>
+              </a:rPr>
+              <a:t>Annthyroid</a:t>
+            </a:r>
+            <a:endParaRPr lang="en-US" sz="860" dirty="0"/>
+          </a:p>
+        </p:txBody>
+      </p:sp>
+      <p:sp>
+        <p:nvSpPr>
+          <p:cNvPr id="13" name="Text 11"/>
+          <p:cNvSpPr/>
+          <p:nvPr/>
+        </p:nvSpPr>
+        <p:spPr>
+          <a:xfrm>
+            <a:off x="2743200" y="2176272"/>
+            <a:ext cx="1417320" cy="164592"/>
+          </a:xfrm>
+          <a:prstGeom prst="rect">
+            <a:avLst/>
+          </a:prstGeom>
+          <a:noFill/>
+          <a:ln/>
+        </p:spPr>
+        <p:txBody>
+          <a:bodyPr wrap="square" lIns="0" tIns="0" rIns="0" bIns="0" rtlCol="0" anchor="ctr">
+            <a:normAutofit/>
+          </a:bodyPr>
+          <a:lstStyle/>
+          <a:p>
+            <a:pPr indent="0" marL="0">
+              <a:buNone/>
+            </a:pPr>
+            <a:r>
+              <a:rPr lang="en-US" sz="860" dirty="0">
+                <a:solidFill>
+                  <a:srgbClr val="16213A"/>
+                </a:solidFill>
+              </a:rPr>
+              <a:t>KNN</a:t>
+            </a:r>
+            <a:endParaRPr lang="en-US" sz="860" dirty="0"/>
+          </a:p>
+        </p:txBody>
+      </p:sp>
+      <p:sp>
+        <p:nvSpPr>
+          <p:cNvPr id="14" name="Text 12"/>
+          <p:cNvSpPr/>
+          <p:nvPr/>
+        </p:nvSpPr>
+        <p:spPr>
+          <a:xfrm>
+            <a:off x="4572000" y="2176272"/>
+            <a:ext cx="2194560" cy="164592"/>
+          </a:xfrm>
+          <a:prstGeom prst="rect">
+            <a:avLst/>
+          </a:prstGeom>
+          <a:noFill/>
+          <a:ln/>
+        </p:spPr>
+        <p:txBody>
+          <a:bodyPr wrap="square" lIns="0" tIns="0" rIns="0" bIns="0" rtlCol="0" anchor="ctr">
+            <a:normAutofit/>
+          </a:bodyPr>
+          <a:lstStyle/>
+          <a:p>
+            <a:pPr indent="0" marL="0">
+              <a:buNone/>
+            </a:pPr>
+            <a:r>
+              <a:rPr lang="en-US" sz="860" dirty="0">
+                <a:solidFill>
+                  <a:srgbClr val="16213A"/>
+                </a:solidFill>
+              </a:rPr>
+              <a:t>KDD SMTP</a:t>
+            </a:r>
+            <a:endParaRPr lang="en-US" sz="860" dirty="0"/>
+          </a:p>
+        </p:txBody>
+      </p:sp>
+      <p:sp>
+        <p:nvSpPr>
+          <p:cNvPr id="15" name="Text 13"/>
+          <p:cNvSpPr/>
+          <p:nvPr/>
+        </p:nvSpPr>
+        <p:spPr>
+          <a:xfrm>
+            <a:off x="7315200" y="2176272"/>
+            <a:ext cx="731520" cy="164592"/>
+          </a:xfrm>
+          <a:prstGeom prst="rect">
+            <a:avLst/>
+          </a:prstGeom>
+          <a:noFill/>
+          <a:ln/>
+        </p:spPr>
+        <p:txBody>
+          <a:bodyPr wrap="square" lIns="0" tIns="0" rIns="0" bIns="0" rtlCol="0" anchor="ctr">
+            <a:normAutofit/>
+          </a:bodyPr>
+          <a:lstStyle/>
+          <a:p>
+            <a:pPr indent="0" marL="0">
+              <a:buNone/>
+            </a:pPr>
+            <a:r>
+              <a:rPr lang="en-US" sz="860" dirty="0">
+                <a:solidFill>
+                  <a:srgbClr val="16213A"/>
+                </a:solidFill>
+              </a:rPr>
+              <a:t>0.205</a:t>
+            </a:r>
+            <a:endParaRPr lang="en-US" sz="860" dirty="0"/>
+          </a:p>
+        </p:txBody>
+      </p:sp>
+      <p:sp>
+        <p:nvSpPr>
+          <p:cNvPr id="16" name="Text 14"/>
+          <p:cNvSpPr/>
+          <p:nvPr/>
+        </p:nvSpPr>
+        <p:spPr>
+          <a:xfrm>
+            <a:off x="8412480" y="2176272"/>
+            <a:ext cx="731520" cy="164592"/>
+          </a:xfrm>
+          <a:prstGeom prst="rect">
+            <a:avLst/>
+          </a:prstGeom>
+          <a:noFill/>
+          <a:ln/>
+        </p:spPr>
+        <p:txBody>
+          <a:bodyPr wrap="square" lIns="0" tIns="0" rIns="0" bIns="0" rtlCol="0" anchor="ctr">
+            <a:normAutofit/>
+          </a:bodyPr>
+          <a:lstStyle/>
+          <a:p>
+            <a:pPr indent="0" marL="0">
+              <a:buNone/>
+            </a:pPr>
+            <a:r>
+              <a:rPr lang="en-US" sz="860" dirty="0">
+                <a:solidFill>
+                  <a:srgbClr val="16213A"/>
+                </a:solidFill>
+              </a:rPr>
+              <a:t>0.910</a:t>
+            </a:r>
+            <a:endParaRPr lang="en-US" sz="860" dirty="0"/>
+          </a:p>
+        </p:txBody>
+      </p:sp>
+      <p:sp>
+        <p:nvSpPr>
+          <p:cNvPr id="17" name="Shape 15"/>
+          <p:cNvSpPr/>
+          <p:nvPr/>
+        </p:nvSpPr>
+        <p:spPr>
+          <a:xfrm>
+            <a:off x="566928" y="2414016"/>
+            <a:ext cx="9098280" cy="256032"/>
           </a:xfrm>
           <a:prstGeom prst="rect">
             <a:avLst/>
           </a:prstGeom>
           <a:solidFill>
-            <a:srgbClr val="111827"/>
+            <a:srgbClr val="F8FAFC"/>
           </a:solidFill>
           <a:ln w="12700">
             <a:solidFill>
-              <a:srgbClr val="111827"/>
+              <a:srgbClr val="D9E2EF"/>
             </a:solidFill>
             <a:prstDash val="solid"/>
           </a:ln>
@@ -20844,14 +20677,14 @@
       </p:sp>
       <p:sp>
         <p:nvSpPr>
-          <p:cNvPr id="10" name="Text 8"/>
-          <p:cNvSpPr/>
-          <p:nvPr/>
-        </p:nvSpPr>
-        <p:spPr>
-          <a:xfrm>
-            <a:off x="960120" y="4187952"/>
-            <a:ext cx="10149840" cy="201168"/>
+          <p:cNvPr id="18" name="Text 16"/>
+          <p:cNvSpPr/>
+          <p:nvPr/>
+        </p:nvSpPr>
+        <p:spPr>
+          <a:xfrm>
+            <a:off x="685800" y="2487168"/>
+            <a:ext cx="1691640" cy="164592"/>
           </a:xfrm>
           <a:prstGeom prst="rect">
             <a:avLst/>
@@ -20869,40 +20702,189 @@
               <a:buNone/>
             </a:pPr>
             <a:r>
-              <a:rPr lang="en-US" sz="950" dirty="0">
-                <a:solidFill>
-                  <a:srgbClr val="FFFFFF"/>
-                </a:solidFill>
-                <a:latin typeface="Consolas" pitchFamily="34" charset="0"/>
-                <a:ea typeface="Consolas" pitchFamily="34" charset="-122"/>
-                <a:cs typeface="Consolas" pitchFamily="34" charset="-120"/>
-              </a:rPr>
-              <a:t>.venv\Scripts\python.exe scripts\calibrate_ensemble_weights.py --dataset data\external\adb_annthyroid_21feat_normalised.csv --label-column ground_truth</a:t>
-            </a:r>
-            <a:endParaRPr lang="en-US" sz="950" dirty="0"/>
-          </a:p>
-        </p:txBody>
-      </p:sp>
-      <p:sp>
-        <p:nvSpPr>
-          <p:cNvPr id="11" name="Shape 9"/>
-          <p:cNvSpPr/>
-          <p:nvPr/>
-        </p:nvSpPr>
-        <p:spPr>
-          <a:xfrm>
-            <a:off x="777240" y="5029200"/>
-            <a:ext cx="10515600" cy="676656"/>
+              <a:rPr lang="en-US" sz="860" dirty="0">
+                <a:solidFill>
+                  <a:srgbClr val="16213A"/>
+                </a:solidFill>
+              </a:rPr>
+              <a:t>KDD HTTP</a:t>
+            </a:r>
+            <a:endParaRPr lang="en-US" sz="860" dirty="0"/>
+          </a:p>
+        </p:txBody>
+      </p:sp>
+      <p:sp>
+        <p:nvSpPr>
+          <p:cNvPr id="19" name="Text 17"/>
+          <p:cNvSpPr/>
+          <p:nvPr/>
+        </p:nvSpPr>
+        <p:spPr>
+          <a:xfrm>
+            <a:off x="2743200" y="2487168"/>
+            <a:ext cx="1417320" cy="164592"/>
+          </a:xfrm>
+          <a:prstGeom prst="rect">
+            <a:avLst/>
+          </a:prstGeom>
+          <a:noFill/>
+          <a:ln/>
+        </p:spPr>
+        <p:txBody>
+          <a:bodyPr wrap="square" lIns="0" tIns="0" rIns="0" bIns="0" rtlCol="0" anchor="ctr">
+            <a:normAutofit/>
+          </a:bodyPr>
+          <a:lstStyle/>
+          <a:p>
+            <a:pPr indent="0" marL="0">
+              <a:buNone/>
+            </a:pPr>
+            <a:r>
+              <a:rPr lang="en-US" sz="860" dirty="0">
+                <a:solidFill>
+                  <a:srgbClr val="16213A"/>
+                </a:solidFill>
+              </a:rPr>
+              <a:t>KNN</a:t>
+            </a:r>
+            <a:endParaRPr lang="en-US" sz="860" dirty="0"/>
+          </a:p>
+        </p:txBody>
+      </p:sp>
+      <p:sp>
+        <p:nvSpPr>
+          <p:cNvPr id="20" name="Text 18"/>
+          <p:cNvSpPr/>
+          <p:nvPr/>
+        </p:nvSpPr>
+        <p:spPr>
+          <a:xfrm>
+            <a:off x="4572000" y="2487168"/>
+            <a:ext cx="2194560" cy="164592"/>
+          </a:xfrm>
+          <a:prstGeom prst="rect">
+            <a:avLst/>
+          </a:prstGeom>
+          <a:noFill/>
+          <a:ln/>
+        </p:spPr>
+        <p:txBody>
+          <a:bodyPr wrap="square" lIns="0" tIns="0" rIns="0" bIns="0" rtlCol="0" anchor="ctr">
+            <a:normAutofit/>
+          </a:bodyPr>
+          <a:lstStyle/>
+          <a:p>
+            <a:pPr indent="0" marL="0">
+              <a:buNone/>
+            </a:pPr>
+            <a:r>
+              <a:rPr lang="en-US" sz="860" dirty="0">
+                <a:solidFill>
+                  <a:srgbClr val="16213A"/>
+                </a:solidFill>
+              </a:rPr>
+              <a:t>KDD SMTP</a:t>
+            </a:r>
+            <a:endParaRPr lang="en-US" sz="860" dirty="0"/>
+          </a:p>
+        </p:txBody>
+      </p:sp>
+      <p:sp>
+        <p:nvSpPr>
+          <p:cNvPr id="21" name="Text 19"/>
+          <p:cNvSpPr/>
+          <p:nvPr/>
+        </p:nvSpPr>
+        <p:spPr>
+          <a:xfrm>
+            <a:off x="7315200" y="2487168"/>
+            <a:ext cx="731520" cy="164592"/>
+          </a:xfrm>
+          <a:prstGeom prst="rect">
+            <a:avLst/>
+          </a:prstGeom>
+          <a:noFill/>
+          <a:ln/>
+        </p:spPr>
+        <p:txBody>
+          <a:bodyPr wrap="square" lIns="0" tIns="0" rIns="0" bIns="0" rtlCol="0" anchor="ctr">
+            <a:normAutofit/>
+          </a:bodyPr>
+          <a:lstStyle/>
+          <a:p>
+            <a:pPr indent="0" marL="0">
+              <a:buNone/>
+            </a:pPr>
+            <a:r>
+              <a:rPr lang="en-US" sz="860" dirty="0">
+                <a:solidFill>
+                  <a:srgbClr val="16213A"/>
+                </a:solidFill>
+              </a:rPr>
+              <a:t>0.038</a:t>
+            </a:r>
+            <a:endParaRPr lang="en-US" sz="860" dirty="0"/>
+          </a:p>
+        </p:txBody>
+      </p:sp>
+      <p:sp>
+        <p:nvSpPr>
+          <p:cNvPr id="22" name="Text 20"/>
+          <p:cNvSpPr/>
+          <p:nvPr/>
+        </p:nvSpPr>
+        <p:spPr>
+          <a:xfrm>
+            <a:off x="8412480" y="2487168"/>
+            <a:ext cx="731520" cy="164592"/>
+          </a:xfrm>
+          <a:prstGeom prst="rect">
+            <a:avLst/>
+          </a:prstGeom>
+          <a:noFill/>
+          <a:ln/>
+        </p:spPr>
+        <p:txBody>
+          <a:bodyPr wrap="square" lIns="0" tIns="0" rIns="0" bIns="0" rtlCol="0" anchor="ctr">
+            <a:normAutofit/>
+          </a:bodyPr>
+          <a:lstStyle/>
+          <a:p>
+            <a:pPr indent="0" marL="0">
+              <a:buNone/>
+            </a:pPr>
+            <a:r>
+              <a:rPr lang="en-US" sz="860" dirty="0">
+                <a:solidFill>
+                  <a:srgbClr val="16213A"/>
+                </a:solidFill>
+              </a:rPr>
+              <a:t>0.031</a:t>
+            </a:r>
+            <a:endParaRPr lang="en-US" sz="860" dirty="0"/>
+          </a:p>
+        </p:txBody>
+      </p:sp>
+      <p:sp>
+        <p:nvSpPr>
+          <p:cNvPr id="23" name="Shape 21"/>
+          <p:cNvSpPr/>
+          <p:nvPr/>
+        </p:nvSpPr>
+        <p:spPr>
+          <a:xfrm>
+            <a:off x="566928" y="2724912"/>
+            <a:ext cx="9098280" cy="256032"/>
           </a:xfrm>
           <a:prstGeom prst="rect">
             <a:avLst/>
           </a:prstGeom>
           <a:solidFill>
-            <a:srgbClr val="111827"/>
+            <a:srgbClr val="EEF6FF"/>
           </a:solidFill>
           <a:ln w="12700">
             <a:solidFill>
-              <a:srgbClr val="111827"/>
+              <a:srgbClr val="D9E2EF"/>
             </a:solidFill>
             <a:prstDash val="solid"/>
           </a:ln>
@@ -20910,14 +20892,14 @@
       </p:sp>
       <p:sp>
         <p:nvSpPr>
-          <p:cNvPr id="12" name="Text 10"/>
-          <p:cNvSpPr/>
-          <p:nvPr/>
-        </p:nvSpPr>
-        <p:spPr>
-          <a:xfrm>
-            <a:off x="960120" y="5239512"/>
-            <a:ext cx="10149840" cy="201168"/>
+          <p:cNvPr id="24" name="Text 22"/>
+          <p:cNvSpPr/>
+          <p:nvPr/>
+        </p:nvSpPr>
+        <p:spPr>
+          <a:xfrm>
+            <a:off x="685800" y="2798064"/>
+            <a:ext cx="1691640" cy="164592"/>
           </a:xfrm>
           <a:prstGeom prst="rect">
             <a:avLst/>
@@ -20935,23 +20917,1749 @@
               <a:buNone/>
             </a:pPr>
             <a:r>
-              <a:rPr lang="en-US" sz="950" dirty="0">
-                <a:solidFill>
-                  <a:srgbClr val="FFFFFF"/>
-                </a:solidFill>
-                <a:latin typeface="Consolas" pitchFamily="34" charset="0"/>
-                <a:ea typeface="Consolas" pitchFamily="34" charset="-122"/>
-                <a:cs typeface="Consolas" pitchFamily="34" charset="-120"/>
-              </a:rPr>
-              <a:t>.venv\Scripts\python.exe scripts\run_leave_one_dataset_out.py --summary results\real_data_multi_summary_calibrated.csv --out results\leave_one_dataset_out_learned_selector.csv</a:t>
-            </a:r>
-            <a:endParaRPr lang="en-US" sz="950" dirty="0"/>
-          </a:p>
-        </p:txBody>
-      </p:sp>
-      <p:sp>
-        <p:nvSpPr>
-          <p:cNvPr id="13" name="Text 11"/>
+              <a:rPr lang="en-US" sz="860" dirty="0">
+                <a:solidFill>
+                  <a:srgbClr val="16213A"/>
+                </a:solidFill>
+              </a:rPr>
+              <a:t>KDD SMTP</a:t>
+            </a:r>
+            <a:endParaRPr lang="en-US" sz="860" dirty="0"/>
+          </a:p>
+        </p:txBody>
+      </p:sp>
+      <p:sp>
+        <p:nvSpPr>
+          <p:cNvPr id="25" name="Text 23"/>
+          <p:cNvSpPr/>
+          <p:nvPr/>
+        </p:nvSpPr>
+        <p:spPr>
+          <a:xfrm>
+            <a:off x="2743200" y="2798064"/>
+            <a:ext cx="1417320" cy="164592"/>
+          </a:xfrm>
+          <a:prstGeom prst="rect">
+            <a:avLst/>
+          </a:prstGeom>
+          <a:noFill/>
+          <a:ln/>
+        </p:spPr>
+        <p:txBody>
+          <a:bodyPr wrap="square" lIns="0" tIns="0" rIns="0" bIns="0" rtlCol="0" anchor="ctr">
+            <a:normAutofit/>
+          </a:bodyPr>
+          <a:lstStyle/>
+          <a:p>
+            <a:pPr indent="0" marL="0">
+              <a:buNone/>
+            </a:pPr>
+            <a:r>
+              <a:rPr lang="en-US" sz="860" dirty="0">
+                <a:solidFill>
+                  <a:srgbClr val="16213A"/>
+                </a:solidFill>
+              </a:rPr>
+              <a:t>OCSVM</a:t>
+            </a:r>
+            <a:endParaRPr lang="en-US" sz="860" dirty="0"/>
+          </a:p>
+        </p:txBody>
+      </p:sp>
+      <p:sp>
+        <p:nvSpPr>
+          <p:cNvPr id="26" name="Text 24"/>
+          <p:cNvSpPr/>
+          <p:nvPr/>
+        </p:nvSpPr>
+        <p:spPr>
+          <a:xfrm>
+            <a:off x="4572000" y="2798064"/>
+            <a:ext cx="2194560" cy="164592"/>
+          </a:xfrm>
+          <a:prstGeom prst="rect">
+            <a:avLst/>
+          </a:prstGeom>
+          <a:noFill/>
+          <a:ln/>
+        </p:spPr>
+        <p:txBody>
+          <a:bodyPr wrap="square" lIns="0" tIns="0" rIns="0" bIns="0" rtlCol="0" anchor="ctr">
+            <a:normAutofit/>
+          </a:bodyPr>
+          <a:lstStyle/>
+          <a:p>
+            <a:pPr indent="0" marL="0">
+              <a:buNone/>
+            </a:pPr>
+            <a:r>
+              <a:rPr lang="en-US" sz="860" dirty="0">
+                <a:solidFill>
+                  <a:srgbClr val="16213A"/>
+                </a:solidFill>
+              </a:rPr>
+              <a:t>Annthyroid</a:t>
+            </a:r>
+            <a:endParaRPr lang="en-US" sz="860" dirty="0"/>
+          </a:p>
+        </p:txBody>
+      </p:sp>
+      <p:sp>
+        <p:nvSpPr>
+          <p:cNvPr id="27" name="Text 25"/>
+          <p:cNvSpPr/>
+          <p:nvPr/>
+        </p:nvSpPr>
+        <p:spPr>
+          <a:xfrm>
+            <a:off x="7315200" y="2798064"/>
+            <a:ext cx="731520" cy="164592"/>
+          </a:xfrm>
+          <a:prstGeom prst="rect">
+            <a:avLst/>
+          </a:prstGeom>
+          <a:noFill/>
+          <a:ln/>
+        </p:spPr>
+        <p:txBody>
+          <a:bodyPr wrap="square" lIns="0" tIns="0" rIns="0" bIns="0" rtlCol="0" anchor="ctr">
+            <a:normAutofit/>
+          </a:bodyPr>
+          <a:lstStyle/>
+          <a:p>
+            <a:pPr indent="0" marL="0">
+              <a:buNone/>
+            </a:pPr>
+            <a:r>
+              <a:rPr lang="en-US" sz="860" dirty="0">
+                <a:solidFill>
+                  <a:srgbClr val="16213A"/>
+                </a:solidFill>
+              </a:rPr>
+              <a:t>0.006</a:t>
+            </a:r>
+            <a:endParaRPr lang="en-US" sz="860" dirty="0"/>
+          </a:p>
+        </p:txBody>
+      </p:sp>
+      <p:sp>
+        <p:nvSpPr>
+          <p:cNvPr id="28" name="Text 26"/>
+          <p:cNvSpPr/>
+          <p:nvPr/>
+        </p:nvSpPr>
+        <p:spPr>
+          <a:xfrm>
+            <a:off x="8412480" y="2798064"/>
+            <a:ext cx="731520" cy="164592"/>
+          </a:xfrm>
+          <a:prstGeom prst="rect">
+            <a:avLst/>
+          </a:prstGeom>
+          <a:noFill/>
+          <a:ln/>
+        </p:spPr>
+        <p:txBody>
+          <a:bodyPr wrap="square" lIns="0" tIns="0" rIns="0" bIns="0" rtlCol="0" anchor="ctr">
+            <a:normAutofit/>
+          </a:bodyPr>
+          <a:lstStyle/>
+          <a:p>
+            <a:pPr indent="0" marL="0">
+              <a:buNone/>
+            </a:pPr>
+            <a:r>
+              <a:rPr lang="en-US" sz="860" dirty="0">
+                <a:solidFill>
+                  <a:srgbClr val="16213A"/>
+                </a:solidFill>
+              </a:rPr>
+              <a:t>0.689</a:t>
+            </a:r>
+            <a:endParaRPr lang="en-US" sz="860" dirty="0"/>
+          </a:p>
+        </p:txBody>
+      </p:sp>
+      <p:sp>
+        <p:nvSpPr>
+          <p:cNvPr id="29" name="Shape 27"/>
+          <p:cNvSpPr/>
+          <p:nvPr/>
+        </p:nvSpPr>
+        <p:spPr>
+          <a:xfrm>
+            <a:off x="566928" y="3035808"/>
+            <a:ext cx="9098280" cy="256032"/>
+          </a:xfrm>
+          <a:prstGeom prst="rect">
+            <a:avLst/>
+          </a:prstGeom>
+          <a:solidFill>
+            <a:srgbClr val="F8FAFC"/>
+          </a:solidFill>
+          <a:ln w="12700">
+            <a:solidFill>
+              <a:srgbClr val="D9E2EF"/>
+            </a:solidFill>
+            <a:prstDash val="solid"/>
+          </a:ln>
+        </p:spPr>
+      </p:sp>
+      <p:sp>
+        <p:nvSpPr>
+          <p:cNvPr id="30" name="Text 28"/>
+          <p:cNvSpPr/>
+          <p:nvPr/>
+        </p:nvSpPr>
+        <p:spPr>
+          <a:xfrm>
+            <a:off x="685800" y="3108960"/>
+            <a:ext cx="1691640" cy="164592"/>
+          </a:xfrm>
+          <a:prstGeom prst="rect">
+            <a:avLst/>
+          </a:prstGeom>
+          <a:noFill/>
+          <a:ln/>
+        </p:spPr>
+        <p:txBody>
+          <a:bodyPr wrap="square" lIns="0" tIns="0" rIns="0" bIns="0" rtlCol="0" anchor="ctr">
+            <a:normAutofit/>
+          </a:bodyPr>
+          <a:lstStyle/>
+          <a:p>
+            <a:pPr indent="0" marL="0">
+              <a:buNone/>
+            </a:pPr>
+            <a:r>
+              <a:rPr lang="en-US" sz="860" dirty="0">
+                <a:solidFill>
+                  <a:srgbClr val="16213A"/>
+                </a:solidFill>
+              </a:rPr>
+              <a:t>Glass</a:t>
+            </a:r>
+            <a:endParaRPr lang="en-US" sz="860" dirty="0"/>
+          </a:p>
+        </p:txBody>
+      </p:sp>
+      <p:sp>
+        <p:nvSpPr>
+          <p:cNvPr id="31" name="Text 29"/>
+          <p:cNvSpPr/>
+          <p:nvPr/>
+        </p:nvSpPr>
+        <p:spPr>
+          <a:xfrm>
+            <a:off x="2743200" y="3108960"/>
+            <a:ext cx="1417320" cy="164592"/>
+          </a:xfrm>
+          <a:prstGeom prst="rect">
+            <a:avLst/>
+          </a:prstGeom>
+          <a:noFill/>
+          <a:ln/>
+        </p:spPr>
+        <p:txBody>
+          <a:bodyPr wrap="square" lIns="0" tIns="0" rIns="0" bIns="0" rtlCol="0" anchor="ctr">
+            <a:normAutofit/>
+          </a:bodyPr>
+          <a:lstStyle/>
+          <a:p>
+            <a:pPr indent="0" marL="0">
+              <a:buNone/>
+            </a:pPr>
+            <a:r>
+              <a:rPr lang="en-US" sz="860" dirty="0">
+                <a:solidFill>
+                  <a:srgbClr val="16213A"/>
+                </a:solidFill>
+              </a:rPr>
+              <a:t>OCSVM</a:t>
+            </a:r>
+            <a:endParaRPr lang="en-US" sz="860" dirty="0"/>
+          </a:p>
+        </p:txBody>
+      </p:sp>
+      <p:sp>
+        <p:nvSpPr>
+          <p:cNvPr id="32" name="Text 30"/>
+          <p:cNvSpPr/>
+          <p:nvPr/>
+        </p:nvSpPr>
+        <p:spPr>
+          <a:xfrm>
+            <a:off x="4572000" y="3108960"/>
+            <a:ext cx="2194560" cy="164592"/>
+          </a:xfrm>
+          <a:prstGeom prst="rect">
+            <a:avLst/>
+          </a:prstGeom>
+          <a:noFill/>
+          <a:ln/>
+        </p:spPr>
+        <p:txBody>
+          <a:bodyPr wrap="square" lIns="0" tIns="0" rIns="0" bIns="0" rtlCol="0" anchor="ctr">
+            <a:normAutofit/>
+          </a:bodyPr>
+          <a:lstStyle/>
+          <a:p>
+            <a:pPr indent="0" marL="0">
+              <a:buNone/>
+            </a:pPr>
+            <a:r>
+              <a:rPr lang="en-US" sz="860" dirty="0">
+                <a:solidFill>
+                  <a:srgbClr val="16213A"/>
+                </a:solidFill>
+              </a:rPr>
+              <a:t>Wine</a:t>
+            </a:r>
+            <a:endParaRPr lang="en-US" sz="860" dirty="0"/>
+          </a:p>
+        </p:txBody>
+      </p:sp>
+      <p:sp>
+        <p:nvSpPr>
+          <p:cNvPr id="33" name="Text 31"/>
+          <p:cNvSpPr/>
+          <p:nvPr/>
+        </p:nvSpPr>
+        <p:spPr>
+          <a:xfrm>
+            <a:off x="7315200" y="3108960"/>
+            <a:ext cx="731520" cy="164592"/>
+          </a:xfrm>
+          <a:prstGeom prst="rect">
+            <a:avLst/>
+          </a:prstGeom>
+          <a:noFill/>
+          <a:ln/>
+        </p:spPr>
+        <p:txBody>
+          <a:bodyPr wrap="square" lIns="0" tIns="0" rIns="0" bIns="0" rtlCol="0" anchor="ctr">
+            <a:normAutofit/>
+          </a:bodyPr>
+          <a:lstStyle/>
+          <a:p>
+            <a:pPr indent="0" marL="0">
+              <a:buNone/>
+            </a:pPr>
+            <a:r>
+              <a:rPr lang="en-US" sz="860" dirty="0">
+                <a:solidFill>
+                  <a:srgbClr val="16213A"/>
+                </a:solidFill>
+              </a:rPr>
+              <a:t>0.119</a:t>
+            </a:r>
+            <a:endParaRPr lang="en-US" sz="860" dirty="0"/>
+          </a:p>
+        </p:txBody>
+      </p:sp>
+      <p:sp>
+        <p:nvSpPr>
+          <p:cNvPr id="34" name="Text 32"/>
+          <p:cNvSpPr/>
+          <p:nvPr/>
+        </p:nvSpPr>
+        <p:spPr>
+          <a:xfrm>
+            <a:off x="8412480" y="3108960"/>
+            <a:ext cx="731520" cy="164592"/>
+          </a:xfrm>
+          <a:prstGeom prst="rect">
+            <a:avLst/>
+          </a:prstGeom>
+          <a:noFill/>
+          <a:ln/>
+        </p:spPr>
+        <p:txBody>
+          <a:bodyPr wrap="square" lIns="0" tIns="0" rIns="0" bIns="0" rtlCol="0" anchor="ctr">
+            <a:normAutofit/>
+          </a:bodyPr>
+          <a:lstStyle/>
+          <a:p>
+            <a:pPr indent="0" marL="0">
+              <a:buNone/>
+            </a:pPr>
+            <a:r>
+              <a:rPr lang="en-US" sz="860" dirty="0">
+                <a:solidFill>
+                  <a:srgbClr val="16213A"/>
+                </a:solidFill>
+              </a:rPr>
+              <a:t>0.450</a:t>
+            </a:r>
+            <a:endParaRPr lang="en-US" sz="860" dirty="0"/>
+          </a:p>
+        </p:txBody>
+      </p:sp>
+      <p:sp>
+        <p:nvSpPr>
+          <p:cNvPr id="35" name="Shape 33"/>
+          <p:cNvSpPr/>
+          <p:nvPr/>
+        </p:nvSpPr>
+        <p:spPr>
+          <a:xfrm>
+            <a:off x="566928" y="3346704"/>
+            <a:ext cx="9098280" cy="256032"/>
+          </a:xfrm>
+          <a:prstGeom prst="rect">
+            <a:avLst/>
+          </a:prstGeom>
+          <a:solidFill>
+            <a:srgbClr val="EEF6FF"/>
+          </a:solidFill>
+          <a:ln w="12700">
+            <a:solidFill>
+              <a:srgbClr val="D9E2EF"/>
+            </a:solidFill>
+            <a:prstDash val="solid"/>
+          </a:ln>
+        </p:spPr>
+      </p:sp>
+      <p:sp>
+        <p:nvSpPr>
+          <p:cNvPr id="36" name="Text 34"/>
+          <p:cNvSpPr/>
+          <p:nvPr/>
+        </p:nvSpPr>
+        <p:spPr>
+          <a:xfrm>
+            <a:off x="685800" y="3419856"/>
+            <a:ext cx="1691640" cy="164592"/>
+          </a:xfrm>
+          <a:prstGeom prst="rect">
+            <a:avLst/>
+          </a:prstGeom>
+          <a:noFill/>
+          <a:ln/>
+        </p:spPr>
+        <p:txBody>
+          <a:bodyPr wrap="square" lIns="0" tIns="0" rIns="0" bIns="0" rtlCol="0" anchor="ctr">
+            <a:normAutofit/>
+          </a:bodyPr>
+          <a:lstStyle/>
+          <a:p>
+            <a:pPr indent="0" marL="0">
+              <a:buNone/>
+            </a:pPr>
+            <a:r>
+              <a:rPr lang="en-US" sz="860" dirty="0">
+                <a:solidFill>
+                  <a:srgbClr val="16213A"/>
+                </a:solidFill>
+              </a:rPr>
+              <a:t>Pendigits</a:t>
+            </a:r>
+            <a:endParaRPr lang="en-US" sz="860" dirty="0"/>
+          </a:p>
+        </p:txBody>
+      </p:sp>
+      <p:sp>
+        <p:nvSpPr>
+          <p:cNvPr id="37" name="Text 35"/>
+          <p:cNvSpPr/>
+          <p:nvPr/>
+        </p:nvSpPr>
+        <p:spPr>
+          <a:xfrm>
+            <a:off x="2743200" y="3419856"/>
+            <a:ext cx="1417320" cy="164592"/>
+          </a:xfrm>
+          <a:prstGeom prst="rect">
+            <a:avLst/>
+          </a:prstGeom>
+          <a:noFill/>
+          <a:ln/>
+        </p:spPr>
+        <p:txBody>
+          <a:bodyPr wrap="square" lIns="0" tIns="0" rIns="0" bIns="0" rtlCol="0" anchor="ctr">
+            <a:normAutofit/>
+          </a:bodyPr>
+          <a:lstStyle/>
+          <a:p>
+            <a:pPr indent="0" marL="0">
+              <a:buNone/>
+            </a:pPr>
+            <a:r>
+              <a:rPr lang="en-US" sz="860" dirty="0">
+                <a:solidFill>
+                  <a:srgbClr val="16213A"/>
+                </a:solidFill>
+              </a:rPr>
+              <a:t>IForest</a:t>
+            </a:r>
+            <a:endParaRPr lang="en-US" sz="860" dirty="0"/>
+          </a:p>
+        </p:txBody>
+      </p:sp>
+      <p:sp>
+        <p:nvSpPr>
+          <p:cNvPr id="38" name="Text 36"/>
+          <p:cNvSpPr/>
+          <p:nvPr/>
+        </p:nvSpPr>
+        <p:spPr>
+          <a:xfrm>
+            <a:off x="4572000" y="3419856"/>
+            <a:ext cx="2194560" cy="164592"/>
+          </a:xfrm>
+          <a:prstGeom prst="rect">
+            <a:avLst/>
+          </a:prstGeom>
+          <a:noFill/>
+          <a:ln/>
+        </p:spPr>
+        <p:txBody>
+          <a:bodyPr wrap="square" lIns="0" tIns="0" rIns="0" bIns="0" rtlCol="0" anchor="ctr">
+            <a:normAutofit/>
+          </a:bodyPr>
+          <a:lstStyle/>
+          <a:p>
+            <a:pPr indent="0" marL="0">
+              <a:buNone/>
+            </a:pPr>
+            <a:r>
+              <a:rPr lang="en-US" sz="860" dirty="0">
+                <a:solidFill>
+                  <a:srgbClr val="16213A"/>
+                </a:solidFill>
+              </a:rPr>
+              <a:t>Ionosphere</a:t>
+            </a:r>
+            <a:endParaRPr lang="en-US" sz="860" dirty="0"/>
+          </a:p>
+        </p:txBody>
+      </p:sp>
+      <p:sp>
+        <p:nvSpPr>
+          <p:cNvPr id="39" name="Text 37"/>
+          <p:cNvSpPr/>
+          <p:nvPr/>
+        </p:nvSpPr>
+        <p:spPr>
+          <a:xfrm>
+            <a:off x="7315200" y="3419856"/>
+            <a:ext cx="731520" cy="164592"/>
+          </a:xfrm>
+          <a:prstGeom prst="rect">
+            <a:avLst/>
+          </a:prstGeom>
+          <a:noFill/>
+          <a:ln/>
+        </p:spPr>
+        <p:txBody>
+          <a:bodyPr wrap="square" lIns="0" tIns="0" rIns="0" bIns="0" rtlCol="0" anchor="ctr">
+            <a:normAutofit/>
+          </a:bodyPr>
+          <a:lstStyle/>
+          <a:p>
+            <a:pPr indent="0" marL="0">
+              <a:buNone/>
+            </a:pPr>
+            <a:r>
+              <a:rPr lang="en-US" sz="860" dirty="0">
+                <a:solidFill>
+                  <a:srgbClr val="16213A"/>
+                </a:solidFill>
+              </a:rPr>
+              <a:t>0.198</a:t>
+            </a:r>
+            <a:endParaRPr lang="en-US" sz="860" dirty="0"/>
+          </a:p>
+        </p:txBody>
+      </p:sp>
+      <p:sp>
+        <p:nvSpPr>
+          <p:cNvPr id="40" name="Text 38"/>
+          <p:cNvSpPr/>
+          <p:nvPr/>
+        </p:nvSpPr>
+        <p:spPr>
+          <a:xfrm>
+            <a:off x="8412480" y="3419856"/>
+            <a:ext cx="731520" cy="164592"/>
+          </a:xfrm>
+          <a:prstGeom prst="rect">
+            <a:avLst/>
+          </a:prstGeom>
+          <a:noFill/>
+          <a:ln/>
+        </p:spPr>
+        <p:txBody>
+          <a:bodyPr wrap="square" lIns="0" tIns="0" rIns="0" bIns="0" rtlCol="0" anchor="ctr">
+            <a:normAutofit/>
+          </a:bodyPr>
+          <a:lstStyle/>
+          <a:p>
+            <a:pPr indent="0" marL="0">
+              <a:buNone/>
+            </a:pPr>
+            <a:r>
+              <a:rPr lang="en-US" sz="860" dirty="0">
+                <a:solidFill>
+                  <a:srgbClr val="16213A"/>
+                </a:solidFill>
+              </a:rPr>
+              <a:t>0.616</a:t>
+            </a:r>
+            <a:endParaRPr lang="en-US" sz="860" dirty="0"/>
+          </a:p>
+        </p:txBody>
+      </p:sp>
+      <p:sp>
+        <p:nvSpPr>
+          <p:cNvPr id="41" name="Shape 39"/>
+          <p:cNvSpPr/>
+          <p:nvPr/>
+        </p:nvSpPr>
+        <p:spPr>
+          <a:xfrm>
+            <a:off x="566928" y="3657600"/>
+            <a:ext cx="9098280" cy="256032"/>
+          </a:xfrm>
+          <a:prstGeom prst="rect">
+            <a:avLst/>
+          </a:prstGeom>
+          <a:solidFill>
+            <a:srgbClr val="F8FAFC"/>
+          </a:solidFill>
+          <a:ln w="12700">
+            <a:solidFill>
+              <a:srgbClr val="D9E2EF"/>
+            </a:solidFill>
+            <a:prstDash val="solid"/>
+          </a:ln>
+        </p:spPr>
+      </p:sp>
+      <p:sp>
+        <p:nvSpPr>
+          <p:cNvPr id="42" name="Text 40"/>
+          <p:cNvSpPr/>
+          <p:nvPr/>
+        </p:nvSpPr>
+        <p:spPr>
+          <a:xfrm>
+            <a:off x="685800" y="3730752"/>
+            <a:ext cx="1691640" cy="164592"/>
+          </a:xfrm>
+          <a:prstGeom prst="rect">
+            <a:avLst/>
+          </a:prstGeom>
+          <a:noFill/>
+          <a:ln/>
+        </p:spPr>
+        <p:txBody>
+          <a:bodyPr wrap="square" lIns="0" tIns="0" rIns="0" bIns="0" rtlCol="0" anchor="ctr">
+            <a:normAutofit/>
+          </a:bodyPr>
+          <a:lstStyle/>
+          <a:p>
+            <a:pPr indent="0" marL="0">
+              <a:buNone/>
+            </a:pPr>
+            <a:r>
+              <a:rPr lang="en-US" sz="860" dirty="0">
+                <a:solidFill>
+                  <a:srgbClr val="16213A"/>
+                </a:solidFill>
+              </a:rPr>
+              <a:t>Ionosphere</a:t>
+            </a:r>
+            <a:endParaRPr lang="en-US" sz="860" dirty="0"/>
+          </a:p>
+        </p:txBody>
+      </p:sp>
+      <p:sp>
+        <p:nvSpPr>
+          <p:cNvPr id="43" name="Text 41"/>
+          <p:cNvSpPr/>
+          <p:nvPr/>
+        </p:nvSpPr>
+        <p:spPr>
+          <a:xfrm>
+            <a:off x="2743200" y="3730752"/>
+            <a:ext cx="1417320" cy="164592"/>
+          </a:xfrm>
+          <a:prstGeom prst="rect">
+            <a:avLst/>
+          </a:prstGeom>
+          <a:noFill/>
+          <a:ln/>
+        </p:spPr>
+        <p:txBody>
+          <a:bodyPr wrap="square" lIns="0" tIns="0" rIns="0" bIns="0" rtlCol="0" anchor="ctr">
+            <a:normAutofit/>
+          </a:bodyPr>
+          <a:lstStyle/>
+          <a:p>
+            <a:pPr indent="0" marL="0">
+              <a:buNone/>
+            </a:pPr>
+            <a:r>
+              <a:rPr lang="en-US" sz="860" dirty="0">
+                <a:solidFill>
+                  <a:srgbClr val="16213A"/>
+                </a:solidFill>
+              </a:rPr>
+              <a:t>Temporal</a:t>
+            </a:r>
+            <a:endParaRPr lang="en-US" sz="860" dirty="0"/>
+          </a:p>
+        </p:txBody>
+      </p:sp>
+      <p:sp>
+        <p:nvSpPr>
+          <p:cNvPr id="44" name="Text 42"/>
+          <p:cNvSpPr/>
+          <p:nvPr/>
+        </p:nvSpPr>
+        <p:spPr>
+          <a:xfrm>
+            <a:off x="4572000" y="3730752"/>
+            <a:ext cx="2194560" cy="164592"/>
+          </a:xfrm>
+          <a:prstGeom prst="rect">
+            <a:avLst/>
+          </a:prstGeom>
+          <a:noFill/>
+          <a:ln/>
+        </p:spPr>
+        <p:txBody>
+          <a:bodyPr wrap="square" lIns="0" tIns="0" rIns="0" bIns="0" rtlCol="0" anchor="ctr">
+            <a:normAutofit/>
+          </a:bodyPr>
+          <a:lstStyle/>
+          <a:p>
+            <a:pPr indent="0" marL="0">
+              <a:buNone/>
+            </a:pPr>
+            <a:r>
+              <a:rPr lang="en-US" sz="860" dirty="0">
+                <a:solidFill>
+                  <a:srgbClr val="16213A"/>
+                </a:solidFill>
+              </a:rPr>
+              <a:t>Pendigits</a:t>
+            </a:r>
+            <a:endParaRPr lang="en-US" sz="860" dirty="0"/>
+          </a:p>
+        </p:txBody>
+      </p:sp>
+      <p:sp>
+        <p:nvSpPr>
+          <p:cNvPr id="45" name="Text 43"/>
+          <p:cNvSpPr/>
+          <p:nvPr/>
+        </p:nvSpPr>
+        <p:spPr>
+          <a:xfrm>
+            <a:off x="7315200" y="3730752"/>
+            <a:ext cx="731520" cy="164592"/>
+          </a:xfrm>
+          <a:prstGeom prst="rect">
+            <a:avLst/>
+          </a:prstGeom>
+          <a:noFill/>
+          <a:ln/>
+        </p:spPr>
+        <p:txBody>
+          <a:bodyPr wrap="square" lIns="0" tIns="0" rIns="0" bIns="0" rtlCol="0" anchor="ctr">
+            <a:normAutofit/>
+          </a:bodyPr>
+          <a:lstStyle/>
+          <a:p>
+            <a:pPr indent="0" marL="0">
+              <a:buNone/>
+            </a:pPr>
+            <a:r>
+              <a:rPr lang="en-US" sz="860" dirty="0">
+                <a:solidFill>
+                  <a:srgbClr val="16213A"/>
+                </a:solidFill>
+              </a:rPr>
+              <a:t>0.221</a:t>
+            </a:r>
+            <a:endParaRPr lang="en-US" sz="860" dirty="0"/>
+          </a:p>
+        </p:txBody>
+      </p:sp>
+      <p:sp>
+        <p:nvSpPr>
+          <p:cNvPr id="46" name="Text 44"/>
+          <p:cNvSpPr/>
+          <p:nvPr/>
+        </p:nvSpPr>
+        <p:spPr>
+          <a:xfrm>
+            <a:off x="8412480" y="3730752"/>
+            <a:ext cx="731520" cy="164592"/>
+          </a:xfrm>
+          <a:prstGeom prst="rect">
+            <a:avLst/>
+          </a:prstGeom>
+          <a:noFill/>
+          <a:ln/>
+        </p:spPr>
+        <p:txBody>
+          <a:bodyPr wrap="square" lIns="0" tIns="0" rIns="0" bIns="0" rtlCol="0" anchor="ctr">
+            <a:normAutofit/>
+          </a:bodyPr>
+          <a:lstStyle/>
+          <a:p>
+            <a:pPr indent="0" marL="0">
+              <a:buNone/>
+            </a:pPr>
+            <a:r>
+              <a:rPr lang="en-US" sz="860" dirty="0">
+                <a:solidFill>
+                  <a:srgbClr val="16213A"/>
+                </a:solidFill>
+              </a:rPr>
+              <a:t>0.616</a:t>
+            </a:r>
+            <a:endParaRPr lang="en-US" sz="860" dirty="0"/>
+          </a:p>
+        </p:txBody>
+      </p:sp>
+      <p:sp>
+        <p:nvSpPr>
+          <p:cNvPr id="47" name="Shape 45"/>
+          <p:cNvSpPr/>
+          <p:nvPr/>
+        </p:nvSpPr>
+        <p:spPr>
+          <a:xfrm>
+            <a:off x="566928" y="3968496"/>
+            <a:ext cx="9098280" cy="256032"/>
+          </a:xfrm>
+          <a:prstGeom prst="rect">
+            <a:avLst/>
+          </a:prstGeom>
+          <a:solidFill>
+            <a:srgbClr val="EEF6FF"/>
+          </a:solidFill>
+          <a:ln w="12700">
+            <a:solidFill>
+              <a:srgbClr val="D9E2EF"/>
+            </a:solidFill>
+            <a:prstDash val="solid"/>
+          </a:ln>
+        </p:spPr>
+      </p:sp>
+      <p:sp>
+        <p:nvSpPr>
+          <p:cNvPr id="48" name="Text 46"/>
+          <p:cNvSpPr/>
+          <p:nvPr/>
+        </p:nvSpPr>
+        <p:spPr>
+          <a:xfrm>
+            <a:off x="685800" y="4041648"/>
+            <a:ext cx="1691640" cy="164592"/>
+          </a:xfrm>
+          <a:prstGeom prst="rect">
+            <a:avLst/>
+          </a:prstGeom>
+          <a:noFill/>
+          <a:ln/>
+        </p:spPr>
+        <p:txBody>
+          <a:bodyPr wrap="square" lIns="0" tIns="0" rIns="0" bIns="0" rtlCol="0" anchor="ctr">
+            <a:normAutofit/>
+          </a:bodyPr>
+          <a:lstStyle/>
+          <a:p>
+            <a:pPr indent="0" marL="0">
+              <a:buNone/>
+            </a:pPr>
+            <a:r>
+              <a:rPr lang="en-US" sz="860" dirty="0">
+                <a:solidFill>
+                  <a:srgbClr val="16213A"/>
+                </a:solidFill>
+              </a:rPr>
+              <a:t>WDBC</a:t>
+            </a:r>
+            <a:endParaRPr lang="en-US" sz="860" dirty="0"/>
+          </a:p>
+        </p:txBody>
+      </p:sp>
+      <p:sp>
+        <p:nvSpPr>
+          <p:cNvPr id="49" name="Text 47"/>
+          <p:cNvSpPr/>
+          <p:nvPr/>
+        </p:nvSpPr>
+        <p:spPr>
+          <a:xfrm>
+            <a:off x="2743200" y="4041648"/>
+            <a:ext cx="1417320" cy="164592"/>
+          </a:xfrm>
+          <a:prstGeom prst="rect">
+            <a:avLst/>
+          </a:prstGeom>
+          <a:noFill/>
+          <a:ln/>
+        </p:spPr>
+        <p:txBody>
+          <a:bodyPr wrap="square" lIns="0" tIns="0" rIns="0" bIns="0" rtlCol="0" anchor="ctr">
+            <a:normAutofit/>
+          </a:bodyPr>
+          <a:lstStyle/>
+          <a:p>
+            <a:pPr indent="0" marL="0">
+              <a:buNone/>
+            </a:pPr>
+            <a:r>
+              <a:rPr lang="en-US" sz="860" dirty="0">
+                <a:solidFill>
+                  <a:srgbClr val="16213A"/>
+                </a:solidFill>
+              </a:rPr>
+              <a:t>OCSVM</a:t>
+            </a:r>
+            <a:endParaRPr lang="en-US" sz="860" dirty="0"/>
+          </a:p>
+        </p:txBody>
+      </p:sp>
+      <p:sp>
+        <p:nvSpPr>
+          <p:cNvPr id="50" name="Text 48"/>
+          <p:cNvSpPr/>
+          <p:nvPr/>
+        </p:nvSpPr>
+        <p:spPr>
+          <a:xfrm>
+            <a:off x="4572000" y="4041648"/>
+            <a:ext cx="2194560" cy="164592"/>
+          </a:xfrm>
+          <a:prstGeom prst="rect">
+            <a:avLst/>
+          </a:prstGeom>
+          <a:noFill/>
+          <a:ln/>
+        </p:spPr>
+        <p:txBody>
+          <a:bodyPr wrap="square" lIns="0" tIns="0" rIns="0" bIns="0" rtlCol="0" anchor="ctr">
+            <a:normAutofit/>
+          </a:bodyPr>
+          <a:lstStyle/>
+          <a:p>
+            <a:pPr indent="0" marL="0">
+              <a:buNone/>
+            </a:pPr>
+            <a:r>
+              <a:rPr lang="en-US" sz="860" dirty="0">
+                <a:solidFill>
+                  <a:srgbClr val="16213A"/>
+                </a:solidFill>
+              </a:rPr>
+              <a:t>Wine</a:t>
+            </a:r>
+            <a:endParaRPr lang="en-US" sz="860" dirty="0"/>
+          </a:p>
+        </p:txBody>
+      </p:sp>
+      <p:sp>
+        <p:nvSpPr>
+          <p:cNvPr id="51" name="Text 49"/>
+          <p:cNvSpPr/>
+          <p:nvPr/>
+        </p:nvSpPr>
+        <p:spPr>
+          <a:xfrm>
+            <a:off x="7315200" y="4041648"/>
+            <a:ext cx="731520" cy="164592"/>
+          </a:xfrm>
+          <a:prstGeom prst="rect">
+            <a:avLst/>
+          </a:prstGeom>
+          <a:noFill/>
+          <a:ln/>
+        </p:spPr>
+        <p:txBody>
+          <a:bodyPr wrap="square" lIns="0" tIns="0" rIns="0" bIns="0" rtlCol="0" anchor="ctr">
+            <a:normAutofit/>
+          </a:bodyPr>
+          <a:lstStyle/>
+          <a:p>
+            <a:pPr indent="0" marL="0">
+              <a:buNone/>
+            </a:pPr>
+            <a:r>
+              <a:rPr lang="en-US" sz="860" dirty="0">
+                <a:solidFill>
+                  <a:srgbClr val="16213A"/>
+                </a:solidFill>
+              </a:rPr>
+              <a:t>0.459</a:t>
+            </a:r>
+            <a:endParaRPr lang="en-US" sz="860" dirty="0"/>
+          </a:p>
+        </p:txBody>
+      </p:sp>
+      <p:sp>
+        <p:nvSpPr>
+          <p:cNvPr id="52" name="Text 50"/>
+          <p:cNvSpPr/>
+          <p:nvPr/>
+        </p:nvSpPr>
+        <p:spPr>
+          <a:xfrm>
+            <a:off x="8412480" y="4041648"/>
+            <a:ext cx="731520" cy="164592"/>
+          </a:xfrm>
+          <a:prstGeom prst="rect">
+            <a:avLst/>
+          </a:prstGeom>
+          <a:noFill/>
+          <a:ln/>
+        </p:spPr>
+        <p:txBody>
+          <a:bodyPr wrap="square" lIns="0" tIns="0" rIns="0" bIns="0" rtlCol="0" anchor="ctr">
+            <a:normAutofit/>
+          </a:bodyPr>
+          <a:lstStyle/>
+          <a:p>
+            <a:pPr indent="0" marL="0">
+              <a:buNone/>
+            </a:pPr>
+            <a:r>
+              <a:rPr lang="en-US" sz="860" dirty="0">
+                <a:solidFill>
+                  <a:srgbClr val="16213A"/>
+                </a:solidFill>
+              </a:rPr>
+              <a:t>0.633</a:t>
+            </a:r>
+            <a:endParaRPr lang="en-US" sz="860" dirty="0"/>
+          </a:p>
+        </p:txBody>
+      </p:sp>
+      <p:sp>
+        <p:nvSpPr>
+          <p:cNvPr id="53" name="Shape 51"/>
+          <p:cNvSpPr/>
+          <p:nvPr/>
+        </p:nvSpPr>
+        <p:spPr>
+          <a:xfrm>
+            <a:off x="566928" y="4279392"/>
+            <a:ext cx="9098280" cy="256032"/>
+          </a:xfrm>
+          <a:prstGeom prst="rect">
+            <a:avLst/>
+          </a:prstGeom>
+          <a:solidFill>
+            <a:srgbClr val="F8FAFC"/>
+          </a:solidFill>
+          <a:ln w="12700">
+            <a:solidFill>
+              <a:srgbClr val="D9E2EF"/>
+            </a:solidFill>
+            <a:prstDash val="solid"/>
+          </a:ln>
+        </p:spPr>
+      </p:sp>
+      <p:sp>
+        <p:nvSpPr>
+          <p:cNvPr id="54" name="Text 52"/>
+          <p:cNvSpPr/>
+          <p:nvPr/>
+        </p:nvSpPr>
+        <p:spPr>
+          <a:xfrm>
+            <a:off x="685800" y="4352544"/>
+            <a:ext cx="1691640" cy="164592"/>
+          </a:xfrm>
+          <a:prstGeom prst="rect">
+            <a:avLst/>
+          </a:prstGeom>
+          <a:noFill/>
+          <a:ln/>
+        </p:spPr>
+        <p:txBody>
+          <a:bodyPr wrap="square" lIns="0" tIns="0" rIns="0" bIns="0" rtlCol="0" anchor="ctr">
+            <a:normAutofit/>
+          </a:bodyPr>
+          <a:lstStyle/>
+          <a:p>
+            <a:pPr indent="0" marL="0">
+              <a:buNone/>
+            </a:pPr>
+            <a:r>
+              <a:rPr lang="en-US" sz="860" dirty="0">
+                <a:solidFill>
+                  <a:srgbClr val="16213A"/>
+                </a:solidFill>
+              </a:rPr>
+              <a:t>Wine</a:t>
+            </a:r>
+            <a:endParaRPr lang="en-US" sz="860" dirty="0"/>
+          </a:p>
+        </p:txBody>
+      </p:sp>
+      <p:sp>
+        <p:nvSpPr>
+          <p:cNvPr id="55" name="Text 53"/>
+          <p:cNvSpPr/>
+          <p:nvPr/>
+        </p:nvSpPr>
+        <p:spPr>
+          <a:xfrm>
+            <a:off x="2743200" y="4352544"/>
+            <a:ext cx="1417320" cy="164592"/>
+          </a:xfrm>
+          <a:prstGeom prst="rect">
+            <a:avLst/>
+          </a:prstGeom>
+          <a:noFill/>
+          <a:ln/>
+        </p:spPr>
+        <p:txBody>
+          <a:bodyPr wrap="square" lIns="0" tIns="0" rIns="0" bIns="0" rtlCol="0" anchor="ctr">
+            <a:normAutofit/>
+          </a:bodyPr>
+          <a:lstStyle/>
+          <a:p>
+            <a:pPr indent="0" marL="0">
+              <a:buNone/>
+            </a:pPr>
+            <a:r>
+              <a:rPr lang="en-US" sz="860" dirty="0">
+                <a:solidFill>
+                  <a:srgbClr val="16213A"/>
+                </a:solidFill>
+              </a:rPr>
+              <a:t>IForest</a:t>
+            </a:r>
+            <a:endParaRPr lang="en-US" sz="860" dirty="0"/>
+          </a:p>
+        </p:txBody>
+      </p:sp>
+      <p:sp>
+        <p:nvSpPr>
+          <p:cNvPr id="56" name="Text 54"/>
+          <p:cNvSpPr/>
+          <p:nvPr/>
+        </p:nvSpPr>
+        <p:spPr>
+          <a:xfrm>
+            <a:off x="4572000" y="4352544"/>
+            <a:ext cx="2194560" cy="164592"/>
+          </a:xfrm>
+          <a:prstGeom prst="rect">
+            <a:avLst/>
+          </a:prstGeom>
+          <a:noFill/>
+          <a:ln/>
+        </p:spPr>
+        <p:txBody>
+          <a:bodyPr wrap="square" lIns="0" tIns="0" rIns="0" bIns="0" rtlCol="0" anchor="ctr">
+            <a:normAutofit/>
+          </a:bodyPr>
+          <a:lstStyle/>
+          <a:p>
+            <a:pPr indent="0" marL="0">
+              <a:buNone/>
+            </a:pPr>
+            <a:r>
+              <a:rPr lang="en-US" sz="860" dirty="0">
+                <a:solidFill>
+                  <a:srgbClr val="16213A"/>
+                </a:solidFill>
+              </a:rPr>
+              <a:t>Yeast</a:t>
+            </a:r>
+            <a:endParaRPr lang="en-US" sz="860" dirty="0"/>
+          </a:p>
+        </p:txBody>
+      </p:sp>
+      <p:sp>
+        <p:nvSpPr>
+          <p:cNvPr id="57" name="Text 55"/>
+          <p:cNvSpPr/>
+          <p:nvPr/>
+        </p:nvSpPr>
+        <p:spPr>
+          <a:xfrm>
+            <a:off x="7315200" y="4352544"/>
+            <a:ext cx="731520" cy="164592"/>
+          </a:xfrm>
+          <a:prstGeom prst="rect">
+            <a:avLst/>
+          </a:prstGeom>
+          <a:noFill/>
+          <a:ln/>
+        </p:spPr>
+        <p:txBody>
+          <a:bodyPr wrap="square" lIns="0" tIns="0" rIns="0" bIns="0" rtlCol="0" anchor="ctr">
+            <a:normAutofit/>
+          </a:bodyPr>
+          <a:lstStyle/>
+          <a:p>
+            <a:pPr indent="0" marL="0">
+              <a:buNone/>
+            </a:pPr>
+            <a:r>
+              <a:rPr lang="en-US" sz="860" dirty="0">
+                <a:solidFill>
+                  <a:srgbClr val="16213A"/>
+                </a:solidFill>
+              </a:rPr>
+              <a:t>0.000</a:t>
+            </a:r>
+            <a:endParaRPr lang="en-US" sz="860" dirty="0"/>
+          </a:p>
+        </p:txBody>
+      </p:sp>
+      <p:sp>
+        <p:nvSpPr>
+          <p:cNvPr id="58" name="Text 56"/>
+          <p:cNvSpPr/>
+          <p:nvPr/>
+        </p:nvSpPr>
+        <p:spPr>
+          <a:xfrm>
+            <a:off x="8412480" y="4352544"/>
+            <a:ext cx="731520" cy="164592"/>
+          </a:xfrm>
+          <a:prstGeom prst="rect">
+            <a:avLst/>
+          </a:prstGeom>
+          <a:noFill/>
+          <a:ln/>
+        </p:spPr>
+        <p:txBody>
+          <a:bodyPr wrap="square" lIns="0" tIns="0" rIns="0" bIns="0" rtlCol="0" anchor="ctr">
+            <a:normAutofit/>
+          </a:bodyPr>
+          <a:lstStyle/>
+          <a:p>
+            <a:pPr indent="0" marL="0">
+              <a:buNone/>
+            </a:pPr>
+            <a:r>
+              <a:rPr lang="en-US" sz="860" dirty="0">
+                <a:solidFill>
+                  <a:srgbClr val="16213A"/>
+                </a:solidFill>
+              </a:rPr>
+              <a:t>0.637</a:t>
+            </a:r>
+            <a:endParaRPr lang="en-US" sz="860" dirty="0"/>
+          </a:p>
+        </p:txBody>
+      </p:sp>
+      <p:sp>
+        <p:nvSpPr>
+          <p:cNvPr id="59" name="Shape 57"/>
+          <p:cNvSpPr/>
+          <p:nvPr/>
+        </p:nvSpPr>
+        <p:spPr>
+          <a:xfrm>
+            <a:off x="566928" y="4590288"/>
+            <a:ext cx="9098280" cy="256032"/>
+          </a:xfrm>
+          <a:prstGeom prst="rect">
+            <a:avLst/>
+          </a:prstGeom>
+          <a:solidFill>
+            <a:srgbClr val="EEF6FF"/>
+          </a:solidFill>
+          <a:ln w="12700">
+            <a:solidFill>
+              <a:srgbClr val="D9E2EF"/>
+            </a:solidFill>
+            <a:prstDash val="solid"/>
+          </a:ln>
+        </p:spPr>
+      </p:sp>
+      <p:sp>
+        <p:nvSpPr>
+          <p:cNvPr id="60" name="Text 58"/>
+          <p:cNvSpPr/>
+          <p:nvPr/>
+        </p:nvSpPr>
+        <p:spPr>
+          <a:xfrm>
+            <a:off x="685800" y="4663440"/>
+            <a:ext cx="1691640" cy="164592"/>
+          </a:xfrm>
+          <a:prstGeom prst="rect">
+            <a:avLst/>
+          </a:prstGeom>
+          <a:noFill/>
+          <a:ln/>
+        </p:spPr>
+        <p:txBody>
+          <a:bodyPr wrap="square" lIns="0" tIns="0" rIns="0" bIns="0" rtlCol="0" anchor="ctr">
+            <a:normAutofit/>
+          </a:bodyPr>
+          <a:lstStyle/>
+          <a:p>
+            <a:pPr indent="0" marL="0">
+              <a:buNone/>
+            </a:pPr>
+            <a:r>
+              <a:rPr lang="en-US" sz="860" dirty="0">
+                <a:solidFill>
+                  <a:srgbClr val="16213A"/>
+                </a:solidFill>
+              </a:rPr>
+              <a:t>Ecoli</a:t>
+            </a:r>
+            <a:endParaRPr lang="en-US" sz="860" dirty="0"/>
+          </a:p>
+        </p:txBody>
+      </p:sp>
+      <p:sp>
+        <p:nvSpPr>
+          <p:cNvPr id="61" name="Text 59"/>
+          <p:cNvSpPr/>
+          <p:nvPr/>
+        </p:nvSpPr>
+        <p:spPr>
+          <a:xfrm>
+            <a:off x="2743200" y="4663440"/>
+            <a:ext cx="1417320" cy="164592"/>
+          </a:xfrm>
+          <a:prstGeom prst="rect">
+            <a:avLst/>
+          </a:prstGeom>
+          <a:noFill/>
+          <a:ln/>
+        </p:spPr>
+        <p:txBody>
+          <a:bodyPr wrap="square" lIns="0" tIns="0" rIns="0" bIns="0" rtlCol="0" anchor="ctr">
+            <a:normAutofit/>
+          </a:bodyPr>
+          <a:lstStyle/>
+          <a:p>
+            <a:pPr indent="0" marL="0">
+              <a:buNone/>
+            </a:pPr>
+            <a:r>
+              <a:rPr lang="en-US" sz="860" dirty="0">
+                <a:solidFill>
+                  <a:srgbClr val="16213A"/>
+                </a:solidFill>
+              </a:rPr>
+              <a:t>OCSVM</a:t>
+            </a:r>
+            <a:endParaRPr lang="en-US" sz="860" dirty="0"/>
+          </a:p>
+        </p:txBody>
+      </p:sp>
+      <p:sp>
+        <p:nvSpPr>
+          <p:cNvPr id="62" name="Text 60"/>
+          <p:cNvSpPr/>
+          <p:nvPr/>
+        </p:nvSpPr>
+        <p:spPr>
+          <a:xfrm>
+            <a:off x="4572000" y="4663440"/>
+            <a:ext cx="2194560" cy="164592"/>
+          </a:xfrm>
+          <a:prstGeom prst="rect">
+            <a:avLst/>
+          </a:prstGeom>
+          <a:noFill/>
+          <a:ln/>
+        </p:spPr>
+        <p:txBody>
+          <a:bodyPr wrap="square" lIns="0" tIns="0" rIns="0" bIns="0" rtlCol="0" anchor="ctr">
+            <a:normAutofit/>
+          </a:bodyPr>
+          <a:lstStyle/>
+          <a:p>
+            <a:pPr indent="0" marL="0">
+              <a:buNone/>
+            </a:pPr>
+            <a:r>
+              <a:rPr lang="en-US" sz="860" dirty="0">
+                <a:solidFill>
+                  <a:srgbClr val="16213A"/>
+                </a:solidFill>
+              </a:rPr>
+              <a:t>Wine</a:t>
+            </a:r>
+            <a:endParaRPr lang="en-US" sz="860" dirty="0"/>
+          </a:p>
+        </p:txBody>
+      </p:sp>
+      <p:sp>
+        <p:nvSpPr>
+          <p:cNvPr id="63" name="Text 61"/>
+          <p:cNvSpPr/>
+          <p:nvPr/>
+        </p:nvSpPr>
+        <p:spPr>
+          <a:xfrm>
+            <a:off x="7315200" y="4663440"/>
+            <a:ext cx="731520" cy="164592"/>
+          </a:xfrm>
+          <a:prstGeom prst="rect">
+            <a:avLst/>
+          </a:prstGeom>
+          <a:noFill/>
+          <a:ln/>
+        </p:spPr>
+        <p:txBody>
+          <a:bodyPr wrap="square" lIns="0" tIns="0" rIns="0" bIns="0" rtlCol="0" anchor="ctr">
+            <a:normAutofit/>
+          </a:bodyPr>
+          <a:lstStyle/>
+          <a:p>
+            <a:pPr indent="0" marL="0">
+              <a:buNone/>
+            </a:pPr>
+            <a:r>
+              <a:rPr lang="en-US" sz="860" dirty="0">
+                <a:solidFill>
+                  <a:srgbClr val="16213A"/>
+                </a:solidFill>
+              </a:rPr>
+              <a:t>0.000</a:t>
+            </a:r>
+            <a:endParaRPr lang="en-US" sz="860" dirty="0"/>
+          </a:p>
+        </p:txBody>
+      </p:sp>
+      <p:sp>
+        <p:nvSpPr>
+          <p:cNvPr id="64" name="Text 62"/>
+          <p:cNvSpPr/>
+          <p:nvPr/>
+        </p:nvSpPr>
+        <p:spPr>
+          <a:xfrm>
+            <a:off x="8412480" y="4663440"/>
+            <a:ext cx="731520" cy="164592"/>
+          </a:xfrm>
+          <a:prstGeom prst="rect">
+            <a:avLst/>
+          </a:prstGeom>
+          <a:noFill/>
+          <a:ln/>
+        </p:spPr>
+        <p:txBody>
+          <a:bodyPr wrap="square" lIns="0" tIns="0" rIns="0" bIns="0" rtlCol="0" anchor="ctr">
+            <a:normAutofit/>
+          </a:bodyPr>
+          <a:lstStyle/>
+          <a:p>
+            <a:pPr indent="0" marL="0">
+              <a:buNone/>
+            </a:pPr>
+            <a:r>
+              <a:rPr lang="en-US" sz="860" dirty="0">
+                <a:solidFill>
+                  <a:srgbClr val="16213A"/>
+                </a:solidFill>
+              </a:rPr>
+              <a:t>0.299</a:t>
+            </a:r>
+            <a:endParaRPr lang="en-US" sz="860" dirty="0"/>
+          </a:p>
+        </p:txBody>
+      </p:sp>
+      <p:sp>
+        <p:nvSpPr>
+          <p:cNvPr id="65" name="Shape 63"/>
+          <p:cNvSpPr/>
+          <p:nvPr/>
+        </p:nvSpPr>
+        <p:spPr>
+          <a:xfrm>
+            <a:off x="566928" y="4901184"/>
+            <a:ext cx="9098280" cy="256032"/>
+          </a:xfrm>
+          <a:prstGeom prst="rect">
+            <a:avLst/>
+          </a:prstGeom>
+          <a:solidFill>
+            <a:srgbClr val="F8FAFC"/>
+          </a:solidFill>
+          <a:ln w="12700">
+            <a:solidFill>
+              <a:srgbClr val="D9E2EF"/>
+            </a:solidFill>
+            <a:prstDash val="solid"/>
+          </a:ln>
+        </p:spPr>
+      </p:sp>
+      <p:sp>
+        <p:nvSpPr>
+          <p:cNvPr id="66" name="Text 64"/>
+          <p:cNvSpPr/>
+          <p:nvPr/>
+        </p:nvSpPr>
+        <p:spPr>
+          <a:xfrm>
+            <a:off x="685800" y="4974336"/>
+            <a:ext cx="1691640" cy="164592"/>
+          </a:xfrm>
+          <a:prstGeom prst="rect">
+            <a:avLst/>
+          </a:prstGeom>
+          <a:noFill/>
+          <a:ln/>
+        </p:spPr>
+        <p:txBody>
+          <a:bodyPr wrap="square" lIns="0" tIns="0" rIns="0" bIns="0" rtlCol="0" anchor="ctr">
+            <a:normAutofit/>
+          </a:bodyPr>
+          <a:lstStyle/>
+          <a:p>
+            <a:pPr indent="0" marL="0">
+              <a:buNone/>
+            </a:pPr>
+            <a:r>
+              <a:rPr lang="en-US" sz="860" dirty="0">
+                <a:solidFill>
+                  <a:srgbClr val="16213A"/>
+                </a:solidFill>
+              </a:rPr>
+              <a:t>Yeast</a:t>
+            </a:r>
+            <a:endParaRPr lang="en-US" sz="860" dirty="0"/>
+          </a:p>
+        </p:txBody>
+      </p:sp>
+      <p:sp>
+        <p:nvSpPr>
+          <p:cNvPr id="67" name="Text 65"/>
+          <p:cNvSpPr/>
+          <p:nvPr/>
+        </p:nvSpPr>
+        <p:spPr>
+          <a:xfrm>
+            <a:off x="2743200" y="4974336"/>
+            <a:ext cx="1417320" cy="164592"/>
+          </a:xfrm>
+          <a:prstGeom prst="rect">
+            <a:avLst/>
+          </a:prstGeom>
+          <a:noFill/>
+          <a:ln/>
+        </p:spPr>
+        <p:txBody>
+          <a:bodyPr wrap="square" lIns="0" tIns="0" rIns="0" bIns="0" rtlCol="0" anchor="ctr">
+            <a:normAutofit/>
+          </a:bodyPr>
+          <a:lstStyle/>
+          <a:p>
+            <a:pPr indent="0" marL="0">
+              <a:buNone/>
+            </a:pPr>
+            <a:r>
+              <a:rPr lang="en-US" sz="860" dirty="0">
+                <a:solidFill>
+                  <a:srgbClr val="16213A"/>
+                </a:solidFill>
+              </a:rPr>
+              <a:t>OCSVM</a:t>
+            </a:r>
+            <a:endParaRPr lang="en-US" sz="860" dirty="0"/>
+          </a:p>
+        </p:txBody>
+      </p:sp>
+      <p:sp>
+        <p:nvSpPr>
+          <p:cNvPr id="68" name="Text 66"/>
+          <p:cNvSpPr/>
+          <p:nvPr/>
+        </p:nvSpPr>
+        <p:spPr>
+          <a:xfrm>
+            <a:off x="4572000" y="4974336"/>
+            <a:ext cx="2194560" cy="164592"/>
+          </a:xfrm>
+          <a:prstGeom prst="rect">
+            <a:avLst/>
+          </a:prstGeom>
+          <a:noFill/>
+          <a:ln/>
+        </p:spPr>
+        <p:txBody>
+          <a:bodyPr wrap="square" lIns="0" tIns="0" rIns="0" bIns="0" rtlCol="0" anchor="ctr">
+            <a:normAutofit/>
+          </a:bodyPr>
+          <a:lstStyle/>
+          <a:p>
+            <a:pPr indent="0" marL="0">
+              <a:buNone/>
+            </a:pPr>
+            <a:r>
+              <a:rPr lang="en-US" sz="860" dirty="0">
+                <a:solidFill>
+                  <a:srgbClr val="16213A"/>
+                </a:solidFill>
+              </a:rPr>
+              <a:t>Wine</a:t>
+            </a:r>
+            <a:endParaRPr lang="en-US" sz="860" dirty="0"/>
+          </a:p>
+        </p:txBody>
+      </p:sp>
+      <p:sp>
+        <p:nvSpPr>
+          <p:cNvPr id="69" name="Text 67"/>
+          <p:cNvSpPr/>
+          <p:nvPr/>
+        </p:nvSpPr>
+        <p:spPr>
+          <a:xfrm>
+            <a:off x="7315200" y="4974336"/>
+            <a:ext cx="731520" cy="164592"/>
+          </a:xfrm>
+          <a:prstGeom prst="rect">
+            <a:avLst/>
+          </a:prstGeom>
+          <a:noFill/>
+          <a:ln/>
+        </p:spPr>
+        <p:txBody>
+          <a:bodyPr wrap="square" lIns="0" tIns="0" rIns="0" bIns="0" rtlCol="0" anchor="ctr">
+            <a:normAutofit/>
+          </a:bodyPr>
+          <a:lstStyle/>
+          <a:p>
+            <a:pPr indent="0" marL="0">
+              <a:buNone/>
+            </a:pPr>
+            <a:r>
+              <a:rPr lang="en-US" sz="860" dirty="0">
+                <a:solidFill>
+                  <a:srgbClr val="16213A"/>
+                </a:solidFill>
+              </a:rPr>
+              <a:t>0.025</a:t>
+            </a:r>
+            <a:endParaRPr lang="en-US" sz="860" dirty="0"/>
+          </a:p>
+        </p:txBody>
+      </p:sp>
+      <p:sp>
+        <p:nvSpPr>
+          <p:cNvPr id="70" name="Text 68"/>
+          <p:cNvSpPr/>
+          <p:nvPr/>
+        </p:nvSpPr>
+        <p:spPr>
+          <a:xfrm>
+            <a:off x="8412480" y="4974336"/>
+            <a:ext cx="731520" cy="164592"/>
+          </a:xfrm>
+          <a:prstGeom prst="rect">
+            <a:avLst/>
+          </a:prstGeom>
+          <a:noFill/>
+          <a:ln/>
+        </p:spPr>
+        <p:txBody>
+          <a:bodyPr wrap="square" lIns="0" tIns="0" rIns="0" bIns="0" rtlCol="0" anchor="ctr">
+            <a:normAutofit/>
+          </a:bodyPr>
+          <a:lstStyle/>
+          <a:p>
+            <a:pPr indent="0" marL="0">
+              <a:buNone/>
+            </a:pPr>
+            <a:r>
+              <a:rPr lang="en-US" sz="860" dirty="0">
+                <a:solidFill>
+                  <a:srgbClr val="16213A"/>
+                </a:solidFill>
+              </a:rPr>
+              <a:t>0.846</a:t>
+            </a:r>
+            <a:endParaRPr lang="en-US" sz="860" dirty="0"/>
+          </a:p>
+        </p:txBody>
+      </p:sp>
+      <p:sp>
+        <p:nvSpPr>
+          <p:cNvPr id="71" name="Text 69"/>
+          <p:cNvSpPr/>
+          <p:nvPr/>
+        </p:nvSpPr>
+        <p:spPr>
+          <a:xfrm>
+            <a:off x="7315200" y="5440680"/>
+            <a:ext cx="2011680" cy="256032"/>
+          </a:xfrm>
+          <a:prstGeom prst="rect">
+            <a:avLst/>
+          </a:prstGeom>
+          <a:noFill/>
+          <a:ln/>
+        </p:spPr>
+        <p:txBody>
+          <a:bodyPr wrap="square" lIns="0" tIns="0" rIns="0" bIns="0" rtlCol="0" anchor="ctr"/>
+          <a:lstStyle/>
+          <a:p>
+            <a:pPr indent="0" marL="0">
+              <a:buNone/>
+            </a:pPr>
+            <a:r>
+              <a:rPr lang="en-US" sz="1300" b="1" dirty="0">
+                <a:solidFill>
+                  <a:srgbClr val="16A34A"/>
+                </a:solidFill>
+              </a:rPr>
+              <a:t>Average LODO F1: 0.127</a:t>
+            </a:r>
+            <a:endParaRPr lang="en-US" sz="1300" dirty="0"/>
+          </a:p>
+        </p:txBody>
+      </p:sp>
+      <p:sp>
+        <p:nvSpPr>
+          <p:cNvPr id="72" name="Text 70"/>
+          <p:cNvSpPr/>
+          <p:nvPr/>
+        </p:nvSpPr>
+        <p:spPr>
+          <a:xfrm>
+            <a:off x="594360" y="5760720"/>
+            <a:ext cx="7863840" cy="274320"/>
+          </a:xfrm>
+          <a:prstGeom prst="rect">
+            <a:avLst/>
+          </a:prstGeom>
+          <a:noFill/>
+          <a:ln/>
+        </p:spPr>
+        <p:txBody>
+          <a:bodyPr wrap="square" lIns="0" tIns="0" rIns="0" bIns="0" rtlCol="0" anchor="ctr"/>
+          <a:lstStyle/>
+          <a:p>
+            <a:pPr indent="0" marL="0">
+              <a:buNone/>
+            </a:pPr>
+            <a:r>
+              <a:rPr lang="en-US" sz="1150" dirty="0">
+                <a:solidFill>
+                  <a:srgbClr val="5E6B7A"/>
+                </a:solidFill>
+              </a:rPr>
+              <a:t>Signal: some rare-positive datasets still fail.</a:t>
+            </a:r>
+            <a:endParaRPr lang="en-US" sz="1150" dirty="0"/>
+          </a:p>
+        </p:txBody>
+      </p:sp>
+      <p:sp>
+        <p:nvSpPr>
+          <p:cNvPr id="73" name="Text 71"/>
           <p:cNvSpPr/>
           <p:nvPr/>
         </p:nvSpPr>
@@ -21075,7 +22783,7 @@
                 <a:ea typeface="Aptos Display" pitchFamily="34" charset="-122"/>
                 <a:cs typeface="Aptos Display" pitchFamily="34" charset="-120"/>
               </a:rPr>
-              <a:t>Next Improvements</a:t>
+              <a:t>What The Result Means</a:t>
             </a:r>
             <a:endParaRPr lang="en-US" sz="2100" dirty="0"/>
           </a:p>
@@ -21116,7 +22824,7 @@
                 <a:ea typeface="Aptos" pitchFamily="34" charset="-122"/>
                 <a:cs typeface="Aptos" pitchFamily="34" charset="-120"/>
               </a:rPr>
-              <a:t>The next step is more data for the selector, not more complexity.</a:t>
+              <a:t>The current model is stronger, but it is not the best overall model yet.</a:t>
             </a:r>
             <a:endParaRPr lang="en-US" sz="1600" dirty="0"/>
           </a:p>
@@ -21179,7 +22887,7 @@
                   <a:srgbClr val="16213A"/>
                 </a:solidFill>
               </a:rPr>
-              <a:t>Add more labeled real anomaly datasets</a:t>
+              <a:t>LODO selector F1 is 0.127</a:t>
             </a:r>
             <a:endParaRPr lang="en-US" sz="1500" dirty="0"/>
           </a:p>
@@ -21242,7 +22950,7 @@
                   <a:srgbClr val="16213A"/>
                 </a:solidFill>
               </a:rPr>
-              <a:t>Group native-label and derived-label datasets separately</a:t>
+              <a:t>LODO selector PR-AUC is 0.206</a:t>
             </a:r>
             <a:endParaRPr lang="en-US" sz="1500" dirty="0"/>
           </a:p>
@@ -21305,7 +23013,7 @@
                   <a:srgbClr val="16213A"/>
                 </a:solidFill>
               </a:rPr>
-              <a:t>Train the selector with cross-dataset validation only</a:t>
+              <a:t>LODO selector ROC-AUC is 0.573</a:t>
             </a:r>
             <a:endParaRPr lang="en-US" sz="1500" dirty="0"/>
           </a:p>
@@ -21368,7 +23076,7 @@
                   <a:srgbClr val="16213A"/>
                 </a:solidFill>
               </a:rPr>
-              <a:t>Optimize rare-positive thresholding with PR-AUC and recall-at-k</a:t>
+              <a:t>OCSVM still leads the expanded benchmark</a:t>
             </a:r>
             <a:endParaRPr lang="en-US" sz="1500" dirty="0"/>
           </a:p>
@@ -21500,7 +23208,7 @@
                 <a:ea typeface="Aptos Display" pitchFamily="34" charset="-122"/>
                 <a:cs typeface="Aptos Display" pitchFamily="34" charset="-120"/>
               </a:rPr>
-              <a:t>Conclusion</a:t>
+              <a:t>Updated Engineering Decision</a:t>
             </a:r>
             <a:endParaRPr lang="en-US" sz="2100" dirty="0"/>
           </a:p>
@@ -21541,7 +23249,7 @@
                 <a:ea typeface="Aptos" pitchFamily="34" charset="-122"/>
                 <a:cs typeface="Aptos" pitchFamily="34" charset="-120"/>
               </a:rPr>
-              <a:t>AutoAD+ is a strong project prototype, but not a finished universal detector.</a:t>
+              <a:t>Keep KNN distance and the learned selector, but keep benchmarking honestly.</a:t>
             </a:r>
             <a:endParaRPr lang="en-US" sz="1600" dirty="0"/>
           </a:p>
@@ -21604,7 +23312,7 @@
                   <a:srgbClr val="16213A"/>
                 </a:solidFill>
               </a:rPr>
-              <a:t>Pipeline is implemented end to end</a:t>
+              <a:t>Include KNN distance in selector profiles</a:t>
             </a:r>
             <a:endParaRPr lang="en-US" sz="1500" dirty="0"/>
           </a:p>
@@ -21667,7 +23375,7 @@
                   <a:srgbClr val="16213A"/>
                 </a:solidFill>
               </a:rPr>
-              <a:t>Synthetic evaluation shows a modest ensemble advantage</a:t>
+              <a:t>Use expanded 10-dataset LODO as the main generalization check</a:t>
             </a:r>
             <a:endParaRPr lang="en-US" sz="1500" dirty="0"/>
           </a:p>
@@ -21730,7 +23438,7 @@
                   <a:srgbClr val="16213A"/>
                 </a:solidFill>
               </a:rPr>
-              <a:t>Calibration improves real-data F1</a:t>
+              <a:t>Report OCSVM as the current strongest baseline</a:t>
             </a:r>
             <a:endParaRPr lang="en-US" sz="1500" dirty="0"/>
           </a:p>
@@ -21793,7 +23501,7 @@
                   <a:srgbClr val="16213A"/>
                 </a:solidFill>
               </a:rPr>
-              <a:t>Learned selector needs more real datasets before it can generalize</a:t>
+              <a:t>Target rare-positive failures in Wine, Ecoli, and Yeast</a:t>
             </a:r>
             <a:endParaRPr lang="en-US" sz="1500" dirty="0"/>
           </a:p>
@@ -22592,6 +24300,856 @@
     <p:bg>
       <p:bgPr>
         <a:solidFill>
+          <a:srgbClr val="FFFFFF"/>
+        </a:solidFill>
+      </p:bgPr>
+    </p:bg>
+    <p:spTree>
+      <p:nvGrpSpPr>
+        <p:cNvPr id="1" name=""/>
+        <p:cNvGrpSpPr/>
+        <p:nvPr/>
+      </p:nvGrpSpPr>
+      <p:grpSpPr>
+        <a:xfrm>
+          <a:off x="0" y="0"/>
+          <a:ext cx="0" cy="0"/>
+          <a:chOff x="0" y="0"/>
+          <a:chExt cx="0" cy="0"/>
+        </a:xfrm>
+      </p:grpSpPr>
+      <p:sp>
+        <p:nvSpPr>
+          <p:cNvPr id="2" name="Shape 0"/>
+          <p:cNvSpPr/>
+          <p:nvPr/>
+        </p:nvSpPr>
+        <p:spPr>
+          <a:xfrm>
+            <a:off x="0" y="0"/>
+            <a:ext cx="146304" cy="6858000"/>
+          </a:xfrm>
+          <a:prstGeom prst="rect">
+            <a:avLst/>
+          </a:prstGeom>
+          <a:solidFill>
+            <a:srgbClr val="2563EB"/>
+          </a:solidFill>
+          <a:ln w="12700">
+            <a:solidFill>
+              <a:srgbClr val="2563EB"/>
+            </a:solidFill>
+            <a:prstDash val="solid"/>
+          </a:ln>
+        </p:spPr>
+      </p:sp>
+      <p:sp>
+        <p:nvSpPr>
+          <p:cNvPr id="3" name="Text 1"/>
+          <p:cNvSpPr/>
+          <p:nvPr/>
+        </p:nvSpPr>
+        <p:spPr>
+          <a:xfrm>
+            <a:off x="594360" y="347472"/>
+            <a:ext cx="6217920" cy="365760"/>
+          </a:xfrm>
+          <a:prstGeom prst="rect">
+            <a:avLst/>
+          </a:prstGeom>
+          <a:noFill/>
+          <a:ln/>
+        </p:spPr>
+        <p:txBody>
+          <a:bodyPr wrap="square" lIns="0" tIns="0" rIns="0" bIns="0" rtlCol="0" anchor="ctr"/>
+          <a:lstStyle/>
+          <a:p>
+            <a:pPr indent="0" marL="0">
+              <a:buNone/>
+            </a:pPr>
+            <a:r>
+              <a:rPr lang="en-US" sz="2100" b="1" dirty="0">
+                <a:solidFill>
+                  <a:srgbClr val="16213A"/>
+                </a:solidFill>
+                <a:latin typeface="Aptos Display" pitchFamily="34" charset="0"/>
+                <a:ea typeface="Aptos Display" pitchFamily="34" charset="-122"/>
+                <a:cs typeface="Aptos Display" pitchFamily="34" charset="-120"/>
+              </a:rPr>
+              <a:t>Next Improvements</a:t>
+            </a:r>
+            <a:endParaRPr lang="en-US" sz="2100" dirty="0"/>
+          </a:p>
+        </p:txBody>
+      </p:sp>
+      <p:sp>
+        <p:nvSpPr>
+          <p:cNvPr id="4" name="Text 2"/>
+          <p:cNvSpPr/>
+          <p:nvPr/>
+        </p:nvSpPr>
+        <p:spPr>
+          <a:xfrm>
+            <a:off x="594360" y="868680"/>
+            <a:ext cx="7680960" cy="502920"/>
+          </a:xfrm>
+          <a:prstGeom prst="rect">
+            <a:avLst/>
+          </a:prstGeom>
+          <a:noFill/>
+          <a:ln/>
+        </p:spPr>
+        <p:txBody>
+          <a:bodyPr wrap="square" lIns="0" tIns="0" rIns="0" bIns="0" rtlCol="0" anchor="ctr">
+            <a:normAutofit/>
+          </a:bodyPr>
+          <a:lstStyle/>
+          <a:p>
+            <a:pPr indent="0" marL="0">
+              <a:buNone/>
+            </a:pPr>
+            <a:r>
+              <a:rPr lang="en-US" sz="1600" dirty="0">
+                <a:solidFill>
+                  <a:srgbClr val="5E6B7A"/>
+                </a:solidFill>
+                <a:latin typeface="Aptos" pitchFamily="34" charset="0"/>
+                <a:ea typeface="Aptos" pitchFamily="34" charset="-122"/>
+                <a:cs typeface="Aptos" pitchFamily="34" charset="-120"/>
+              </a:rPr>
+              <a:t>The next step is more data for the selector, not more complexity.</a:t>
+            </a:r>
+            <a:endParaRPr lang="en-US" sz="1600" dirty="0"/>
+          </a:p>
+        </p:txBody>
+      </p:sp>
+      <p:sp>
+        <p:nvSpPr>
+          <p:cNvPr id="5" name="Shape 3"/>
+          <p:cNvSpPr/>
+          <p:nvPr/>
+        </p:nvSpPr>
+        <p:spPr>
+          <a:xfrm>
+            <a:off x="822960" y="1764792"/>
+            <a:ext cx="128016" cy="128016"/>
+          </a:xfrm>
+          <a:prstGeom prst="ellipse">
+            <a:avLst/>
+          </a:prstGeom>
+          <a:solidFill>
+            <a:srgbClr val="2563EB"/>
+          </a:solidFill>
+          <a:ln w="12700">
+            <a:solidFill>
+              <a:srgbClr val="2563EB"/>
+            </a:solidFill>
+            <a:prstDash val="solid"/>
+          </a:ln>
+        </p:spPr>
+      </p:sp>
+      <p:sp>
+        <p:nvSpPr>
+          <p:cNvPr id="6" name="Text 4"/>
+          <p:cNvSpPr/>
+          <p:nvPr/>
+        </p:nvSpPr>
+        <p:spPr>
+          <a:xfrm>
+            <a:off x="1115568" y="1691640"/>
+            <a:ext cx="7132320" cy="347472"/>
+          </a:xfrm>
+          <a:prstGeom prst="rect">
+            <a:avLst/>
+          </a:prstGeom>
+          <a:noFill/>
+          <a:ln/>
+        </p:spPr>
+        <p:txBody>
+          <a:bodyPr wrap="square" lIns="0" tIns="0" rIns="0" bIns="0" rtlCol="0" anchor="ctr">
+            <a:normAutofit/>
+          </a:bodyPr>
+          <a:lstStyle/>
+          <a:p>
+            <a:pPr indent="0" marL="0">
+              <a:buNone/>
+            </a:pPr>
+            <a:r>
+              <a:rPr lang="en-US" sz="1500" dirty="0">
+                <a:solidFill>
+                  <a:srgbClr val="16213A"/>
+                </a:solidFill>
+              </a:rPr>
+              <a:t>Add more labeled real anomaly datasets</a:t>
+            </a:r>
+            <a:endParaRPr lang="en-US" sz="1500" dirty="0"/>
+          </a:p>
+        </p:txBody>
+      </p:sp>
+      <p:sp>
+        <p:nvSpPr>
+          <p:cNvPr id="7" name="Shape 5"/>
+          <p:cNvSpPr/>
+          <p:nvPr/>
+        </p:nvSpPr>
+        <p:spPr>
+          <a:xfrm>
+            <a:off x="822960" y="2423160"/>
+            <a:ext cx="128016" cy="128016"/>
+          </a:xfrm>
+          <a:prstGeom prst="ellipse">
+            <a:avLst/>
+          </a:prstGeom>
+          <a:solidFill>
+            <a:srgbClr val="2563EB"/>
+          </a:solidFill>
+          <a:ln w="12700">
+            <a:solidFill>
+              <a:srgbClr val="2563EB"/>
+            </a:solidFill>
+            <a:prstDash val="solid"/>
+          </a:ln>
+        </p:spPr>
+      </p:sp>
+      <p:sp>
+        <p:nvSpPr>
+          <p:cNvPr id="8" name="Text 6"/>
+          <p:cNvSpPr/>
+          <p:nvPr/>
+        </p:nvSpPr>
+        <p:spPr>
+          <a:xfrm>
+            <a:off x="1115568" y="2350008"/>
+            <a:ext cx="7132320" cy="347472"/>
+          </a:xfrm>
+          <a:prstGeom prst="rect">
+            <a:avLst/>
+          </a:prstGeom>
+          <a:noFill/>
+          <a:ln/>
+        </p:spPr>
+        <p:txBody>
+          <a:bodyPr wrap="square" lIns="0" tIns="0" rIns="0" bIns="0" rtlCol="0" anchor="ctr">
+            <a:normAutofit/>
+          </a:bodyPr>
+          <a:lstStyle/>
+          <a:p>
+            <a:pPr indent="0" marL="0">
+              <a:buNone/>
+            </a:pPr>
+            <a:r>
+              <a:rPr lang="en-US" sz="1500" dirty="0">
+                <a:solidFill>
+                  <a:srgbClr val="16213A"/>
+                </a:solidFill>
+              </a:rPr>
+              <a:t>Group native-label and derived-label datasets separately</a:t>
+            </a:r>
+            <a:endParaRPr lang="en-US" sz="1500" dirty="0"/>
+          </a:p>
+        </p:txBody>
+      </p:sp>
+      <p:sp>
+        <p:nvSpPr>
+          <p:cNvPr id="9" name="Shape 7"/>
+          <p:cNvSpPr/>
+          <p:nvPr/>
+        </p:nvSpPr>
+        <p:spPr>
+          <a:xfrm>
+            <a:off x="822960" y="3081528"/>
+            <a:ext cx="128016" cy="128016"/>
+          </a:xfrm>
+          <a:prstGeom prst="ellipse">
+            <a:avLst/>
+          </a:prstGeom>
+          <a:solidFill>
+            <a:srgbClr val="2563EB"/>
+          </a:solidFill>
+          <a:ln w="12700">
+            <a:solidFill>
+              <a:srgbClr val="2563EB"/>
+            </a:solidFill>
+            <a:prstDash val="solid"/>
+          </a:ln>
+        </p:spPr>
+      </p:sp>
+      <p:sp>
+        <p:nvSpPr>
+          <p:cNvPr id="10" name="Text 8"/>
+          <p:cNvSpPr/>
+          <p:nvPr/>
+        </p:nvSpPr>
+        <p:spPr>
+          <a:xfrm>
+            <a:off x="1115568" y="3008376"/>
+            <a:ext cx="7132320" cy="347472"/>
+          </a:xfrm>
+          <a:prstGeom prst="rect">
+            <a:avLst/>
+          </a:prstGeom>
+          <a:noFill/>
+          <a:ln/>
+        </p:spPr>
+        <p:txBody>
+          <a:bodyPr wrap="square" lIns="0" tIns="0" rIns="0" bIns="0" rtlCol="0" anchor="ctr">
+            <a:normAutofit/>
+          </a:bodyPr>
+          <a:lstStyle/>
+          <a:p>
+            <a:pPr indent="0" marL="0">
+              <a:buNone/>
+            </a:pPr>
+            <a:r>
+              <a:rPr lang="en-US" sz="1500" dirty="0">
+                <a:solidFill>
+                  <a:srgbClr val="16213A"/>
+                </a:solidFill>
+              </a:rPr>
+              <a:t>Train the selector with cross-dataset validation only</a:t>
+            </a:r>
+            <a:endParaRPr lang="en-US" sz="1500" dirty="0"/>
+          </a:p>
+        </p:txBody>
+      </p:sp>
+      <p:sp>
+        <p:nvSpPr>
+          <p:cNvPr id="11" name="Shape 9"/>
+          <p:cNvSpPr/>
+          <p:nvPr/>
+        </p:nvSpPr>
+        <p:spPr>
+          <a:xfrm>
+            <a:off x="822960" y="3739896"/>
+            <a:ext cx="128016" cy="128016"/>
+          </a:xfrm>
+          <a:prstGeom prst="ellipse">
+            <a:avLst/>
+          </a:prstGeom>
+          <a:solidFill>
+            <a:srgbClr val="2563EB"/>
+          </a:solidFill>
+          <a:ln w="12700">
+            <a:solidFill>
+              <a:srgbClr val="2563EB"/>
+            </a:solidFill>
+            <a:prstDash val="solid"/>
+          </a:ln>
+        </p:spPr>
+      </p:sp>
+      <p:sp>
+        <p:nvSpPr>
+          <p:cNvPr id="12" name="Text 10"/>
+          <p:cNvSpPr/>
+          <p:nvPr/>
+        </p:nvSpPr>
+        <p:spPr>
+          <a:xfrm>
+            <a:off x="1115568" y="3666744"/>
+            <a:ext cx="7132320" cy="347472"/>
+          </a:xfrm>
+          <a:prstGeom prst="rect">
+            <a:avLst/>
+          </a:prstGeom>
+          <a:noFill/>
+          <a:ln/>
+        </p:spPr>
+        <p:txBody>
+          <a:bodyPr wrap="square" lIns="0" tIns="0" rIns="0" bIns="0" rtlCol="0" anchor="ctr">
+            <a:normAutofit/>
+          </a:bodyPr>
+          <a:lstStyle/>
+          <a:p>
+            <a:pPr indent="0" marL="0">
+              <a:buNone/>
+            </a:pPr>
+            <a:r>
+              <a:rPr lang="en-US" sz="1500" dirty="0">
+                <a:solidFill>
+                  <a:srgbClr val="16213A"/>
+                </a:solidFill>
+              </a:rPr>
+              <a:t>Optimize rare-positive thresholding with PR-AUC and recall-at-k</a:t>
+            </a:r>
+            <a:endParaRPr lang="en-US" sz="1500" dirty="0"/>
+          </a:p>
+        </p:txBody>
+      </p:sp>
+      <p:sp>
+        <p:nvSpPr>
+          <p:cNvPr id="13" name="Text 11"/>
+          <p:cNvSpPr/>
+          <p:nvPr/>
+        </p:nvSpPr>
+        <p:spPr>
+          <a:xfrm>
+            <a:off x="594360" y="6473952"/>
+            <a:ext cx="3200400" cy="182880"/>
+          </a:xfrm>
+          <a:prstGeom prst="rect">
+            <a:avLst/>
+          </a:prstGeom>
+          <a:noFill/>
+          <a:ln/>
+        </p:spPr>
+        <p:txBody>
+          <a:bodyPr wrap="square" lIns="0" tIns="0" rIns="0" bIns="0" rtlCol="0" anchor="ctr"/>
+          <a:lstStyle/>
+          <a:p>
+            <a:pPr indent="0" marL="0">
+              <a:buNone/>
+            </a:pPr>
+            <a:r>
+              <a:rPr lang="en-US" sz="700" dirty="0">
+                <a:solidFill>
+                  <a:srgbClr val="8A95A5"/>
+                </a:solidFill>
+              </a:rPr>
+              <a:t>AutoAD+ project | 40</a:t>
+            </a:r>
+            <a:endParaRPr lang="en-US" sz="700" dirty="0"/>
+          </a:p>
+        </p:txBody>
+      </p:sp>
+    </p:spTree>
+  </p:cSld>
+  <p:clrMapOvr>
+    <a:masterClrMapping/>
+  </p:clrMapOvr>
+</p:sld>
+</file>
+
+<file path=ppt/slides/slide41.xml><?xml version="1.0" encoding="utf-8"?>
+<p:sld xmlns:a="http://schemas.openxmlformats.org/drawingml/2006/main" xmlns:r="http://schemas.openxmlformats.org/officeDocument/2006/relationships" xmlns:p="http://schemas.openxmlformats.org/presentationml/2006/main">
+  <p:cSld name="Slide 41">
+    <p:bg>
+      <p:bgPr>
+        <a:solidFill>
+          <a:srgbClr val="FFFFFF"/>
+        </a:solidFill>
+      </p:bgPr>
+    </p:bg>
+    <p:spTree>
+      <p:nvGrpSpPr>
+        <p:cNvPr id="1" name=""/>
+        <p:cNvGrpSpPr/>
+        <p:nvPr/>
+      </p:nvGrpSpPr>
+      <p:grpSpPr>
+        <a:xfrm>
+          <a:off x="0" y="0"/>
+          <a:ext cx="0" cy="0"/>
+          <a:chOff x="0" y="0"/>
+          <a:chExt cx="0" cy="0"/>
+        </a:xfrm>
+      </p:grpSpPr>
+      <p:sp>
+        <p:nvSpPr>
+          <p:cNvPr id="2" name="Shape 0"/>
+          <p:cNvSpPr/>
+          <p:nvPr/>
+        </p:nvSpPr>
+        <p:spPr>
+          <a:xfrm>
+            <a:off x="0" y="0"/>
+            <a:ext cx="146304" cy="6858000"/>
+          </a:xfrm>
+          <a:prstGeom prst="rect">
+            <a:avLst/>
+          </a:prstGeom>
+          <a:solidFill>
+            <a:srgbClr val="2563EB"/>
+          </a:solidFill>
+          <a:ln w="12700">
+            <a:solidFill>
+              <a:srgbClr val="2563EB"/>
+            </a:solidFill>
+            <a:prstDash val="solid"/>
+          </a:ln>
+        </p:spPr>
+      </p:sp>
+      <p:sp>
+        <p:nvSpPr>
+          <p:cNvPr id="3" name="Text 1"/>
+          <p:cNvSpPr/>
+          <p:nvPr/>
+        </p:nvSpPr>
+        <p:spPr>
+          <a:xfrm>
+            <a:off x="594360" y="347472"/>
+            <a:ext cx="6217920" cy="365760"/>
+          </a:xfrm>
+          <a:prstGeom prst="rect">
+            <a:avLst/>
+          </a:prstGeom>
+          <a:noFill/>
+          <a:ln/>
+        </p:spPr>
+        <p:txBody>
+          <a:bodyPr wrap="square" lIns="0" tIns="0" rIns="0" bIns="0" rtlCol="0" anchor="ctr"/>
+          <a:lstStyle/>
+          <a:p>
+            <a:pPr indent="0" marL="0">
+              <a:buNone/>
+            </a:pPr>
+            <a:r>
+              <a:rPr lang="en-US" sz="2100" b="1" dirty="0">
+                <a:solidFill>
+                  <a:srgbClr val="16213A"/>
+                </a:solidFill>
+                <a:latin typeface="Aptos Display" pitchFamily="34" charset="0"/>
+                <a:ea typeface="Aptos Display" pitchFamily="34" charset="-122"/>
+                <a:cs typeface="Aptos Display" pitchFamily="34" charset="-120"/>
+              </a:rPr>
+              <a:t>Conclusion</a:t>
+            </a:r>
+            <a:endParaRPr lang="en-US" sz="2100" dirty="0"/>
+          </a:p>
+        </p:txBody>
+      </p:sp>
+      <p:sp>
+        <p:nvSpPr>
+          <p:cNvPr id="4" name="Text 2"/>
+          <p:cNvSpPr/>
+          <p:nvPr/>
+        </p:nvSpPr>
+        <p:spPr>
+          <a:xfrm>
+            <a:off x="594360" y="868680"/>
+            <a:ext cx="7680960" cy="502920"/>
+          </a:xfrm>
+          <a:prstGeom prst="rect">
+            <a:avLst/>
+          </a:prstGeom>
+          <a:noFill/>
+          <a:ln/>
+        </p:spPr>
+        <p:txBody>
+          <a:bodyPr wrap="square" lIns="0" tIns="0" rIns="0" bIns="0" rtlCol="0" anchor="ctr">
+            <a:normAutofit/>
+          </a:bodyPr>
+          <a:lstStyle/>
+          <a:p>
+            <a:pPr indent="0" marL="0">
+              <a:buNone/>
+            </a:pPr>
+            <a:r>
+              <a:rPr lang="en-US" sz="1600" dirty="0">
+                <a:solidFill>
+                  <a:srgbClr val="5E6B7A"/>
+                </a:solidFill>
+                <a:latin typeface="Aptos" pitchFamily="34" charset="0"/>
+                <a:ea typeface="Aptos" pitchFamily="34" charset="-122"/>
+                <a:cs typeface="Aptos" pitchFamily="34" charset="-120"/>
+              </a:rPr>
+              <a:t>AutoAD+ is a strong project prototype, but not a finished universal detector.</a:t>
+            </a:r>
+            <a:endParaRPr lang="en-US" sz="1600" dirty="0"/>
+          </a:p>
+        </p:txBody>
+      </p:sp>
+      <p:sp>
+        <p:nvSpPr>
+          <p:cNvPr id="5" name="Shape 3"/>
+          <p:cNvSpPr/>
+          <p:nvPr/>
+        </p:nvSpPr>
+        <p:spPr>
+          <a:xfrm>
+            <a:off x="822960" y="1764792"/>
+            <a:ext cx="128016" cy="128016"/>
+          </a:xfrm>
+          <a:prstGeom prst="ellipse">
+            <a:avLst/>
+          </a:prstGeom>
+          <a:solidFill>
+            <a:srgbClr val="2563EB"/>
+          </a:solidFill>
+          <a:ln w="12700">
+            <a:solidFill>
+              <a:srgbClr val="2563EB"/>
+            </a:solidFill>
+            <a:prstDash val="solid"/>
+          </a:ln>
+        </p:spPr>
+      </p:sp>
+      <p:sp>
+        <p:nvSpPr>
+          <p:cNvPr id="6" name="Text 4"/>
+          <p:cNvSpPr/>
+          <p:nvPr/>
+        </p:nvSpPr>
+        <p:spPr>
+          <a:xfrm>
+            <a:off x="1115568" y="1691640"/>
+            <a:ext cx="7132320" cy="347472"/>
+          </a:xfrm>
+          <a:prstGeom prst="rect">
+            <a:avLst/>
+          </a:prstGeom>
+          <a:noFill/>
+          <a:ln/>
+        </p:spPr>
+        <p:txBody>
+          <a:bodyPr wrap="square" lIns="0" tIns="0" rIns="0" bIns="0" rtlCol="0" anchor="ctr">
+            <a:normAutofit/>
+          </a:bodyPr>
+          <a:lstStyle/>
+          <a:p>
+            <a:pPr indent="0" marL="0">
+              <a:buNone/>
+            </a:pPr>
+            <a:r>
+              <a:rPr lang="en-US" sz="1500" dirty="0">
+                <a:solidFill>
+                  <a:srgbClr val="16213A"/>
+                </a:solidFill>
+              </a:rPr>
+              <a:t>Pipeline is implemented end to end</a:t>
+            </a:r>
+            <a:endParaRPr lang="en-US" sz="1500" dirty="0"/>
+          </a:p>
+        </p:txBody>
+      </p:sp>
+      <p:sp>
+        <p:nvSpPr>
+          <p:cNvPr id="7" name="Shape 5"/>
+          <p:cNvSpPr/>
+          <p:nvPr/>
+        </p:nvSpPr>
+        <p:spPr>
+          <a:xfrm>
+            <a:off x="822960" y="2423160"/>
+            <a:ext cx="128016" cy="128016"/>
+          </a:xfrm>
+          <a:prstGeom prst="ellipse">
+            <a:avLst/>
+          </a:prstGeom>
+          <a:solidFill>
+            <a:srgbClr val="2563EB"/>
+          </a:solidFill>
+          <a:ln w="12700">
+            <a:solidFill>
+              <a:srgbClr val="2563EB"/>
+            </a:solidFill>
+            <a:prstDash val="solid"/>
+          </a:ln>
+        </p:spPr>
+      </p:sp>
+      <p:sp>
+        <p:nvSpPr>
+          <p:cNvPr id="8" name="Text 6"/>
+          <p:cNvSpPr/>
+          <p:nvPr/>
+        </p:nvSpPr>
+        <p:spPr>
+          <a:xfrm>
+            <a:off x="1115568" y="2350008"/>
+            <a:ext cx="7132320" cy="347472"/>
+          </a:xfrm>
+          <a:prstGeom prst="rect">
+            <a:avLst/>
+          </a:prstGeom>
+          <a:noFill/>
+          <a:ln/>
+        </p:spPr>
+        <p:txBody>
+          <a:bodyPr wrap="square" lIns="0" tIns="0" rIns="0" bIns="0" rtlCol="0" anchor="ctr">
+            <a:normAutofit/>
+          </a:bodyPr>
+          <a:lstStyle/>
+          <a:p>
+            <a:pPr indent="0" marL="0">
+              <a:buNone/>
+            </a:pPr>
+            <a:r>
+              <a:rPr lang="en-US" sz="1500" dirty="0">
+                <a:solidFill>
+                  <a:srgbClr val="16213A"/>
+                </a:solidFill>
+              </a:rPr>
+              <a:t>LODO selector reaches 0.127 F1</a:t>
+            </a:r>
+            <a:endParaRPr lang="en-US" sz="1500" dirty="0"/>
+          </a:p>
+        </p:txBody>
+      </p:sp>
+      <p:sp>
+        <p:nvSpPr>
+          <p:cNvPr id="9" name="Shape 7"/>
+          <p:cNvSpPr/>
+          <p:nvPr/>
+        </p:nvSpPr>
+        <p:spPr>
+          <a:xfrm>
+            <a:off x="822960" y="3081528"/>
+            <a:ext cx="128016" cy="128016"/>
+          </a:xfrm>
+          <a:prstGeom prst="ellipse">
+            <a:avLst/>
+          </a:prstGeom>
+          <a:solidFill>
+            <a:srgbClr val="2563EB"/>
+          </a:solidFill>
+          <a:ln w="12700">
+            <a:solidFill>
+              <a:srgbClr val="2563EB"/>
+            </a:solidFill>
+            <a:prstDash val="solid"/>
+          </a:ln>
+        </p:spPr>
+      </p:sp>
+      <p:sp>
+        <p:nvSpPr>
+          <p:cNvPr id="10" name="Text 8"/>
+          <p:cNvSpPr/>
+          <p:nvPr/>
+        </p:nvSpPr>
+        <p:spPr>
+          <a:xfrm>
+            <a:off x="1115568" y="3008376"/>
+            <a:ext cx="7132320" cy="347472"/>
+          </a:xfrm>
+          <a:prstGeom prst="rect">
+            <a:avLst/>
+          </a:prstGeom>
+          <a:noFill/>
+          <a:ln/>
+        </p:spPr>
+        <p:txBody>
+          <a:bodyPr wrap="square" lIns="0" tIns="0" rIns="0" bIns="0" rtlCol="0" anchor="ctr">
+            <a:normAutofit/>
+          </a:bodyPr>
+          <a:lstStyle/>
+          <a:p>
+            <a:pPr indent="0" marL="0">
+              <a:buNone/>
+            </a:pPr>
+            <a:r>
+              <a:rPr lang="en-US" sz="1500" dirty="0">
+                <a:solidFill>
+                  <a:srgbClr val="16213A"/>
+                </a:solidFill>
+              </a:rPr>
+              <a:t>KNN distance is useful on some datasets</a:t>
+            </a:r>
+            <a:endParaRPr lang="en-US" sz="1500" dirty="0"/>
+          </a:p>
+        </p:txBody>
+      </p:sp>
+      <p:sp>
+        <p:nvSpPr>
+          <p:cNvPr id="11" name="Shape 9"/>
+          <p:cNvSpPr/>
+          <p:nvPr/>
+        </p:nvSpPr>
+        <p:spPr>
+          <a:xfrm>
+            <a:off x="822960" y="3739896"/>
+            <a:ext cx="128016" cy="128016"/>
+          </a:xfrm>
+          <a:prstGeom prst="ellipse">
+            <a:avLst/>
+          </a:prstGeom>
+          <a:solidFill>
+            <a:srgbClr val="2563EB"/>
+          </a:solidFill>
+          <a:ln w="12700">
+            <a:solidFill>
+              <a:srgbClr val="2563EB"/>
+            </a:solidFill>
+            <a:prstDash val="solid"/>
+          </a:ln>
+        </p:spPr>
+      </p:sp>
+      <p:sp>
+        <p:nvSpPr>
+          <p:cNvPr id="12" name="Text 10"/>
+          <p:cNvSpPr/>
+          <p:nvPr/>
+        </p:nvSpPr>
+        <p:spPr>
+          <a:xfrm>
+            <a:off x="1115568" y="3666744"/>
+            <a:ext cx="7132320" cy="347472"/>
+          </a:xfrm>
+          <a:prstGeom prst="rect">
+            <a:avLst/>
+          </a:prstGeom>
+          <a:noFill/>
+          <a:ln/>
+        </p:spPr>
+        <p:txBody>
+          <a:bodyPr wrap="square" lIns="0" tIns="0" rIns="0" bIns="0" rtlCol="0" anchor="ctr">
+            <a:normAutofit/>
+          </a:bodyPr>
+          <a:lstStyle/>
+          <a:p>
+            <a:pPr indent="0" marL="0">
+              <a:buNone/>
+            </a:pPr>
+            <a:r>
+              <a:rPr lang="en-US" sz="1500" dirty="0">
+                <a:solidFill>
+                  <a:srgbClr val="16213A"/>
+                </a:solidFill>
+              </a:rPr>
+              <a:t>OCSVM still wins average real-data F1</a:t>
+            </a:r>
+            <a:endParaRPr lang="en-US" sz="1500" dirty="0"/>
+          </a:p>
+        </p:txBody>
+      </p:sp>
+      <p:sp>
+        <p:nvSpPr>
+          <p:cNvPr id="13" name="Text 11"/>
+          <p:cNvSpPr/>
+          <p:nvPr/>
+        </p:nvSpPr>
+        <p:spPr>
+          <a:xfrm>
+            <a:off x="594360" y="6473952"/>
+            <a:ext cx="3200400" cy="182880"/>
+          </a:xfrm>
+          <a:prstGeom prst="rect">
+            <a:avLst/>
+          </a:prstGeom>
+          <a:noFill/>
+          <a:ln/>
+        </p:spPr>
+        <p:txBody>
+          <a:bodyPr wrap="square" lIns="0" tIns="0" rIns="0" bIns="0" rtlCol="0" anchor="ctr"/>
+          <a:lstStyle/>
+          <a:p>
+            <a:pPr indent="0" marL="0">
+              <a:buNone/>
+            </a:pPr>
+            <a:r>
+              <a:rPr lang="en-US" sz="700" dirty="0">
+                <a:solidFill>
+                  <a:srgbClr val="8A95A5"/>
+                </a:solidFill>
+              </a:rPr>
+              <a:t>AutoAD+ project | 41</a:t>
+            </a:r>
+            <a:endParaRPr lang="en-US" sz="700" dirty="0"/>
+          </a:p>
+        </p:txBody>
+      </p:sp>
+    </p:spTree>
+  </p:cSld>
+  <p:clrMapOvr>
+    <a:masterClrMapping/>
+  </p:clrMapOvr>
+</p:sld>
+</file>
+
+<file path=ppt/slides/slide42.xml><?xml version="1.0" encoding="utf-8"?>
+<p:sld xmlns:a="http://schemas.openxmlformats.org/drawingml/2006/main" xmlns:r="http://schemas.openxmlformats.org/officeDocument/2006/relationships" xmlns:p="http://schemas.openxmlformats.org/presentationml/2006/main">
+  <p:cSld name="Slide 42">
+    <p:bg>
+      <p:bgPr>
+        <a:solidFill>
           <a:srgbClr val="F8FAFC"/>
         </a:solidFill>
       </p:bgPr>
@@ -22863,7 +25421,7 @@
                   <a:srgbClr val="16213A"/>
                 </a:solidFill>
               </a:rPr>
-              <a:t>Real calibrated</a:t>
+              <a:t>LODO selector</a:t>
             </a:r>
             <a:endParaRPr lang="en-US" sz="1050" dirty="0"/>
           </a:p>
@@ -22903,7 +25461,7 @@
         <p:spPr>
           <a:xfrm>
             <a:off x="9189720" y="2834640"/>
-            <a:ext cx="206746" cy="310896"/>
+            <a:ext cx="220645" cy="310896"/>
           </a:xfrm>
           <a:prstGeom prst="rect">
             <a:avLst/>
@@ -22927,7 +25485,7 @@
         </p:nvSpPr>
         <p:spPr>
           <a:xfrm>
-            <a:off x="9460474" y="2862072"/>
+            <a:off x="9474373" y="2862072"/>
             <a:ext cx="640080" cy="182880"/>
           </a:xfrm>
           <a:prstGeom prst="rect">
@@ -22949,7 +25507,7 @@
                   <a:srgbClr val="16213A"/>
                 </a:solidFill>
               </a:rPr>
-              <a:t>0.119</a:t>
+              <a:t>0.127</a:t>
             </a:r>
             <a:endParaRPr lang="en-US" sz="900" dirty="0"/>
           </a:p>
@@ -22985,7 +25543,7 @@
                   <a:srgbClr val="8A95A5"/>
                 </a:solidFill>
               </a:rPr>
-              <a:t>AutoAD+ project | 40</a:t>
+              <a:t>AutoAD+ project | 42</a:t>
             </a:r>
             <a:endParaRPr lang="en-US" sz="700" dirty="0"/>
           </a:p>
@@ -24161,7 +26719,7 @@
                   <a:srgbClr val="16213A"/>
                 </a:solidFill>
               </a:rPr>
-              <a:t>LOF for local density anomalies</a:t>
+              <a:t>LOF and KNN distance for neighborhood anomalies</a:t>
             </a:r>
             <a:endParaRPr lang="en-US" sz="1500" dirty="0"/>
           </a:p>
@@ -25011,7 +27569,7 @@
                   <a:srgbClr val="16213A"/>
                 </a:solidFill>
               </a:rPr>
-              <a:t>Local density score</a:t>
+              <a:t>Local density and KNN-distance score</a:t>
             </a:r>
             <a:endParaRPr lang="en-US" sz="1500" dirty="0"/>
           </a:p>
